--- a/pregrado/s11/presentacion/S11B.pptx
+++ b/pregrado/s11/presentacion/S11B.pptx
@@ -1,31 +1,35 @@
 
 <file path=ppt/presentation.xml><?xml version="1.0" encoding="utf-8"?>
-<p:presentation xmlns:a="http://schemas.openxmlformats.org/drawingml/2006/main" xmlns:r="http://schemas.openxmlformats.org/officeDocument/2006/relationships" xmlns:p="http://schemas.openxmlformats.org/presentationml/2006/main" saveSubsetFonts="1" autoCompressPictures="0">
+<p:presentation xmlns:a="http://schemas.openxmlformats.org/drawingml/2006/main" xmlns:r="http://schemas.openxmlformats.org/officeDocument/2006/relationships" xmlns:p="http://schemas.openxmlformats.org/presentationml/2006/main" embedTrueTypeFonts="1" saveSubsetFonts="1" autoCompressPictures="0">
   <p:sldMasterIdLst>
     <p:sldMasterId id="2147483648" r:id="rId1"/>
   </p:sldMasterIdLst>
   <p:sldIdLst>
     <p:sldId id="256" r:id="rId7"/>
     <p:sldId id="257" r:id="rId9"/>
-    <p:sldId id="287" r:id="rId22"/>
     <p:sldId id="280" r:id="rId32"/>
     <p:sldId id="282" r:id="rId34"/>
-    <p:sldId id="288" r:id="rId23"/>
     <p:sldId id="276" r:id="rId28"/>
     <p:sldId id="275" r:id="rId27"/>
     <p:sldId id="277" r:id="rId29"/>
     <p:sldId id="278" r:id="rId30"/>
     <p:sldId id="279" r:id="rId31"/>
     <p:sldId id="281" r:id="rId33"/>
-    <p:sldId id="289" r:id="rId24"/>
     <p:sldId id="283" r:id="rId35"/>
-    <p:sldId id="290" r:id="rId25"/>
-    <p:sldId id="286" r:id="rId21"/>
+    <p:sldId id="284" r:id="rId36"/>
     <p:sldId id="285" r:id="rId37"/>
-    <p:sldId id="284" r:id="rId36"/>
   </p:sldIdLst>
   <p:sldSz cx="12192000" cy="6858000" type="screen16x9"/>
   <p:notesSz cx="6858000" cy="9144000"/>
+  <p:embeddedFontLst>
+    <p:embeddedFont>
+      <p:font typeface="Calibri"/>
+      <p:regular r:id="rId38"/>
+      <p:bold r:id="rId39"/>
+      <p:italic r:id="rId40"/>
+      <p:boldItalic r:id="rId41"/>
+    </p:embeddedFont>
+  </p:embeddedFontLst>
   <p:defaultTextStyle>
     <a:defPPr>
       <a:defRPr lang="en-US"/>
@@ -544,356 +548,6 @@
 </p:notes>
 </file>
 
-<file path=ppt/notesSlides/notesSlide14.xml><?xml version="1.0" encoding="utf-8"?>
-<p:notes xmlns:a="http://schemas.openxmlformats.org/drawingml/2006/main" xmlns:p="http://schemas.openxmlformats.org/presentationml/2006/main" xmlns:r="http://schemas.openxmlformats.org/officeDocument/2006/relationships">
-  <p:cSld>
-    <p:spTree>
-      <p:nvGrpSpPr>
-        <p:cNvPr id="1" name=""/>
-        <p:cNvGrpSpPr/>
-        <p:nvPr/>
-      </p:nvGrpSpPr>
-      <p:grpSpPr>
-        <a:xfrm>
-          <a:off x="0" y="0"/>
-          <a:ext cx="0" cy="0"/>
-          <a:chOff x="0" y="0"/>
-          <a:chExt cx="0" cy="0"/>
-        </a:xfrm>
-      </p:grpSpPr>
-      <p:sp>
-        <p:nvSpPr>
-          <p:cNvPr id="2" name="Slide Image Placeholder 1"/>
-          <p:cNvSpPr>
-            <a:spLocks noGrp="1"/>
-          </p:cNvSpPr>
-          <p:nvPr>
-            <p:ph type="sldImg" idx="2"/>
-          </p:nvPr>
-        </p:nvSpPr>
-        <p:spPr/>
-      </p:sp>
-      <p:sp>
-        <p:nvSpPr>
-          <p:cNvPr id="3" name="Notes Placeholder 2"/>
-          <p:cNvSpPr>
-            <a:spLocks noGrp="1"/>
-          </p:cNvSpPr>
-          <p:nvPr>
-            <p:ph type="body" idx="3" sz="quarter"/>
-          </p:nvPr>
-        </p:nvSpPr>
-        <p:spPr/>
-        <p:txBody>
-          <a:bodyPr/>
-          <a:lstStyle/>
-          <a:p>
-            <a:r>
-              <a:t>GUION: cerrar nombrando la frontera. Cada límite se dice en voz alta y se enlaza con la sesión que sí lo resuelve. No es una advertencia legal: es la competencia que separa a quien reporta un número de quien sabe qué autoriza. [Viernes, capítulo 11.9]</a:t>
-            </a:r>
-          </a:p>
-        </p:txBody>
-      </p:sp>
-      <p:sp>
-        <p:nvSpPr>
-          <p:cNvPr id="4" name="Slide Number Placeholder 3"/>
-          <p:cNvSpPr>
-            <a:spLocks noGrp="1"/>
-          </p:cNvSpPr>
-          <p:nvPr>
-            <p:ph type="sldNum" idx="5" sz="quarter"/>
-          </p:nvPr>
-        </p:nvSpPr>
-        <p:spPr/>
-      </p:sp>
-    </p:spTree>
-  </p:cSld>
-  <p:clrMapOvr>
-    <a:masterClrMapping/>
-  </p:clrMapOvr>
-</p:notes>
-</file>
-
-<file path=ppt/notesSlides/notesSlide15.xml><?xml version="1.0" encoding="utf-8"?>
-<p:notes xmlns:a="http://schemas.openxmlformats.org/drawingml/2006/main" xmlns:p="http://schemas.openxmlformats.org/presentationml/2006/main" xmlns:r="http://schemas.openxmlformats.org/officeDocument/2006/relationships">
-  <p:cSld>
-    <p:spTree>
-      <p:nvGrpSpPr>
-        <p:cNvPr id="1" name=""/>
-        <p:cNvGrpSpPr/>
-        <p:nvPr/>
-      </p:nvGrpSpPr>
-      <p:grpSpPr>
-        <a:xfrm>
-          <a:off x="0" y="0"/>
-          <a:ext cx="0" cy="0"/>
-          <a:chOff x="0" y="0"/>
-          <a:chExt cx="0" cy="0"/>
-        </a:xfrm>
-      </p:grpSpPr>
-      <p:sp>
-        <p:nvSpPr>
-          <p:cNvPr id="2" name="Slide Image Placeholder 1"/>
-          <p:cNvSpPr>
-            <a:spLocks noGrp="1"/>
-          </p:cNvSpPr>
-          <p:nvPr>
-            <p:ph type="sldImg" idx="2"/>
-          </p:nvPr>
-        </p:nvSpPr>
-        <p:spPr/>
-      </p:sp>
-      <p:sp>
-        <p:nvSpPr>
-          <p:cNvPr id="3" name="Notes Placeholder 2"/>
-          <p:cNvSpPr>
-            <a:spLocks noGrp="1"/>
-          </p:cNvSpPr>
-          <p:nvPr>
-            <p:ph type="body" idx="3" sz="quarter"/>
-          </p:nvPr>
-        </p:nvSpPr>
-        <p:spPr/>
-        <p:txBody>
-          <a:bodyPr/>
-          <a:lstStyle/>
-          <a:p>
-            <a:r>
-              <a:t>Divisor del capítulo 11.6. Se enuncia la pregunta tal como aparece en el sílabo, la ficha, el cuaderno y la guía: es el mismo código en todos. [Viernes, capítulo 11.6]</a:t>
-            </a:r>
-          </a:p>
-        </p:txBody>
-      </p:sp>
-      <p:sp>
-        <p:nvSpPr>
-          <p:cNvPr id="4" name="Slide Number Placeholder 3"/>
-          <p:cNvSpPr>
-            <a:spLocks noGrp="1"/>
-          </p:cNvSpPr>
-          <p:nvPr>
-            <p:ph type="sldNum" idx="5" sz="quarter"/>
-          </p:nvPr>
-        </p:nvSpPr>
-        <p:spPr/>
-      </p:sp>
-    </p:spTree>
-  </p:cSld>
-  <p:clrMapOvr>
-    <a:masterClrMapping/>
-  </p:clrMapOvr>
-</p:notes>
-</file>
-
-<file path=ppt/notesSlides/notesSlide16.xml><?xml version="1.0" encoding="utf-8"?>
-<p:notes xmlns:a="http://schemas.openxmlformats.org/drawingml/2006/main" xmlns:p="http://schemas.openxmlformats.org/presentationml/2006/main" xmlns:r="http://schemas.openxmlformats.org/officeDocument/2006/relationships">
-  <p:cSld>
-    <p:spTree>
-      <p:nvGrpSpPr>
-        <p:cNvPr id="1" name=""/>
-        <p:cNvGrpSpPr/>
-        <p:nvPr/>
-      </p:nvGrpSpPr>
-      <p:grpSpPr>
-        <a:xfrm>
-          <a:off x="0" y="0"/>
-          <a:ext cx="0" cy="0"/>
-          <a:chOff x="0" y="0"/>
-          <a:chExt cx="0" cy="0"/>
-        </a:xfrm>
-      </p:grpSpPr>
-      <p:sp>
-        <p:nvSpPr>
-          <p:cNvPr id="2" name="Slide Image Placeholder 1"/>
-          <p:cNvSpPr>
-            <a:spLocks noGrp="1"/>
-          </p:cNvSpPr>
-          <p:nvPr>
-            <p:ph type="sldImg" idx="2"/>
-          </p:nvPr>
-        </p:nvSpPr>
-        <p:spPr/>
-      </p:sp>
-      <p:sp>
-        <p:nvSpPr>
-          <p:cNvPr id="3" name="Notes Placeholder 2"/>
-          <p:cNvSpPr>
-            <a:spLocks noGrp="1"/>
-          </p:cNvSpPr>
-          <p:nvPr>
-            <p:ph type="body" idx="3" sz="quarter"/>
-          </p:nvPr>
-        </p:nvSpPr>
-        <p:spPr/>
-        <p:txBody>
-          <a:bodyPr/>
-          <a:lstStyle/>
-          <a:p>
-            <a:r>
-              <a:t>Divisor del capítulo 11.7. Se enuncia la pregunta tal como aparece en el sílabo, la ficha, el cuaderno y la guía: es el mismo código en todos. [Viernes, capítulo 11.7]</a:t>
-            </a:r>
-          </a:p>
-        </p:txBody>
-      </p:sp>
-      <p:sp>
-        <p:nvSpPr>
-          <p:cNvPr id="4" name="Slide Number Placeholder 3"/>
-          <p:cNvSpPr>
-            <a:spLocks noGrp="1"/>
-          </p:cNvSpPr>
-          <p:nvPr>
-            <p:ph type="sldNum" idx="5" sz="quarter"/>
-          </p:nvPr>
-        </p:nvSpPr>
-        <p:spPr/>
-      </p:sp>
-    </p:spTree>
-  </p:cSld>
-  <p:clrMapOvr>
-    <a:masterClrMapping/>
-  </p:clrMapOvr>
-</p:notes>
-</file>
-
-<file path=ppt/notesSlides/notesSlide17.xml><?xml version="1.0" encoding="utf-8"?>
-<p:notes xmlns:a="http://schemas.openxmlformats.org/drawingml/2006/main" xmlns:p="http://schemas.openxmlformats.org/presentationml/2006/main" xmlns:r="http://schemas.openxmlformats.org/officeDocument/2006/relationships">
-  <p:cSld>
-    <p:spTree>
-      <p:nvGrpSpPr>
-        <p:cNvPr id="1" name=""/>
-        <p:cNvGrpSpPr/>
-        <p:nvPr/>
-      </p:nvGrpSpPr>
-      <p:grpSpPr>
-        <a:xfrm>
-          <a:off x="0" y="0"/>
-          <a:ext cx="0" cy="0"/>
-          <a:chOff x="0" y="0"/>
-          <a:chExt cx="0" cy="0"/>
-        </a:xfrm>
-      </p:grpSpPr>
-      <p:sp>
-        <p:nvSpPr>
-          <p:cNvPr id="2" name="Slide Image Placeholder 1"/>
-          <p:cNvSpPr>
-            <a:spLocks noGrp="1"/>
-          </p:cNvSpPr>
-          <p:nvPr>
-            <p:ph type="sldImg" idx="2"/>
-          </p:nvPr>
-        </p:nvSpPr>
-        <p:spPr/>
-      </p:sp>
-      <p:sp>
-        <p:nvSpPr>
-          <p:cNvPr id="3" name="Notes Placeholder 2"/>
-          <p:cNvSpPr>
-            <a:spLocks noGrp="1"/>
-          </p:cNvSpPr>
-          <p:nvPr>
-            <p:ph type="body" idx="3" sz="quarter"/>
-          </p:nvPr>
-        </p:nvSpPr>
-        <p:spPr/>
-        <p:txBody>
-          <a:bodyPr/>
-          <a:lstStyle/>
-          <a:p>
-            <a:r>
-              <a:t>Divisor del capítulo 11.8. Se enuncia la pregunta tal como aparece en el sílabo, la ficha, el cuaderno y la guía: es el mismo código en todos. [Viernes, capítulo 11.8]</a:t>
-            </a:r>
-          </a:p>
-        </p:txBody>
-      </p:sp>
-      <p:sp>
-        <p:nvSpPr>
-          <p:cNvPr id="4" name="Slide Number Placeholder 3"/>
-          <p:cNvSpPr>
-            <a:spLocks noGrp="1"/>
-          </p:cNvSpPr>
-          <p:nvPr>
-            <p:ph type="sldNum" idx="5" sz="quarter"/>
-          </p:nvPr>
-        </p:nvSpPr>
-        <p:spPr/>
-      </p:sp>
-    </p:spTree>
-  </p:cSld>
-  <p:clrMapOvr>
-    <a:masterClrMapping/>
-  </p:clrMapOvr>
-</p:notes>
-</file>
-
-<file path=ppt/notesSlides/notesSlide18.xml><?xml version="1.0" encoding="utf-8"?>
-<p:notes xmlns:a="http://schemas.openxmlformats.org/drawingml/2006/main" xmlns:p="http://schemas.openxmlformats.org/presentationml/2006/main" xmlns:r="http://schemas.openxmlformats.org/officeDocument/2006/relationships">
-  <p:cSld>
-    <p:spTree>
-      <p:nvGrpSpPr>
-        <p:cNvPr id="1" name=""/>
-        <p:cNvGrpSpPr/>
-        <p:nvPr/>
-      </p:nvGrpSpPr>
-      <p:grpSpPr>
-        <a:xfrm>
-          <a:off x="0" y="0"/>
-          <a:ext cx="0" cy="0"/>
-          <a:chOff x="0" y="0"/>
-          <a:chExt cx="0" cy="0"/>
-        </a:xfrm>
-      </p:grpSpPr>
-      <p:sp>
-        <p:nvSpPr>
-          <p:cNvPr id="2" name="Slide Image Placeholder 1"/>
-          <p:cNvSpPr>
-            <a:spLocks noGrp="1"/>
-          </p:cNvSpPr>
-          <p:nvPr>
-            <p:ph type="sldImg" idx="2"/>
-          </p:nvPr>
-        </p:nvSpPr>
-        <p:spPr/>
-      </p:sp>
-      <p:sp>
-        <p:nvSpPr>
-          <p:cNvPr id="3" name="Notes Placeholder 2"/>
-          <p:cNvSpPr>
-            <a:spLocks noGrp="1"/>
-          </p:cNvSpPr>
-          <p:nvPr>
-            <p:ph type="body" idx="3" sz="quarter"/>
-          </p:nvPr>
-        </p:nvSpPr>
-        <p:spPr/>
-        <p:txBody>
-          <a:bodyPr/>
-          <a:lstStyle/>
-          <a:p>
-            <a:r>
-              <a:t>Divisor del capítulo 11.9. Se enuncia la pregunta tal como aparece en el sílabo, la ficha, el cuaderno y la guía: es el mismo código en todos. [Viernes, capítulo 11.9]</a:t>
-            </a:r>
-          </a:p>
-        </p:txBody>
-      </p:sp>
-      <p:sp>
-        <p:nvSpPr>
-          <p:cNvPr id="4" name="Slide Number Placeholder 3"/>
-          <p:cNvSpPr>
-            <a:spLocks noGrp="1"/>
-          </p:cNvSpPr>
-          <p:nvPr>
-            <p:ph type="sldNum" idx="5" sz="quarter"/>
-          </p:nvPr>
-        </p:nvSpPr>
-        <p:spPr/>
-      </p:sp>
-    </p:spTree>
-  </p:cSld>
-  <p:clrMapOvr>
-    <a:masterClrMapping/>
-  </p:clrMapOvr>
-</p:notes>
-</file>
-
 <file path=ppt/notesSlides/notesSlide2.xml><?xml version="1.0" encoding="utf-8"?>
 <p:notes xmlns:a="http://schemas.openxmlformats.org/drawingml/2006/main" xmlns:p="http://schemas.openxmlformats.org/presentationml/2006/main" xmlns:r="http://schemas.openxmlformats.org/officeDocument/2006/relationships">
   <p:cSld>
@@ -1289,7 +943,7 @@
           <a:lstStyle/>
           <a:p>
             <a:r>
-              <a:t>GUION: Laboratorio de negocio: demanda mensual de un producto (Store Item Demand). El campeón es el de menor sMAPE promediado sobre los orígenes que bata a la línea base. Regla de sensatez de las competencias M: si un modelo complejo no supera al seasonal-naive (repetir el mismo mes del año anterior), no aporta. Aquí SARIMA es el campeón (4,09 % vs. naive 5,78 %, ETS 5,50 %). Las barras se reconstruyen de backtesting_store y su media coincide con B6/B12/B11. [Viernes, capítulo 11.7]</a:t>
+              <a:t>GUION: Laboratorio de negocio: demanda mensual de un producto (Store Item Demand). El campeón es el de menor sMAPE promediado sobre los orígenes que bata a la línea base. Regla de sensatez de las competencias M: si un modelo complejo no supera al seasonal-naive (repetir el mismo mes del año anterior), no aporta. Aquí SARIMA es el campeón (4,09 % vs. naive 5,78 %, ETS 5,50 %). Las barras se recalculan con la misma metodología rolling-origin del notebook original (dataset ya exclusivo del entregable). [Viernes, capítulo 11.7]</a:t>
             </a:r>
           </a:p>
         </p:txBody>
@@ -4954,7 +4608,7 @@
     <p:bg>
       <p:bgPr>
         <a:solidFill>
-          <a:srgbClr val="FFFFFF"/>
+          <a:srgbClr val="FCEDEE"/>
         </a:solidFill>
         <a:effectLst/>
       </p:bgPr>
@@ -4968,84 +4622,14 @@
       <p:grpSpPr/>
       <p:sp>
         <p:nvSpPr>
-          <p:cNvPr id="2" name="TextBox 1"/>
-          <p:cNvSpPr txBox="1"/>
-          <p:nvPr/>
-        </p:nvSpPr>
-        <p:spPr>
-          <a:xfrm>
-            <a:off x="548640" y="411480"/>
-            <a:ext cx="11094720" cy="292608"/>
-          </a:xfrm>
-          <a:prstGeom prst="rect">
-            <a:avLst/>
-          </a:prstGeom>
-          <a:noFill/>
-        </p:spPr>
-        <p:txBody>
-          <a:bodyPr wrap="square" anchor="t" lIns="0" rIns="0" tIns="0" bIns="0">
-            <a:spAutoFit/>
-          </a:bodyPr>
-          <a:lstStyle/>
-          <a:p>
-            <a:pPr algn="l"/>
-            <a:r>
-              <a:rPr sz="1300" b="1">
-                <a:solidFill>
-                  <a:srgbClr val="9B1B30"/>
-                </a:solidFill>
-                <a:latin typeface="Calibri"/>
-              </a:rPr>
-              <a:t>BACKTESTING / ROLLING-ORIGIN, TASHMAN (2000), FPP3 CAP. 5.10</a:t>
-            </a:r>
-          </a:p>
-        </p:txBody>
-      </p:sp>
-      <p:sp>
-        <p:nvSpPr>
-          <p:cNvPr id="3" name="TextBox 2"/>
-          <p:cNvSpPr txBox="1"/>
-          <p:nvPr/>
-        </p:nvSpPr>
-        <p:spPr>
-          <a:xfrm>
-            <a:off x="548640" y="731520"/>
-            <a:ext cx="11094720" cy="777240"/>
-          </a:xfrm>
-          <a:prstGeom prst="rect">
-            <a:avLst/>
-          </a:prstGeom>
-          <a:noFill/>
-        </p:spPr>
-        <p:txBody>
-          <a:bodyPr wrap="square" anchor="t" lIns="0" rIns="0" tIns="0" bIns="0">
-            <a:spAutoFit/>
-          </a:bodyPr>
-          <a:lstStyle/>
-          <a:p>
-            <a:pPr algn="l"/>
-            <a:r>
-              <a:rPr sz="4000" b="1">
-                <a:solidFill>
-                  <a:srgbClr val="2D2D2D"/>
-                </a:solidFill>
-                <a:latin typeface="Calibri"/>
-              </a:rPr>
-              <a:t>El backtesting separa el pasado del futuro</a:t>
-            </a:r>
-          </a:p>
-        </p:txBody>
-      </p:sp>
-      <p:sp>
-        <p:nvSpPr>
-          <p:cNvPr id="4" name="Oval 3"/>
+          <p:cNvPr id="2" name="Oval 1"/>
           <p:cNvSpPr/>
           <p:nvPr/>
         </p:nvSpPr>
         <p:spPr>
           <a:xfrm>
-            <a:off x="548640" y="1828800"/>
-            <a:ext cx="457200" cy="457200"/>
+            <a:off x="5593080" y="914400"/>
+            <a:ext cx="1005840" cy="1005840"/>
           </a:xfrm>
           <a:prstGeom prst="ellipse">
             <a:avLst/>
@@ -5078,27 +4662,27 @@
           <a:p>
             <a:pPr algn="ctr"/>
             <a:r>
-              <a:rPr sz="1600" b="1">
+              <a:rPr sz="4400" b="1">
                 <a:solidFill>
                   <a:srgbClr val="FFFFFF"/>
                 </a:solidFill>
                 <a:latin typeface="Calibri"/>
               </a:rPr>
-              <a:t>→</a:t>
-            </a:r>
-          </a:p>
-        </p:txBody>
-      </p:sp>
-      <p:sp>
-        <p:nvSpPr>
-          <p:cNvPr id="5" name="TextBox 4"/>
+              <a:t>?</a:t>
+            </a:r>
+          </a:p>
+        </p:txBody>
+      </p:sp>
+      <p:sp>
+        <p:nvSpPr>
+          <p:cNvPr id="3" name="TextBox 2"/>
           <p:cNvSpPr txBox="1"/>
           <p:nvPr/>
         </p:nvSpPr>
         <p:spPr>
           <a:xfrm>
-            <a:off x="1143000" y="1874519"/>
-            <a:ext cx="4754880" cy="457200"/>
+            <a:off x="1371600" y="2468880"/>
+            <a:ext cx="9448800" cy="2011680"/>
           </a:xfrm>
           <a:prstGeom prst="rect">
             <a:avLst/>
@@ -5111,153 +4695,29 @@
           </a:bodyPr>
           <a:lstStyle/>
           <a:p>
-            <a:pPr algn="l"/>
-            <a:r>
-              <a:rPr sz="2000" b="1">
+            <a:pPr algn="ctr"/>
+            <a:r>
+              <a:rPr sz="3200" b="1">
                 <a:solidFill>
                   <a:srgbClr val="9B1B30"/>
                 </a:solidFill>
                 <a:latin typeface="Calibri"/>
               </a:rPr>
-              <a:t>Validación de origen móvil</a:t>
-            </a:r>
-          </a:p>
-        </p:txBody>
-      </p:sp>
-      <p:sp>
-        <p:nvSpPr>
-          <p:cNvPr id="6" name="TextBox 5"/>
+              <a:t>¿Qué revela un sMAPE demasiado bueno para ser cierto?</a:t>
+            </a:r>
+          </a:p>
+        </p:txBody>
+      </p:sp>
+      <p:sp>
+        <p:nvSpPr>
+          <p:cNvPr id="4" name="TextBox 3"/>
           <p:cNvSpPr txBox="1"/>
           <p:nvPr/>
         </p:nvSpPr>
         <p:spPr>
           <a:xfrm>
-            <a:off x="621792" y="2606040"/>
-            <a:ext cx="5202936" cy="3474720"/>
-          </a:xfrm>
-          <a:prstGeom prst="rect">
-            <a:avLst/>
-          </a:prstGeom>
-          <a:noFill/>
-        </p:spPr>
-        <p:txBody>
-          <a:bodyPr wrap="square" lIns="0" rIns="0" tIns="0" bIns="0">
-            <a:spAutoFit/>
-          </a:bodyPr>
-          <a:lstStyle/>
-          <a:p>
-            <a:pPr algn="l">
-              <a:spcAft>
-                <a:spcPts val="900"/>
-              </a:spcAft>
-            </a:pPr>
-            <a:r>
-              <a:rPr sz="1400">
-                <a:solidFill>
-                  <a:srgbClr val="2D2D2D"/>
-                </a:solidFill>
-                <a:latin typeface="Calibri"/>
-              </a:rPr>
-              <a:t>Fija un origen de pronóstico</a:t>
-            </a:r>
-          </a:p>
-          <a:p>
-            <a:pPr algn="l">
-              <a:spcAft>
-                <a:spcPts val="900"/>
-              </a:spcAft>
-            </a:pPr>
-            <a:r>
-              <a:rPr sz="1400">
-                <a:solidFill>
-                  <a:srgbClr val="2D2D2D"/>
-                </a:solidFill>
-                <a:latin typeface="Calibri"/>
-              </a:rPr>
-              <a:t>Entrena pasado, predice futuro</a:t>
-            </a:r>
-          </a:p>
-          <a:p>
-            <a:pPr algn="l">
-              <a:spcAft>
-                <a:spcPts val="900"/>
-              </a:spcAft>
-            </a:pPr>
-            <a:r>
-              <a:rPr sz="1400">
-                <a:solidFill>
-                  <a:srgbClr val="2D2D2D"/>
-                </a:solidFill>
-                <a:latin typeface="Calibri"/>
-              </a:rPr>
-              <a:t>Avanza el origen y repite</a:t>
-            </a:r>
-          </a:p>
-        </p:txBody>
-      </p:sp>
-      <p:sp>
-        <p:nvSpPr>
-          <p:cNvPr id="7" name="Oval 6"/>
-          <p:cNvSpPr/>
-          <p:nvPr/>
-        </p:nvSpPr>
-        <p:spPr>
-          <a:xfrm>
-            <a:off x="6309360" y="1828800"/>
-            <a:ext cx="457200" cy="457200"/>
-          </a:xfrm>
-          <a:prstGeom prst="ellipse">
-            <a:avLst/>
-          </a:prstGeom>
-          <a:solidFill>
-            <a:srgbClr val="E4002B"/>
-          </a:solidFill>
-          <a:ln>
-            <a:noFill/>
-          </a:ln>
-          <a:effectLst/>
-        </p:spPr>
-        <p:style>
-          <a:lnRef idx="1">
-            <a:schemeClr val="accent1"/>
-          </a:lnRef>
-          <a:fillRef idx="3">
-            <a:schemeClr val="accent1"/>
-          </a:fillRef>
-          <a:effectRef idx="2">
-            <a:schemeClr val="accent1"/>
-          </a:effectRef>
-          <a:fontRef idx="minor">
-            <a:schemeClr val="lt1"/>
-          </a:fontRef>
-        </p:style>
-        <p:txBody>
-          <a:bodyPr rtlCol="0" anchor="ctr" lIns="0" rIns="0" tIns="0" bIns="0"/>
-          <a:lstStyle/>
-          <a:p>
-            <a:pPr algn="ctr"/>
-            <a:r>
-              <a:rPr sz="1600" b="1">
-                <a:solidFill>
-                  <a:srgbClr val="FFFFFF"/>
-                </a:solidFill>
-                <a:latin typeface="Calibri"/>
-              </a:rPr>
-              <a:t>f</a:t>
-            </a:r>
-          </a:p>
-        </p:txBody>
-      </p:sp>
-      <p:sp>
-        <p:nvSpPr>
-          <p:cNvPr id="8" name="TextBox 7"/>
-          <p:cNvSpPr txBox="1"/>
-          <p:nvPr/>
-        </p:nvSpPr>
-        <p:spPr>
-          <a:xfrm>
-            <a:off x="6903720" y="1874519"/>
-            <a:ext cx="4754880" cy="457200"/>
+            <a:off x="2011680" y="4754880"/>
+            <a:ext cx="8168640" cy="1280160"/>
           </a:xfrm>
           <a:prstGeom prst="rect">
             <a:avLst/>
@@ -5270,255 +4730,15 @@
           </a:bodyPr>
           <a:lstStyle/>
           <a:p>
-            <a:pPr algn="l"/>
-            <a:r>
-              <a:rPr sz="2000" b="1">
-                <a:solidFill>
-                  <a:srgbClr val="9B1B30"/>
-                </a:solidFill>
-                <a:latin typeface="Calibri"/>
-              </a:rPr>
-              <a:t>Features temporales</a:t>
-            </a:r>
-          </a:p>
-        </p:txBody>
-      </p:sp>
-      <p:sp>
-        <p:nvSpPr>
-          <p:cNvPr id="9" name="TextBox 8"/>
-          <p:cNvSpPr txBox="1"/>
-          <p:nvPr/>
-        </p:nvSpPr>
-        <p:spPr>
-          <a:xfrm>
-            <a:off x="6382512" y="2606040"/>
-            <a:ext cx="5202936" cy="3474720"/>
-          </a:xfrm>
-          <a:prstGeom prst="rect">
-            <a:avLst/>
-          </a:prstGeom>
-          <a:noFill/>
-        </p:spPr>
-        <p:txBody>
-          <a:bodyPr wrap="square" lIns="0" rIns="0" tIns="0" bIns="0">
-            <a:spAutoFit/>
-          </a:bodyPr>
-          <a:lstStyle/>
-          <a:p>
-            <a:pPr algn="l">
-              <a:spcAft>
-                <a:spcPts val="900"/>
-              </a:spcAft>
-            </a:pPr>
-            <a:r>
-              <a:rPr sz="1400">
+            <a:pPr algn="ctr"/>
+            <a:r>
+              <a:rPr sz="1500" b="0">
                 <a:solidFill>
                   <a:srgbClr val="2D2D2D"/>
                 </a:solidFill>
                 <a:latin typeface="Calibri"/>
               </a:rPr>
-              <a:t>Lags: y(t−1), y(t−12)</a:t>
-            </a:r>
-          </a:p>
-          <a:p>
-            <a:pPr algn="l">
-              <a:spcAft>
-                <a:spcPts val="900"/>
-              </a:spcAft>
-            </a:pPr>
-            <a:r>
-              <a:rPr sz="1400">
-                <a:solidFill>
-                  <a:srgbClr val="2D2D2D"/>
-                </a:solidFill>
-                <a:latin typeface="Calibri"/>
-              </a:rPr>
-              <a:t>Medias móviles del pasado</a:t>
-            </a:r>
-          </a:p>
-          <a:p>
-            <a:pPr algn="l">
-              <a:spcAft>
-                <a:spcPts val="900"/>
-              </a:spcAft>
-            </a:pPr>
-            <a:r>
-              <a:rPr sz="1400">
-                <a:solidFill>
-                  <a:srgbClr val="2D2D2D"/>
-                </a:solidFill>
-                <a:latin typeface="Calibri"/>
-              </a:rPr>
-              <a:t>Calendario: mes, festivo</a:t>
-            </a:r>
-          </a:p>
-        </p:txBody>
-      </p:sp>
-      <p:sp>
-        <p:nvSpPr>
-          <p:cNvPr id="10" name="Rounded Rectangle 9"/>
-          <p:cNvSpPr/>
-          <p:nvPr/>
-        </p:nvSpPr>
-        <p:spPr>
-          <a:xfrm>
-            <a:off x="8366760" y="301752"/>
-            <a:ext cx="3291840" cy="402336"/>
-          </a:xfrm>
-          <a:prstGeom prst="roundRect">
-            <a:avLst/>
-          </a:prstGeom>
-          <a:solidFill>
-            <a:srgbClr val="FCEDEE"/>
-          </a:solidFill>
-          <a:ln w="15875">
-            <a:solidFill>
-              <a:srgbClr val="E4002B"/>
-            </a:solidFill>
-          </a:ln>
-          <a:effectLst/>
-        </p:spPr>
-        <p:style>
-          <a:lnRef idx="1">
-            <a:schemeClr val="accent1"/>
-          </a:lnRef>
-          <a:fillRef idx="3">
-            <a:schemeClr val="accent1"/>
-          </a:fillRef>
-          <a:effectRef idx="2">
-            <a:schemeClr val="accent1"/>
-          </a:effectRef>
-          <a:fontRef idx="minor">
-            <a:schemeClr val="lt1"/>
-          </a:fontRef>
-        </p:style>
-        <p:txBody>
-          <a:bodyPr rtlCol="0" anchor="ctr" lIns="54864" rIns="54864" tIns="0" bIns="0"/>
-          <a:lstStyle/>
-          <a:p>
-            <a:pPr algn="ctr"/>
-            <a:r>
-              <a:rPr sz="1300" b="1">
-                <a:solidFill>
-                  <a:srgbClr val="9B1B30"/>
-                </a:solidFill>
-                <a:latin typeface="Calibri"/>
-              </a:rPr>
-              <a:t>▶  Notebook, Diag. 8.6, celda 99</a:t>
-            </a:r>
-          </a:p>
-        </p:txBody>
-      </p:sp>
-      <p:sp>
-        <p:nvSpPr>
-          <p:cNvPr id="11" name="Oval 10"/>
-          <p:cNvSpPr/>
-          <p:nvPr/>
-        </p:nvSpPr>
-        <p:spPr>
-          <a:xfrm>
-            <a:off x="548640" y="6473952"/>
-            <a:ext cx="100584" cy="100584"/>
-          </a:xfrm>
-          <a:prstGeom prst="ellipse">
-            <a:avLst/>
-          </a:prstGeom>
-          <a:solidFill>
-            <a:srgbClr val="E4002B"/>
-          </a:solidFill>
-          <a:ln>
-            <a:noFill/>
-          </a:ln>
-          <a:effectLst/>
-        </p:spPr>
-        <p:style>
-          <a:lnRef idx="1">
-            <a:schemeClr val="accent1"/>
-          </a:lnRef>
-          <a:fillRef idx="3">
-            <a:schemeClr val="accent1"/>
-          </a:fillRef>
-          <a:effectRef idx="2">
-            <a:schemeClr val="accent1"/>
-          </a:effectRef>
-          <a:fontRef idx="minor">
-            <a:schemeClr val="lt1"/>
-          </a:fontRef>
-        </p:style>
-        <p:txBody>
-          <a:bodyPr rtlCol="0" anchor="ctr"/>
-          <a:lstStyle/>
-          <a:p>
-            <a:pPr algn="ctr"/>
-          </a:p>
-        </p:txBody>
-      </p:sp>
-      <p:sp>
-        <p:nvSpPr>
-          <p:cNvPr id="12" name="TextBox 11"/>
-          <p:cNvSpPr txBox="1"/>
-          <p:nvPr/>
-        </p:nvSpPr>
-        <p:spPr>
-          <a:xfrm>
-            <a:off x="749808" y="6437376"/>
-            <a:ext cx="7772400" cy="274320"/>
-          </a:xfrm>
-          <a:prstGeom prst="rect">
-            <a:avLst/>
-          </a:prstGeom>
-          <a:noFill/>
-        </p:spPr>
-        <p:txBody>
-          <a:bodyPr wrap="square" anchor="t" lIns="0" rIns="0" tIns="0" bIns="0">
-            <a:spAutoFit/>
-          </a:bodyPr>
-          <a:lstStyle/>
-          <a:p>
-            <a:pPr algn="l"/>
-            <a:r>
-              <a:rPr sz="900" b="0">
-                <a:solidFill>
-                  <a:srgbClr val="6E6E6E"/>
-                </a:solidFill>
-                <a:latin typeface="Calibri"/>
-              </a:rPr>
-              <a:t>S11 — Herramientas para la Ciencia de Datos, UPC</a:t>
-            </a:r>
-          </a:p>
-        </p:txBody>
-      </p:sp>
-      <p:sp>
-        <p:nvSpPr>
-          <p:cNvPr id="13" name="TextBox 12"/>
-          <p:cNvSpPr txBox="1"/>
-          <p:nvPr/>
-        </p:nvSpPr>
-        <p:spPr>
-          <a:xfrm>
-            <a:off x="10180320" y="6437376"/>
-            <a:ext cx="1463040" cy="274320"/>
-          </a:xfrm>
-          <a:prstGeom prst="rect">
-            <a:avLst/>
-          </a:prstGeom>
-          <a:noFill/>
-        </p:spPr>
-        <p:txBody>
-          <a:bodyPr wrap="square" anchor="t" lIns="0" rIns="0" tIns="0" bIns="0">
-            <a:spAutoFit/>
-          </a:bodyPr>
-          <a:lstStyle/>
-          <a:p>
-            <a:pPr algn="r"/>
-            <a:r>
-              <a:rPr sz="900" b="0">
-                <a:solidFill>
-                  <a:srgbClr val="6E6E6E"/>
-                </a:solidFill>
-                <a:latin typeface="Calibri"/>
-              </a:rPr>
-              <a:t>10 / 18</a:t>
+              <a:t>Pista: un error de validación menor que el de entrenamiento delata fuga temporal.</a:t>
             </a:r>
           </a:p>
         </p:txBody>
@@ -5579,7 +4799,7 @@
                 </a:solidFill>
                 <a:latin typeface="Calibri"/>
               </a:rPr>
-              <a:t>DECISIÓN — SMAPE MEDIO POR MODELO</a:t>
+              <a:t>ACTUALIDAD — FUENTES_ACTUALIDAD_S11.MD</a:t>
             </a:r>
           </a:p>
         </p:txBody>
@@ -5614,45 +4834,21 @@
                 </a:solidFill>
                 <a:latin typeface="Calibri"/>
               </a:rPr>
-              <a:t>SARIMA lidera con 4,09 % y supera al naive 5,78 %</a:t>
-            </a:r>
-          </a:p>
-        </p:txBody>
-      </p:sp>
-      <p:pic>
-        <p:nvPicPr>
-          <p:cNvPr id="4" name="Picture 3" descr="deck_backtesting.png"/>
-          <p:cNvPicPr>
-            <a:picLocks noChangeAspect="1"/>
-          </p:cNvPicPr>
-          <p:nvPr/>
-        </p:nvPicPr>
-        <p:blipFill>
-          <a:blip r:embed="rId2"/>
-          <a:stretch>
-            <a:fillRect/>
-          </a:stretch>
-        </p:blipFill>
-        <p:spPr>
-          <a:xfrm>
-            <a:off x="548640" y="1828800"/>
-            <a:ext cx="6949440" cy="4185148"/>
-          </a:xfrm>
-          <a:prstGeom prst="rect">
-            <a:avLst/>
-          </a:prstGeom>
-        </p:spPr>
-      </p:pic>
-      <p:sp>
-        <p:nvSpPr>
-          <p:cNvPr id="5" name="Oval 4"/>
+              <a:t>Tres estudios de 2025 exigen validar sin fuga</a:t>
+            </a:r>
+          </a:p>
+        </p:txBody>
+      </p:sp>
+      <p:sp>
+        <p:nvSpPr>
+          <p:cNvPr id="4" name="Oval 3"/>
           <p:cNvSpPr/>
           <p:nvPr/>
         </p:nvSpPr>
         <p:spPr>
           <a:xfrm>
-            <a:off x="7955279" y="2011680"/>
-            <a:ext cx="548640" cy="548640"/>
+            <a:off x="548640" y="1810512"/>
+            <a:ext cx="384048" cy="384048"/>
           </a:xfrm>
           <a:prstGeom prst="ellipse">
             <a:avLst/>
@@ -5680,47 +4876,32 @@
           </a:fontRef>
         </p:style>
         <p:txBody>
-          <a:bodyPr rtlCol="0" anchor="ctr"/>
+          <a:bodyPr rtlCol="0" anchor="ctr" lIns="0" rIns="0" tIns="0" bIns="0"/>
           <a:lstStyle/>
           <a:p>
             <a:pPr algn="ctr"/>
-          </a:p>
-        </p:txBody>
-      </p:sp>
-      <p:pic>
-        <p:nvPicPr>
-          <p:cNvPr id="6" name="Picture 5" descr="lightbulb__FFFFFF.png"/>
-          <p:cNvPicPr>
-            <a:picLocks noChangeAspect="1"/>
-          </p:cNvPicPr>
-          <p:nvPr/>
-        </p:nvPicPr>
-        <p:blipFill>
-          <a:blip r:embed="rId3"/>
-          <a:stretch>
-            <a:fillRect/>
-          </a:stretch>
-        </p:blipFill>
-        <p:spPr>
-          <a:xfrm>
-            <a:off x="8108898" y="2165299"/>
-            <a:ext cx="241402" cy="241402"/>
-          </a:xfrm>
-          <a:prstGeom prst="rect">
-            <a:avLst/>
-          </a:prstGeom>
-        </p:spPr>
-      </p:pic>
-      <p:sp>
-        <p:nvSpPr>
-          <p:cNvPr id="7" name="TextBox 6"/>
+            <a:r>
+              <a:rPr sz="1400" b="1">
+                <a:solidFill>
+                  <a:srgbClr val="FFFFFF"/>
+                </a:solidFill>
+                <a:latin typeface="Calibri"/>
+              </a:rPr>
+              <a:t>1</a:t>
+            </a:r>
+          </a:p>
+        </p:txBody>
+      </p:sp>
+      <p:sp>
+        <p:nvSpPr>
+          <p:cNvPr id="5" name="TextBox 4"/>
           <p:cNvSpPr txBox="1"/>
           <p:nvPr/>
         </p:nvSpPr>
         <p:spPr>
           <a:xfrm>
-            <a:off x="8686800" y="2057400"/>
-            <a:ext cx="2926080" cy="548640"/>
+            <a:off x="1097280" y="1783080"/>
+            <a:ext cx="10546080" cy="320040"/>
           </a:xfrm>
           <a:prstGeom prst="rect">
             <a:avLst/>
@@ -5737,25 +4918,25 @@
             <a:r>
               <a:rPr sz="1500" b="1">
                 <a:solidFill>
-                  <a:srgbClr val="9B1B30"/>
-                </a:solidFill>
-                <a:latin typeface="Calibri"/>
-              </a:rPr>
-              <a:t>Lectura de negocio</a:t>
-            </a:r>
-          </a:p>
-        </p:txBody>
-      </p:sp>
-      <p:sp>
-        <p:nvSpPr>
-          <p:cNvPr id="8" name="TextBox 7"/>
+                  <a:srgbClr val="2D2D2D"/>
+                </a:solidFill>
+                <a:latin typeface="Calibri"/>
+              </a:rPr>
+              <a:t>La fuga temporal esconde hasta un 20,5 % del error real</a:t>
+            </a:r>
+          </a:p>
+        </p:txBody>
+      </p:sp>
+      <p:sp>
+        <p:nvSpPr>
+          <p:cNvPr id="6" name="TextBox 5"/>
           <p:cNvSpPr txBox="1"/>
           <p:nvPr/>
         </p:nvSpPr>
         <p:spPr>
           <a:xfrm>
-            <a:off x="7955279" y="2880360"/>
-            <a:ext cx="3657600" cy="3108960"/>
+            <a:off x="1097280" y="2093976"/>
+            <a:ext cx="10546080" cy="274320"/>
           </a:xfrm>
           <a:prstGeom prst="rect">
             <a:avLst/>
@@ -5768,123 +4949,29 @@
           </a:bodyPr>
           <a:lstStyle/>
           <a:p>
-            <a:pPr algn="l">
-              <a:lnSpc>
-                <a:spcPct val="125000"/>
-              </a:lnSpc>
-            </a:pPr>
-            <a:r>
-              <a:rPr sz="1500" b="0">
-                <a:solidFill>
-                  <a:srgbClr val="2D2D2D"/>
-                </a:solidFill>
-                <a:latin typeface="Calibri"/>
-              </a:rPr>
-              <a:t>SARIMA (4,09 %) supera al seasonal-naive (5,78 %) y al ETS (5,50 %): es el campeón.</a:t>
-            </a:r>
-          </a:p>
-        </p:txBody>
-      </p:sp>
-      <p:sp>
-        <p:nvSpPr>
-          <p:cNvPr id="9" name="TextBox 8"/>
-          <p:cNvSpPr txBox="1"/>
-          <p:nvPr/>
-        </p:nvSpPr>
-        <p:spPr>
-          <a:xfrm>
-            <a:off x="548640" y="5961888"/>
-            <a:ext cx="11094720" cy="292608"/>
-          </a:xfrm>
-          <a:prstGeom prst="rect">
-            <a:avLst/>
-          </a:prstGeom>
-          <a:noFill/>
-        </p:spPr>
-        <p:txBody>
-          <a:bodyPr wrap="square" anchor="t" lIns="0" rIns="0" tIns="0" bIns="0">
-            <a:spAutoFit/>
-          </a:bodyPr>
-          <a:lstStyle/>
-          <a:p>
             <a:pPr algn="l"/>
             <a:r>
-              <a:rPr sz="1000" b="0">
+              <a:rPr sz="1200" b="0">
                 <a:solidFill>
                   <a:srgbClr val="6E6E6E"/>
                 </a:solidFill>
                 <a:latin typeface="Calibri"/>
               </a:rPr>
-              <a:t>Store Item Demand (Kaggle), rolling-origin (initial 36, horizon 6, step 6), reconstruido de Excel!backtesting_store (medias = B6/B12/B11).</a:t>
-            </a:r>
-          </a:p>
-        </p:txBody>
-      </p:sp>
-      <p:sp>
-        <p:nvSpPr>
-          <p:cNvPr id="10" name="Rounded Rectangle 9"/>
+              <a:t>arXiv, Albelali &amp; Ahmed, 07/12/2025  —  el reporte con fuga es optimista; el honesto es más alto</a:t>
+            </a:r>
+          </a:p>
+        </p:txBody>
+      </p:sp>
+      <p:sp>
+        <p:nvSpPr>
+          <p:cNvPr id="7" name="Oval 6"/>
           <p:cNvSpPr/>
           <p:nvPr/>
         </p:nvSpPr>
         <p:spPr>
           <a:xfrm>
-            <a:off x="8366760" y="301752"/>
-            <a:ext cx="3291840" cy="402336"/>
-          </a:xfrm>
-          <a:prstGeom prst="roundRect">
-            <a:avLst/>
-          </a:prstGeom>
-          <a:solidFill>
-            <a:srgbClr val="FCEDEE"/>
-          </a:solidFill>
-          <a:ln w="15875">
-            <a:solidFill>
-              <a:srgbClr val="E4002B"/>
-            </a:solidFill>
-          </a:ln>
-          <a:effectLst/>
-        </p:spPr>
-        <p:style>
-          <a:lnRef idx="1">
-            <a:schemeClr val="accent1"/>
-          </a:lnRef>
-          <a:fillRef idx="3">
-            <a:schemeClr val="accent1"/>
-          </a:fillRef>
-          <a:effectRef idx="2">
-            <a:schemeClr val="accent1"/>
-          </a:effectRef>
-          <a:fontRef idx="minor">
-            <a:schemeClr val="lt1"/>
-          </a:fontRef>
-        </p:style>
-        <p:txBody>
-          <a:bodyPr rtlCol="0" anchor="ctr" lIns="54864" rIns="54864" tIns="0" bIns="0"/>
-          <a:lstStyle/>
-          <a:p>
-            <a:pPr algn="ctr"/>
-            <a:r>
-              <a:rPr sz="1300" b="1">
-                <a:solidFill>
-                  <a:srgbClr val="9B1B30"/>
-                </a:solidFill>
-                <a:latin typeface="Calibri"/>
-              </a:rPr>
-              <a:t>▶  Notebook, Paso 11, celda 63</a:t>
-            </a:r>
-          </a:p>
-        </p:txBody>
-      </p:sp>
-      <p:sp>
-        <p:nvSpPr>
-          <p:cNvPr id="11" name="Oval 10"/>
-          <p:cNvSpPr/>
-          <p:nvPr/>
-        </p:nvSpPr>
-        <p:spPr>
-          <a:xfrm>
-            <a:off x="548640" y="6473952"/>
-            <a:ext cx="100584" cy="100584"/>
+            <a:off x="548640" y="2706624"/>
+            <a:ext cx="384048" cy="384048"/>
           </a:xfrm>
           <a:prstGeom prst="ellipse">
             <a:avLst/>
@@ -5912,23 +4999,32 @@
           </a:fontRef>
         </p:style>
         <p:txBody>
-          <a:bodyPr rtlCol="0" anchor="ctr"/>
+          <a:bodyPr rtlCol="0" anchor="ctr" lIns="0" rIns="0" tIns="0" bIns="0"/>
           <a:lstStyle/>
           <a:p>
             <a:pPr algn="ctr"/>
-          </a:p>
-        </p:txBody>
-      </p:sp>
-      <p:sp>
-        <p:nvSpPr>
-          <p:cNvPr id="12" name="TextBox 11"/>
+            <a:r>
+              <a:rPr sz="1400" b="1">
+                <a:solidFill>
+                  <a:srgbClr val="FFFFFF"/>
+                </a:solidFill>
+                <a:latin typeface="Calibri"/>
+              </a:rPr>
+              <a:t>2</a:t>
+            </a:r>
+          </a:p>
+        </p:txBody>
+      </p:sp>
+      <p:sp>
+        <p:nvSpPr>
+          <p:cNvPr id="8" name="TextBox 7"/>
           <p:cNvSpPr txBox="1"/>
           <p:nvPr/>
         </p:nvSpPr>
         <p:spPr>
           <a:xfrm>
-            <a:off x="749808" y="6437376"/>
-            <a:ext cx="7772400" cy="274320"/>
+            <a:off x="1097280" y="2679192"/>
+            <a:ext cx="10546080" cy="320040"/>
           </a:xfrm>
           <a:prstGeom prst="rect">
             <a:avLst/>
@@ -5943,27 +5039,27 @@
           <a:p>
             <a:pPr algn="l"/>
             <a:r>
-              <a:rPr sz="900" b="0">
-                <a:solidFill>
-                  <a:srgbClr val="6E6E6E"/>
-                </a:solidFill>
-                <a:latin typeface="Calibri"/>
-              </a:rPr>
-              <a:t>S11 — Herramientas para la Ciencia de Datos, UPC</a:t>
-            </a:r>
-          </a:p>
-        </p:txBody>
-      </p:sp>
-      <p:sp>
-        <p:nvSpPr>
-          <p:cNvPr id="13" name="TextBox 12"/>
+              <a:rPr sz="1500" b="1">
+                <a:solidFill>
+                  <a:srgbClr val="2D2D2D"/>
+                </a:solidFill>
+                <a:latin typeface="Calibri"/>
+              </a:rPr>
+              <a:t>El leakage se esconde en los modelos fundacionales de series</a:t>
+            </a:r>
+          </a:p>
+        </p:txBody>
+      </p:sp>
+      <p:sp>
+        <p:nvSpPr>
+          <p:cNvPr id="9" name="TextBox 8"/>
           <p:cNvSpPr txBox="1"/>
           <p:nvPr/>
         </p:nvSpPr>
         <p:spPr>
           <a:xfrm>
-            <a:off x="10180320" y="6437376"/>
-            <a:ext cx="1463040" cy="274320"/>
+            <a:off x="1097280" y="2990088"/>
+            <a:ext cx="10546080" cy="274320"/>
           </a:xfrm>
           <a:prstGeom prst="rect">
             <a:avLst/>
@@ -5976,6 +5072,243 @@
           </a:bodyPr>
           <a:lstStyle/>
           <a:p>
+            <a:pPr algn="l"/>
+            <a:r>
+              <a:rPr sz="1200" b="0">
+                <a:solidFill>
+                  <a:srgbClr val="6E6E6E"/>
+                </a:solidFill>
+                <a:latin typeface="Calibri"/>
+              </a:rPr>
+              <a:t>arXiv, Meyer et al., 15/10/2025  —  exigir evaluación fuera de muestra antes de confiar</a:t>
+            </a:r>
+          </a:p>
+        </p:txBody>
+      </p:sp>
+      <p:sp>
+        <p:nvSpPr>
+          <p:cNvPr id="10" name="Oval 9"/>
+          <p:cNvSpPr/>
+          <p:nvPr/>
+        </p:nvSpPr>
+        <p:spPr>
+          <a:xfrm>
+            <a:off x="548640" y="3602736"/>
+            <a:ext cx="384048" cy="384048"/>
+          </a:xfrm>
+          <a:prstGeom prst="ellipse">
+            <a:avLst/>
+          </a:prstGeom>
+          <a:solidFill>
+            <a:srgbClr val="E4002B"/>
+          </a:solidFill>
+          <a:ln>
+            <a:noFill/>
+          </a:ln>
+          <a:effectLst/>
+        </p:spPr>
+        <p:style>
+          <a:lnRef idx="1">
+            <a:schemeClr val="accent1"/>
+          </a:lnRef>
+          <a:fillRef idx="3">
+            <a:schemeClr val="accent1"/>
+          </a:fillRef>
+          <a:effectRef idx="2">
+            <a:schemeClr val="accent1"/>
+          </a:effectRef>
+          <a:fontRef idx="minor">
+            <a:schemeClr val="lt1"/>
+          </a:fontRef>
+        </p:style>
+        <p:txBody>
+          <a:bodyPr rtlCol="0" anchor="ctr" lIns="0" rIns="0" tIns="0" bIns="0"/>
+          <a:lstStyle/>
+          <a:p>
+            <a:pPr algn="ctr"/>
+            <a:r>
+              <a:rPr sz="1400" b="1">
+                <a:solidFill>
+                  <a:srgbClr val="FFFFFF"/>
+                </a:solidFill>
+                <a:latin typeface="Calibri"/>
+              </a:rPr>
+              <a:t>3</a:t>
+            </a:r>
+          </a:p>
+        </p:txBody>
+      </p:sp>
+      <p:sp>
+        <p:nvSpPr>
+          <p:cNvPr id="11" name="TextBox 10"/>
+          <p:cNvSpPr txBox="1"/>
+          <p:nvPr/>
+        </p:nvSpPr>
+        <p:spPr>
+          <a:xfrm>
+            <a:off x="1097280" y="3575304"/>
+            <a:ext cx="10546080" cy="320040"/>
+          </a:xfrm>
+          <a:prstGeom prst="rect">
+            <a:avLst/>
+          </a:prstGeom>
+          <a:noFill/>
+        </p:spPr>
+        <p:txBody>
+          <a:bodyPr wrap="square" anchor="t" lIns="0" rIns="0" tIns="0" bIns="0">
+            <a:spAutoFit/>
+          </a:bodyPr>
+          <a:lstStyle/>
+          <a:p>
+            <a:pPr algn="l"/>
+            <a:r>
+              <a:rPr sz="1500" b="1">
+                <a:solidFill>
+                  <a:srgbClr val="2D2D2D"/>
+                </a:solidFill>
+                <a:latin typeface="Calibri"/>
+              </a:rPr>
+              <a:t>Reentrenar menos mantiene la precisión y ahorra cómputo</a:t>
+            </a:r>
+          </a:p>
+        </p:txBody>
+      </p:sp>
+      <p:sp>
+        <p:nvSpPr>
+          <p:cNvPr id="12" name="TextBox 11"/>
+          <p:cNvSpPr txBox="1"/>
+          <p:nvPr/>
+        </p:nvSpPr>
+        <p:spPr>
+          <a:xfrm>
+            <a:off x="1097280" y="3886200"/>
+            <a:ext cx="10546080" cy="274320"/>
+          </a:xfrm>
+          <a:prstGeom prst="rect">
+            <a:avLst/>
+          </a:prstGeom>
+          <a:noFill/>
+        </p:spPr>
+        <p:txBody>
+          <a:bodyPr wrap="square" anchor="t" lIns="0" rIns="0" tIns="0" bIns="0">
+            <a:spAutoFit/>
+          </a:bodyPr>
+          <a:lstStyle/>
+          <a:p>
+            <a:pPr algn="l"/>
+            <a:r>
+              <a:rPr sz="1200" b="0">
+                <a:solidFill>
+                  <a:srgbClr val="6E6E6E"/>
+                </a:solidFill>
+                <a:latin typeface="Calibri"/>
+              </a:rPr>
+              <a:t>arXiv/MLWA, Zanotti, 14/01/2026  —  guía de eficiencia: no siempre hace falta reentrenar</a:t>
+            </a:r>
+          </a:p>
+        </p:txBody>
+      </p:sp>
+      <p:sp>
+        <p:nvSpPr>
+          <p:cNvPr id="13" name="Oval 12"/>
+          <p:cNvSpPr/>
+          <p:nvPr/>
+        </p:nvSpPr>
+        <p:spPr>
+          <a:xfrm>
+            <a:off x="548640" y="6473952"/>
+            <a:ext cx="100584" cy="100584"/>
+          </a:xfrm>
+          <a:prstGeom prst="ellipse">
+            <a:avLst/>
+          </a:prstGeom>
+          <a:solidFill>
+            <a:srgbClr val="E4002B"/>
+          </a:solidFill>
+          <a:ln>
+            <a:noFill/>
+          </a:ln>
+          <a:effectLst/>
+        </p:spPr>
+        <p:style>
+          <a:lnRef idx="1">
+            <a:schemeClr val="accent1"/>
+          </a:lnRef>
+          <a:fillRef idx="3">
+            <a:schemeClr val="accent1"/>
+          </a:fillRef>
+          <a:effectRef idx="2">
+            <a:schemeClr val="accent1"/>
+          </a:effectRef>
+          <a:fontRef idx="minor">
+            <a:schemeClr val="lt1"/>
+          </a:fontRef>
+        </p:style>
+        <p:txBody>
+          <a:bodyPr rtlCol="0" anchor="ctr"/>
+          <a:lstStyle/>
+          <a:p>
+            <a:pPr algn="ctr"/>
+          </a:p>
+        </p:txBody>
+      </p:sp>
+      <p:sp>
+        <p:nvSpPr>
+          <p:cNvPr id="14" name="TextBox 13"/>
+          <p:cNvSpPr txBox="1"/>
+          <p:nvPr/>
+        </p:nvSpPr>
+        <p:spPr>
+          <a:xfrm>
+            <a:off x="749808" y="6437376"/>
+            <a:ext cx="7772400" cy="274320"/>
+          </a:xfrm>
+          <a:prstGeom prst="rect">
+            <a:avLst/>
+          </a:prstGeom>
+          <a:noFill/>
+        </p:spPr>
+        <p:txBody>
+          <a:bodyPr wrap="square" anchor="t" lIns="0" rIns="0" tIns="0" bIns="0">
+            <a:spAutoFit/>
+          </a:bodyPr>
+          <a:lstStyle/>
+          <a:p>
+            <a:pPr algn="l"/>
+            <a:r>
+              <a:rPr sz="900" b="0">
+                <a:solidFill>
+                  <a:srgbClr val="6E6E6E"/>
+                </a:solidFill>
+                <a:latin typeface="Calibri"/>
+              </a:rPr>
+              <a:t>S11 — Herramientas para la Ciencia de Datos, UPC</a:t>
+            </a:r>
+          </a:p>
+        </p:txBody>
+      </p:sp>
+      <p:sp>
+        <p:nvSpPr>
+          <p:cNvPr id="15" name="TextBox 14"/>
+          <p:cNvSpPr txBox="1"/>
+          <p:nvPr/>
+        </p:nvSpPr>
+        <p:spPr>
+          <a:xfrm>
+            <a:off x="10180320" y="6437376"/>
+            <a:ext cx="1463040" cy="274320"/>
+          </a:xfrm>
+          <a:prstGeom prst="rect">
+            <a:avLst/>
+          </a:prstGeom>
+          <a:noFill/>
+        </p:spPr>
+        <p:txBody>
+          <a:bodyPr wrap="square" anchor="t" lIns="0" rIns="0" tIns="0" bIns="0">
+            <a:spAutoFit/>
+          </a:bodyPr>
+          <a:lstStyle/>
+          <a:p>
             <a:pPr algn="r"/>
             <a:r>
               <a:rPr sz="900" b="0">
@@ -5984,7 +5317,7 @@
                 </a:solidFill>
                 <a:latin typeface="Calibri"/>
               </a:rPr>
-              <a:t>11 / 18</a:t>
+              <a:t>11 / 13</a:t>
             </a:r>
           </a:p>
         </p:txBody>
@@ -5998,304 +5331,6 @@
 </file>
 
 <file path=ppt/slides/slide12.xml><?xml version="1.0" encoding="utf-8"?>
-<p:sld xmlns:a="http://schemas.openxmlformats.org/drawingml/2006/main" xmlns:p="http://schemas.openxmlformats.org/presentationml/2006/main" xmlns:r="http://schemas.openxmlformats.org/officeDocument/2006/relationships">
-  <p:cSld>
-    <p:bg>
-      <p:bgPr>
-        <a:solidFill>
-          <a:srgbClr val="FCEDEE"/>
-        </a:solidFill>
-        <a:effectLst/>
-      </p:bgPr>
-    </p:bg>
-    <p:spTree>
-      <p:nvGrpSpPr>
-        <p:cNvPr id="1" name=""/>
-        <p:cNvGrpSpPr/>
-        <p:nvPr/>
-      </p:nvGrpSpPr>
-      <p:grpSpPr/>
-      <p:sp>
-        <p:nvSpPr>
-          <p:cNvPr id="2" name="Oval 1"/>
-          <p:cNvSpPr/>
-          <p:nvPr/>
-        </p:nvSpPr>
-        <p:spPr>
-          <a:xfrm>
-            <a:off x="5593080" y="914400"/>
-            <a:ext cx="1005840" cy="1005840"/>
-          </a:xfrm>
-          <a:prstGeom prst="ellipse">
-            <a:avLst/>
-          </a:prstGeom>
-          <a:solidFill>
-            <a:srgbClr val="E4002B"/>
-          </a:solidFill>
-          <a:ln>
-            <a:noFill/>
-          </a:ln>
-          <a:effectLst/>
-        </p:spPr>
-        <p:style>
-          <a:lnRef idx="1">
-            <a:schemeClr val="accent1"/>
-          </a:lnRef>
-          <a:fillRef idx="3">
-            <a:schemeClr val="accent1"/>
-          </a:fillRef>
-          <a:effectRef idx="2">
-            <a:schemeClr val="accent1"/>
-          </a:effectRef>
-          <a:fontRef idx="minor">
-            <a:schemeClr val="lt1"/>
-          </a:fontRef>
-        </p:style>
-        <p:txBody>
-          <a:bodyPr rtlCol="0" anchor="ctr" lIns="0" rIns="0" tIns="0" bIns="0"/>
-          <a:lstStyle/>
-          <a:p>
-            <a:pPr algn="ctr"/>
-            <a:r>
-              <a:rPr sz="4400" b="1">
-                <a:solidFill>
-                  <a:srgbClr val="FFFFFF"/>
-                </a:solidFill>
-                <a:latin typeface="Calibri"/>
-              </a:rPr>
-              <a:t>?</a:t>
-            </a:r>
-          </a:p>
-        </p:txBody>
-      </p:sp>
-      <p:sp>
-        <p:nvSpPr>
-          <p:cNvPr id="3" name="TextBox 2"/>
-          <p:cNvSpPr txBox="1"/>
-          <p:nvPr/>
-        </p:nvSpPr>
-        <p:spPr>
-          <a:xfrm>
-            <a:off x="1371600" y="2468880"/>
-            <a:ext cx="9448800" cy="2011680"/>
-          </a:xfrm>
-          <a:prstGeom prst="rect">
-            <a:avLst/>
-          </a:prstGeom>
-          <a:noFill/>
-        </p:spPr>
-        <p:txBody>
-          <a:bodyPr wrap="square" anchor="t" lIns="0" rIns="0" tIns="0" bIns="0">
-            <a:spAutoFit/>
-          </a:bodyPr>
-          <a:lstStyle/>
-          <a:p>
-            <a:pPr algn="ctr"/>
-            <a:r>
-              <a:rPr sz="3200" b="1">
-                <a:solidFill>
-                  <a:srgbClr val="9B1B30"/>
-                </a:solidFill>
-                <a:latin typeface="Calibri"/>
-              </a:rPr>
-              <a:t>¿Qué revela un sMAPE demasiado bueno para ser cierto?</a:t>
-            </a:r>
-          </a:p>
-        </p:txBody>
-      </p:sp>
-      <p:sp>
-        <p:nvSpPr>
-          <p:cNvPr id="4" name="TextBox 3"/>
-          <p:cNvSpPr txBox="1"/>
-          <p:nvPr/>
-        </p:nvSpPr>
-        <p:spPr>
-          <a:xfrm>
-            <a:off x="2011680" y="4754880"/>
-            <a:ext cx="8168640" cy="1280160"/>
-          </a:xfrm>
-          <a:prstGeom prst="rect">
-            <a:avLst/>
-          </a:prstGeom>
-          <a:noFill/>
-        </p:spPr>
-        <p:txBody>
-          <a:bodyPr wrap="square" anchor="t" lIns="0" rIns="0" tIns="0" bIns="0">
-            <a:spAutoFit/>
-          </a:bodyPr>
-          <a:lstStyle/>
-          <a:p>
-            <a:pPr algn="ctr"/>
-            <a:r>
-              <a:rPr sz="1500" b="0">
-                <a:solidFill>
-                  <a:srgbClr val="2D2D2D"/>
-                </a:solidFill>
-                <a:latin typeface="Calibri"/>
-              </a:rPr>
-              <a:t>Pista: un error de validación menor que el de entrenamiento delata fuga temporal.</a:t>
-            </a:r>
-          </a:p>
-        </p:txBody>
-      </p:sp>
-    </p:spTree>
-  </p:cSld>
-  <p:clrMapOvr>
-    <a:masterClrMapping/>
-  </p:clrMapOvr>
-</p:sld>
-</file>
-
-<file path=ppt/slides/slide13.xml><?xml version="1.0" encoding="utf-8"?>
-<p:sld xmlns:a="http://schemas.openxmlformats.org/drawingml/2006/main" xmlns:p="http://schemas.openxmlformats.org/presentationml/2006/main" xmlns:r="http://schemas.openxmlformats.org/officeDocument/2006/relationships">
-  <p:cSld>
-    <p:bg>
-      <p:bgPr>
-        <a:solidFill>
-          <a:srgbClr val="9B1B30"/>
-        </a:solidFill>
-        <a:effectLst/>
-      </p:bgPr>
-    </p:bg>
-    <p:spTree>
-      <p:nvGrpSpPr>
-        <p:cNvPr id="1" name=""/>
-        <p:cNvGrpSpPr/>
-        <p:nvPr/>
-      </p:nvGrpSpPr>
-      <p:grpSpPr/>
-      <p:sp>
-        <p:nvSpPr>
-          <p:cNvPr id="2" name="Oval 1"/>
-          <p:cNvSpPr/>
-          <p:nvPr/>
-        </p:nvSpPr>
-        <p:spPr>
-          <a:xfrm>
-            <a:off x="914400" y="2103120"/>
-            <a:ext cx="2377440" cy="2377440"/>
-          </a:xfrm>
-          <a:prstGeom prst="ellipse">
-            <a:avLst/>
-          </a:prstGeom>
-          <a:solidFill>
-            <a:srgbClr val="FFFFFF"/>
-          </a:solidFill>
-          <a:ln>
-            <a:noFill/>
-          </a:ln>
-          <a:effectLst/>
-        </p:spPr>
-        <p:style>
-          <a:lnRef idx="1">
-            <a:schemeClr val="accent1"/>
-          </a:lnRef>
-          <a:fillRef idx="3">
-            <a:schemeClr val="accent1"/>
-          </a:fillRef>
-          <a:effectRef idx="2">
-            <a:schemeClr val="accent1"/>
-          </a:effectRef>
-          <a:fontRef idx="minor">
-            <a:schemeClr val="lt1"/>
-          </a:fontRef>
-        </p:style>
-        <p:txBody>
-          <a:bodyPr rtlCol="0" anchor="ctr" lIns="0" rIns="0" tIns="0" bIns="0"/>
-          <a:lstStyle/>
-          <a:p>
-            <a:pPr algn="ctr"/>
-            <a:r>
-              <a:rPr sz="10000" b="1">
-                <a:solidFill>
-                  <a:srgbClr val="9B1B30"/>
-                </a:solidFill>
-                <a:latin typeface="Calibri"/>
-              </a:rPr>
-              <a:t>8</a:t>
-            </a:r>
-          </a:p>
-        </p:txBody>
-      </p:sp>
-      <p:sp>
-        <p:nvSpPr>
-          <p:cNvPr id="3" name="TextBox 2"/>
-          <p:cNvSpPr txBox="1"/>
-          <p:nvPr/>
-        </p:nvSpPr>
-        <p:spPr>
-          <a:xfrm>
-            <a:off x="3931920" y="2651760"/>
-            <a:ext cx="7589520" cy="1371600"/>
-          </a:xfrm>
-          <a:prstGeom prst="rect">
-            <a:avLst/>
-          </a:prstGeom>
-          <a:noFill/>
-        </p:spPr>
-        <p:txBody>
-          <a:bodyPr wrap="square" anchor="t" lIns="0" rIns="0" tIns="0" bIns="0">
-            <a:spAutoFit/>
-          </a:bodyPr>
-          <a:lstStyle/>
-          <a:p>
-            <a:pPr algn="l"/>
-            <a:r>
-              <a:rPr sz="4000" b="1">
-                <a:solidFill>
-                  <a:srgbClr val="FFFFFF"/>
-                </a:solidFill>
-                <a:latin typeface="Calibri"/>
-              </a:rPr>
-              <a:t>¿Qué decisión habilita? Demanda mensual de un producto</a:t>
-            </a:r>
-          </a:p>
-        </p:txBody>
-      </p:sp>
-      <p:sp>
-        <p:nvSpPr>
-          <p:cNvPr id="4" name="TextBox 3"/>
-          <p:cNvSpPr txBox="1"/>
-          <p:nvPr/>
-        </p:nvSpPr>
-        <p:spPr>
-          <a:xfrm>
-            <a:off x="3931920" y="3977639"/>
-            <a:ext cx="7589520" cy="914400"/>
-          </a:xfrm>
-          <a:prstGeom prst="rect">
-            <a:avLst/>
-          </a:prstGeom>
-          <a:noFill/>
-        </p:spPr>
-        <p:txBody>
-          <a:bodyPr wrap="square" anchor="t" lIns="0" rIns="0" tIns="0" bIns="0">
-            <a:spAutoFit/>
-          </a:bodyPr>
-          <a:lstStyle/>
-          <a:p>
-            <a:pPr algn="l"/>
-            <a:r>
-              <a:rPr sz="1700" b="0">
-                <a:solidFill>
-                  <a:srgbClr val="FCEDEE"/>
-                </a:solidFill>
-                <a:latin typeface="Calibri"/>
-              </a:rPr>
-              <a:t>Capítulo 11.8 — viernes, bloque B</a:t>
-            </a:r>
-          </a:p>
-        </p:txBody>
-      </p:sp>
-    </p:spTree>
-  </p:cSld>
-  <p:clrMapOvr>
-    <a:masterClrMapping/>
-  </p:clrMapOvr>
-</p:sld>
-</file>
-
-<file path=ppt/slides/slide14.xml><?xml version="1.0" encoding="utf-8"?>
 <p:sld xmlns:a="http://schemas.openxmlformats.org/drawingml/2006/main" xmlns:p="http://schemas.openxmlformats.org/presentationml/2006/main" xmlns:r="http://schemas.openxmlformats.org/officeDocument/2006/relationships">
   <p:cSld>
     <p:bg>
@@ -6343,7 +5378,7 @@
                 </a:solidFill>
                 <a:latin typeface="Calibri"/>
               </a:rPr>
-              <a:t>ACTUALIDAD — FUENTES_ACTUALIDAD_S11.MD</a:t>
+              <a:t>BIBLIOGRAFÍA</a:t>
             </a:r>
           </a:p>
         </p:txBody>
@@ -6378,7 +5413,7 @@
                 </a:solidFill>
                 <a:latin typeface="Calibri"/>
               </a:rPr>
-              <a:t>Tres estudios de 2025 exigen validar sin fuga</a:t>
+              <a:t>Cinco lecturas anclan el pronóstico moderno</a:t>
             </a:r>
           </a:p>
         </p:txBody>
@@ -6466,7 +5501,7 @@
                 </a:solidFill>
                 <a:latin typeface="Calibri"/>
               </a:rPr>
-              <a:t>La fuga temporal esconde hasta un 20,5 % del error real</a:t>
+              <a:t>Forecasting: Principles and Practice (FPP3)</a:t>
             </a:r>
           </a:p>
         </p:txBody>
@@ -6501,7 +5536,7 @@
                 </a:solidFill>
                 <a:latin typeface="Calibri"/>
               </a:rPr>
-              <a:t>arXiv, Albelali &amp; Ahmed, 07/12/2025  —  el reporte con fuga es optimista; el honesto es más alto</a:t>
+              <a:t>Hyndman &amp; Athanasopoulos — otexts.com/fpp3  —  texto libre; cubre toda la sesión</a:t>
             </a:r>
           </a:p>
         </p:txBody>
@@ -6589,7 +5624,7 @@
                 </a:solidFill>
                 <a:latin typeface="Calibri"/>
               </a:rPr>
-              <a:t>El leakage se esconde en los modelos fundacionales de series</a:t>
+              <a:t>Time Series Analysis: Forecasting and Control</a:t>
             </a:r>
           </a:p>
         </p:txBody>
@@ -6624,7 +5659,7 @@
                 </a:solidFill>
                 <a:latin typeface="Calibri"/>
               </a:rPr>
-              <a:t>arXiv, Meyer et al., 15/10/2025  —  exigir evaluación fuera de muestra antes de confiar</a:t>
+              <a:t>Box &amp; Jenkins (1970)  —  origen de ARIMA y del modelo aerolínea</a:t>
             </a:r>
           </a:p>
         </p:txBody>
@@ -6712,7 +5747,7 @@
                 </a:solidFill>
                 <a:latin typeface="Calibri"/>
               </a:rPr>
-              <a:t>Reentrenar menos mantiene la precisión y ahorra cómputo</a:t>
+              <a:t>Forecasting at Scale (Prophet)</a:t>
             </a:r>
           </a:p>
         </p:txBody>
@@ -6747,7 +5782,7 @@
                 </a:solidFill>
                 <a:latin typeface="Calibri"/>
               </a:rPr>
-              <a:t>arXiv/MLWA, Zanotti, 14/01/2026  —  guía de eficiencia: no siempre hace falta reentrenar</a:t>
+              <a:t>Taylor &amp; Letham (2018) — TAS 72(1)  —  el ejemplo oficial de Peyton Manning</a:t>
             </a:r>
           </a:p>
         </p:txBody>
@@ -6760,8 +5795,8 @@
         </p:nvSpPr>
         <p:spPr>
           <a:xfrm>
-            <a:off x="548640" y="6473952"/>
-            <a:ext cx="100584" cy="100584"/>
+            <a:off x="548640" y="4498848"/>
+            <a:ext cx="384048" cy="384048"/>
           </a:xfrm>
           <a:prstGeom prst="ellipse">
             <a:avLst/>
@@ -6789,10 +5824,19 @@
           </a:fontRef>
         </p:style>
         <p:txBody>
-          <a:bodyPr rtlCol="0" anchor="ctr"/>
+          <a:bodyPr rtlCol="0" anchor="ctr" lIns="0" rIns="0" tIns="0" bIns="0"/>
           <a:lstStyle/>
           <a:p>
             <a:pPr algn="ctr"/>
+            <a:r>
+              <a:rPr sz="1400" b="1">
+                <a:solidFill>
+                  <a:srgbClr val="FFFFFF"/>
+                </a:solidFill>
+                <a:latin typeface="Calibri"/>
+              </a:rPr>
+              <a:t>4</a:t>
+            </a:r>
           </a:p>
         </p:txBody>
       </p:sp>
@@ -6804,8 +5848,8 @@
         </p:nvSpPr>
         <p:spPr>
           <a:xfrm>
-            <a:off x="749808" y="6437376"/>
-            <a:ext cx="7772400" cy="274320"/>
+            <a:off x="1097280" y="4471416"/>
+            <a:ext cx="10546080" cy="320040"/>
           </a:xfrm>
           <a:prstGeom prst="rect">
             <a:avLst/>
@@ -6820,13 +5864,13 @@
           <a:p>
             <a:pPr algn="l"/>
             <a:r>
-              <a:rPr sz="900" b="0">
-                <a:solidFill>
-                  <a:srgbClr val="6E6E6E"/>
-                </a:solidFill>
-                <a:latin typeface="Calibri"/>
-              </a:rPr>
-              <a:t>S11 — Herramientas para la Ciencia de Datos, UPC</a:t>
+              <a:rPr sz="1500" b="1">
+                <a:solidFill>
+                  <a:srgbClr val="2D2D2D"/>
+                </a:solidFill>
+                <a:latin typeface="Calibri"/>
+              </a:rPr>
+              <a:t>Automatic Time Series Forecasting</a:t>
             </a:r>
           </a:p>
         </p:txBody>
@@ -6839,8 +5883,8 @@
         </p:nvSpPr>
         <p:spPr>
           <a:xfrm>
-            <a:off x="10180320" y="6437376"/>
-            <a:ext cx="1463040" cy="274320"/>
+            <a:off x="1097280" y="4782312"/>
+            <a:ext cx="10546080" cy="274320"/>
           </a:xfrm>
           <a:prstGeom prst="rect">
             <a:avLst/>
@@ -6853,6 +5897,243 @@
           </a:bodyPr>
           <a:lstStyle/>
           <a:p>
+            <a:pPr algn="l"/>
+            <a:r>
+              <a:rPr sz="1200" b="0">
+                <a:solidFill>
+                  <a:srgbClr val="6E6E6E"/>
+                </a:solidFill>
+                <a:latin typeface="Calibri"/>
+              </a:rPr>
+              <a:t>Hyndman &amp; Khandakar (2008) — JSS 27(3)  —  auto.arima y ets: selección a escala</a:t>
+            </a:r>
+          </a:p>
+        </p:txBody>
+      </p:sp>
+      <p:sp>
+        <p:nvSpPr>
+          <p:cNvPr id="16" name="Oval 15"/>
+          <p:cNvSpPr/>
+          <p:nvPr/>
+        </p:nvSpPr>
+        <p:spPr>
+          <a:xfrm>
+            <a:off x="548640" y="5394960"/>
+            <a:ext cx="384048" cy="384048"/>
+          </a:xfrm>
+          <a:prstGeom prst="ellipse">
+            <a:avLst/>
+          </a:prstGeom>
+          <a:solidFill>
+            <a:srgbClr val="E4002B"/>
+          </a:solidFill>
+          <a:ln>
+            <a:noFill/>
+          </a:ln>
+          <a:effectLst/>
+        </p:spPr>
+        <p:style>
+          <a:lnRef idx="1">
+            <a:schemeClr val="accent1"/>
+          </a:lnRef>
+          <a:fillRef idx="3">
+            <a:schemeClr val="accent1"/>
+          </a:fillRef>
+          <a:effectRef idx="2">
+            <a:schemeClr val="accent1"/>
+          </a:effectRef>
+          <a:fontRef idx="minor">
+            <a:schemeClr val="lt1"/>
+          </a:fontRef>
+        </p:style>
+        <p:txBody>
+          <a:bodyPr rtlCol="0" anchor="ctr" lIns="0" rIns="0" tIns="0" bIns="0"/>
+          <a:lstStyle/>
+          <a:p>
+            <a:pPr algn="ctr"/>
+            <a:r>
+              <a:rPr sz="1400" b="1">
+                <a:solidFill>
+                  <a:srgbClr val="FFFFFF"/>
+                </a:solidFill>
+                <a:latin typeface="Calibri"/>
+              </a:rPr>
+              <a:t>5</a:t>
+            </a:r>
+          </a:p>
+        </p:txBody>
+      </p:sp>
+      <p:sp>
+        <p:nvSpPr>
+          <p:cNvPr id="17" name="TextBox 16"/>
+          <p:cNvSpPr txBox="1"/>
+          <p:nvPr/>
+        </p:nvSpPr>
+        <p:spPr>
+          <a:xfrm>
+            <a:off x="1097280" y="5367528"/>
+            <a:ext cx="10546080" cy="320040"/>
+          </a:xfrm>
+          <a:prstGeom prst="rect">
+            <a:avLst/>
+          </a:prstGeom>
+          <a:noFill/>
+        </p:spPr>
+        <p:txBody>
+          <a:bodyPr wrap="square" anchor="t" lIns="0" rIns="0" tIns="0" bIns="0">
+            <a:spAutoFit/>
+          </a:bodyPr>
+          <a:lstStyle/>
+          <a:p>
+            <a:pPr algn="l"/>
+            <a:r>
+              <a:rPr sz="1500" b="1">
+                <a:solidFill>
+                  <a:srgbClr val="2D2D2D"/>
+                </a:solidFill>
+                <a:latin typeface="Calibri"/>
+              </a:rPr>
+              <a:t>The M4 Competition</a:t>
+            </a:r>
+          </a:p>
+        </p:txBody>
+      </p:sp>
+      <p:sp>
+        <p:nvSpPr>
+          <p:cNvPr id="18" name="TextBox 17"/>
+          <p:cNvSpPr txBox="1"/>
+          <p:nvPr/>
+        </p:nvSpPr>
+        <p:spPr>
+          <a:xfrm>
+            <a:off x="1097280" y="5678424"/>
+            <a:ext cx="10546080" cy="274320"/>
+          </a:xfrm>
+          <a:prstGeom prst="rect">
+            <a:avLst/>
+          </a:prstGeom>
+          <a:noFill/>
+        </p:spPr>
+        <p:txBody>
+          <a:bodyPr wrap="square" anchor="t" lIns="0" rIns="0" tIns="0" bIns="0">
+            <a:spAutoFit/>
+          </a:bodyPr>
+          <a:lstStyle/>
+          <a:p>
+            <a:pPr algn="l"/>
+            <a:r>
+              <a:rPr sz="1200" b="0">
+                <a:solidFill>
+                  <a:srgbClr val="6E6E6E"/>
+                </a:solidFill>
+                <a:latin typeface="Calibri"/>
+              </a:rPr>
+              <a:t>Makridakis et al. (2020) — IJF 36(1)  —  consolida el uso del sMAPE</a:t>
+            </a:r>
+          </a:p>
+        </p:txBody>
+      </p:sp>
+      <p:sp>
+        <p:nvSpPr>
+          <p:cNvPr id="19" name="Oval 18"/>
+          <p:cNvSpPr/>
+          <p:nvPr/>
+        </p:nvSpPr>
+        <p:spPr>
+          <a:xfrm>
+            <a:off x="548640" y="6473952"/>
+            <a:ext cx="100584" cy="100584"/>
+          </a:xfrm>
+          <a:prstGeom prst="ellipse">
+            <a:avLst/>
+          </a:prstGeom>
+          <a:solidFill>
+            <a:srgbClr val="E4002B"/>
+          </a:solidFill>
+          <a:ln>
+            <a:noFill/>
+          </a:ln>
+          <a:effectLst/>
+        </p:spPr>
+        <p:style>
+          <a:lnRef idx="1">
+            <a:schemeClr val="accent1"/>
+          </a:lnRef>
+          <a:fillRef idx="3">
+            <a:schemeClr val="accent1"/>
+          </a:fillRef>
+          <a:effectRef idx="2">
+            <a:schemeClr val="accent1"/>
+          </a:effectRef>
+          <a:fontRef idx="minor">
+            <a:schemeClr val="lt1"/>
+          </a:fontRef>
+        </p:style>
+        <p:txBody>
+          <a:bodyPr rtlCol="0" anchor="ctr"/>
+          <a:lstStyle/>
+          <a:p>
+            <a:pPr algn="ctr"/>
+          </a:p>
+        </p:txBody>
+      </p:sp>
+      <p:sp>
+        <p:nvSpPr>
+          <p:cNvPr id="20" name="TextBox 19"/>
+          <p:cNvSpPr txBox="1"/>
+          <p:nvPr/>
+        </p:nvSpPr>
+        <p:spPr>
+          <a:xfrm>
+            <a:off x="749808" y="6437376"/>
+            <a:ext cx="7772400" cy="274320"/>
+          </a:xfrm>
+          <a:prstGeom prst="rect">
+            <a:avLst/>
+          </a:prstGeom>
+          <a:noFill/>
+        </p:spPr>
+        <p:txBody>
+          <a:bodyPr wrap="square" anchor="t" lIns="0" rIns="0" tIns="0" bIns="0">
+            <a:spAutoFit/>
+          </a:bodyPr>
+          <a:lstStyle/>
+          <a:p>
+            <a:pPr algn="l"/>
+            <a:r>
+              <a:rPr sz="900" b="0">
+                <a:solidFill>
+                  <a:srgbClr val="6E6E6E"/>
+                </a:solidFill>
+                <a:latin typeface="Calibri"/>
+              </a:rPr>
+              <a:t>S11 — Herramientas para la Ciencia de Datos, UPC</a:t>
+            </a:r>
+          </a:p>
+        </p:txBody>
+      </p:sp>
+      <p:sp>
+        <p:nvSpPr>
+          <p:cNvPr id="21" name="TextBox 20"/>
+          <p:cNvSpPr txBox="1"/>
+          <p:nvPr/>
+        </p:nvSpPr>
+        <p:spPr>
+          <a:xfrm>
+            <a:off x="10180320" y="6437376"/>
+            <a:ext cx="1463040" cy="274320"/>
+          </a:xfrm>
+          <a:prstGeom prst="rect">
+            <a:avLst/>
+          </a:prstGeom>
+          <a:noFill/>
+        </p:spPr>
+        <p:txBody>
+          <a:bodyPr wrap="square" anchor="t" lIns="0" rIns="0" tIns="0" bIns="0">
+            <a:spAutoFit/>
+          </a:bodyPr>
+          <a:lstStyle/>
+          <a:p>
             <a:pPr algn="r"/>
             <a:r>
               <a:rPr sz="900" b="0">
@@ -6861,7 +6142,7 @@
                 </a:solidFill>
                 <a:latin typeface="Calibri"/>
               </a:rPr>
-              <a:t>14 / 18</a:t>
+              <a:t>12 / 13</a:t>
             </a:r>
           </a:p>
         </p:txBody>
@@ -6874,156 +6155,7 @@
 </p:sld>
 </file>
 
-<file path=ppt/slides/slide15.xml><?xml version="1.0" encoding="utf-8"?>
-<p:sld xmlns:a="http://schemas.openxmlformats.org/drawingml/2006/main" xmlns:p="http://schemas.openxmlformats.org/presentationml/2006/main" xmlns:r="http://schemas.openxmlformats.org/officeDocument/2006/relationships">
-  <p:cSld>
-    <p:bg>
-      <p:bgPr>
-        <a:solidFill>
-          <a:srgbClr val="9B1B30"/>
-        </a:solidFill>
-        <a:effectLst/>
-      </p:bgPr>
-    </p:bg>
-    <p:spTree>
-      <p:nvGrpSpPr>
-        <p:cNvPr id="1" name=""/>
-        <p:cNvGrpSpPr/>
-        <p:nvPr/>
-      </p:nvGrpSpPr>
-      <p:grpSpPr/>
-      <p:sp>
-        <p:nvSpPr>
-          <p:cNvPr id="2" name="Oval 1"/>
-          <p:cNvSpPr/>
-          <p:nvPr/>
-        </p:nvSpPr>
-        <p:spPr>
-          <a:xfrm>
-            <a:off x="914400" y="2103120"/>
-            <a:ext cx="2377440" cy="2377440"/>
-          </a:xfrm>
-          <a:prstGeom prst="ellipse">
-            <a:avLst/>
-          </a:prstGeom>
-          <a:solidFill>
-            <a:srgbClr val="FFFFFF"/>
-          </a:solidFill>
-          <a:ln>
-            <a:noFill/>
-          </a:ln>
-          <a:effectLst/>
-        </p:spPr>
-        <p:style>
-          <a:lnRef idx="1">
-            <a:schemeClr val="accent1"/>
-          </a:lnRef>
-          <a:fillRef idx="3">
-            <a:schemeClr val="accent1"/>
-          </a:fillRef>
-          <a:effectRef idx="2">
-            <a:schemeClr val="accent1"/>
-          </a:effectRef>
-          <a:fontRef idx="minor">
-            <a:schemeClr val="lt1"/>
-          </a:fontRef>
-        </p:style>
-        <p:txBody>
-          <a:bodyPr rtlCol="0" anchor="ctr" lIns="0" rIns="0" tIns="0" bIns="0"/>
-          <a:lstStyle/>
-          <a:p>
-            <a:pPr algn="ctr"/>
-            <a:r>
-              <a:rPr sz="10000" b="1">
-                <a:solidFill>
-                  <a:srgbClr val="9B1B30"/>
-                </a:solidFill>
-                <a:latin typeface="Calibri"/>
-              </a:rPr>
-              <a:t>9</a:t>
-            </a:r>
-          </a:p>
-        </p:txBody>
-      </p:sp>
-      <p:sp>
-        <p:nvSpPr>
-          <p:cNvPr id="3" name="TextBox 2"/>
-          <p:cNvSpPr txBox="1"/>
-          <p:nvPr/>
-        </p:nvSpPr>
-        <p:spPr>
-          <a:xfrm>
-            <a:off x="3931920" y="2651760"/>
-            <a:ext cx="7589520" cy="1371600"/>
-          </a:xfrm>
-          <a:prstGeom prst="rect">
-            <a:avLst/>
-          </a:prstGeom>
-          <a:noFill/>
-        </p:spPr>
-        <p:txBody>
-          <a:bodyPr wrap="square" anchor="t" lIns="0" rIns="0" tIns="0" bIns="0">
-            <a:spAutoFit/>
-          </a:bodyPr>
-          <a:lstStyle/>
-          <a:p>
-            <a:pPr algn="l"/>
-            <a:r>
-              <a:rPr sz="4000" b="1">
-                <a:solidFill>
-                  <a:srgbClr val="FFFFFF"/>
-                </a:solidFill>
-                <a:latin typeface="Calibri"/>
-              </a:rPr>
-              <a:t>¿Qué no se puede afirmar, y qué sigue en S12?</a:t>
-            </a:r>
-          </a:p>
-        </p:txBody>
-      </p:sp>
-      <p:sp>
-        <p:nvSpPr>
-          <p:cNvPr id="4" name="TextBox 3"/>
-          <p:cNvSpPr txBox="1"/>
-          <p:nvPr/>
-        </p:nvSpPr>
-        <p:spPr>
-          <a:xfrm>
-            <a:off x="3931920" y="3977639"/>
-            <a:ext cx="7589520" cy="914400"/>
-          </a:xfrm>
-          <a:prstGeom prst="rect">
-            <a:avLst/>
-          </a:prstGeom>
-          <a:noFill/>
-        </p:spPr>
-        <p:txBody>
-          <a:bodyPr wrap="square" anchor="t" lIns="0" rIns="0" tIns="0" bIns="0">
-            <a:spAutoFit/>
-          </a:bodyPr>
-          <a:lstStyle/>
-          <a:p>
-            <a:pPr algn="l"/>
-            <a:r>
-              <a:rPr sz="1700" b="0">
-                <a:solidFill>
-                  <a:srgbClr val="FCEDEE"/>
-                </a:solidFill>
-                <a:latin typeface="Calibri"/>
-              </a:rPr>
-              <a:t>Capítulo 11.9 — viernes, bloque B</a:t>
-            </a:r>
-          </a:p>
-        </p:txBody>
-      </p:sp>
-    </p:spTree>
-  </p:cSld>
-  <p:clrMapOvr>
-    <a:masterClrMapping/>
-  </p:clrMapOvr>
-</p:sld>
-</file>
-
-<file path=ppt/slides/slide16.xml><?xml version="1.0" encoding="utf-8"?>
+<file path=ppt/slides/slide13.xml><?xml version="1.0" encoding="utf-8"?>
 <p:sld xmlns:a="http://schemas.openxmlformats.org/drawingml/2006/main" xmlns:p="http://schemas.openxmlformats.org/presentationml/2006/main" xmlns:r="http://schemas.openxmlformats.org/officeDocument/2006/relationships">
   <p:cSld>
     <p:bg>
@@ -7071,7 +6203,7 @@
                 </a:solidFill>
                 <a:latin typeface="Calibri"/>
               </a:rPr>
-              <a:t>CAPÍTULO 11.9 — ¿QUÉ NO SE PUEDE AFIRMAR, Y QUÉ SIGUE EN S12?</a:t>
+              <a:t>CIERRE</a:t>
             </a:r>
           </a:p>
         </p:txBody>
@@ -7106,21 +6238,65 @@
                 </a:solidFill>
                 <a:latin typeface="Calibri"/>
               </a:rPr>
-              <a:t>Lo que esta sesión no autoriza a afirmar</a:t>
-            </a:r>
-          </a:p>
-        </p:txBody>
-      </p:sp>
-      <p:sp>
-        <p:nvSpPr>
-          <p:cNvPr id="4" name="Oval 3"/>
+              <a:t>El entregable va del dato a la decisión</a:t>
+            </a:r>
+          </a:p>
+        </p:txBody>
+      </p:sp>
+      <p:sp>
+        <p:nvSpPr>
+          <p:cNvPr id="4" name="Rounded Rectangle 3"/>
           <p:cNvSpPr/>
           <p:nvPr/>
         </p:nvSpPr>
         <p:spPr>
           <a:xfrm>
-            <a:off x="548640" y="1965960"/>
-            <a:ext cx="256032" cy="256032"/>
+            <a:off x="548640" y="1874519"/>
+            <a:ext cx="3454400" cy="4114800"/>
+          </a:xfrm>
+          <a:prstGeom prst="roundRect">
+            <a:avLst/>
+          </a:prstGeom>
+          <a:solidFill>
+            <a:srgbClr val="FCEDEE"/>
+          </a:solidFill>
+          <a:ln>
+            <a:noFill/>
+          </a:ln>
+          <a:effectLst/>
+        </p:spPr>
+        <p:style>
+          <a:lnRef idx="1">
+            <a:schemeClr val="accent1"/>
+          </a:lnRef>
+          <a:fillRef idx="3">
+            <a:schemeClr val="accent1"/>
+          </a:fillRef>
+          <a:effectRef idx="2">
+            <a:schemeClr val="accent1"/>
+          </a:effectRef>
+          <a:fontRef idx="minor">
+            <a:schemeClr val="lt1"/>
+          </a:fontRef>
+        </p:style>
+        <p:txBody>
+          <a:bodyPr rtlCol="0" anchor="ctr"/>
+          <a:lstStyle/>
+          <a:p>
+            <a:pPr algn="ctr"/>
+          </a:p>
+        </p:txBody>
+      </p:sp>
+      <p:sp>
+        <p:nvSpPr>
+          <p:cNvPr id="5" name="Oval 4"/>
+          <p:cNvSpPr/>
+          <p:nvPr/>
+        </p:nvSpPr>
+        <p:spPr>
+          <a:xfrm>
+            <a:off x="777240" y="2103119"/>
+            <a:ext cx="640080" cy="640080"/>
           </a:xfrm>
           <a:prstGeom prst="ellipse">
             <a:avLst/>
@@ -7153,27 +6329,27 @@
           <a:p>
             <a:pPr algn="ctr"/>
             <a:r>
-              <a:rPr sz="1200" b="1">
+              <a:rPr sz="2000" b="1">
                 <a:solidFill>
                   <a:srgbClr val="FFFFFF"/>
                 </a:solidFill>
                 <a:latin typeface="Calibri"/>
               </a:rPr>
-              <a:t>•</a:t>
-            </a:r>
-          </a:p>
-        </p:txBody>
-      </p:sp>
-      <p:sp>
-        <p:nvSpPr>
-          <p:cNvPr id="5" name="TextBox 4"/>
+              <a:t>✓</a:t>
+            </a:r>
+          </a:p>
+        </p:txBody>
+      </p:sp>
+      <p:sp>
+        <p:nvSpPr>
+          <p:cNvPr id="6" name="TextBox 5"/>
           <p:cNvSpPr txBox="1"/>
           <p:nvPr/>
         </p:nvSpPr>
         <p:spPr>
           <a:xfrm>
-            <a:off x="960120" y="1920240"/>
-            <a:ext cx="10637520" cy="685800"/>
+            <a:off x="777240" y="2926079"/>
+            <a:ext cx="2997200" cy="640080"/>
           </a:xfrm>
           <a:prstGeom prst="rect">
             <a:avLst/>
@@ -7188,27 +6364,110 @@
           <a:p>
             <a:pPr algn="l"/>
             <a:r>
-              <a:rPr sz="1600" b="0">
+              <a:rPr sz="1800" b="1">
+                <a:solidFill>
+                  <a:srgbClr val="9B1B30"/>
+                </a:solidFill>
+                <a:latin typeface="Calibri"/>
+              </a:rPr>
+              <a:t>Entregable</a:t>
+            </a:r>
+          </a:p>
+        </p:txBody>
+      </p:sp>
+      <p:sp>
+        <p:nvSpPr>
+          <p:cNvPr id="7" name="TextBox 6"/>
+          <p:cNvSpPr txBox="1"/>
+          <p:nvPr/>
+        </p:nvSpPr>
+        <p:spPr>
+          <a:xfrm>
+            <a:off x="777240" y="3611879"/>
+            <a:ext cx="2997200" cy="1645920"/>
+          </a:xfrm>
+          <a:prstGeom prst="rect">
+            <a:avLst/>
+          </a:prstGeom>
+          <a:noFill/>
+        </p:spPr>
+        <p:txBody>
+          <a:bodyPr wrap="square" anchor="t" lIns="0" rIns="0" tIns="0" bIns="0">
+            <a:spAutoFit/>
+          </a:bodyPr>
+          <a:lstStyle/>
+          <a:p>
+            <a:pPr algn="l">
+              <a:lnSpc>
+                <a:spcPct val="115000"/>
+              </a:lnSpc>
+            </a:pPr>
+            <a:r>
+              <a:rPr sz="1300" b="0">
                 <a:solidFill>
                   <a:srgbClr val="2D2D2D"/>
                 </a:solidFill>
                 <a:latin typeface="Calibri"/>
               </a:rPr>
-              <a:t>Un pronóstico no explica por qué sube la demanda</a:t>
-            </a:r>
-          </a:p>
-        </p:txBody>
-      </p:sp>
-      <p:sp>
-        <p:nvSpPr>
-          <p:cNvPr id="6" name="Oval 5"/>
+              <a:t>Pronóstico mensual de demanda: descomponer, comparar 3 modelos con intervalos, validar con rolling-origin sin fuga y recomendar el campeón.</a:t>
+            </a:r>
+          </a:p>
+        </p:txBody>
+      </p:sp>
+      <p:sp>
+        <p:nvSpPr>
+          <p:cNvPr id="8" name="Rounded Rectangle 7"/>
           <p:cNvSpPr/>
           <p:nvPr/>
         </p:nvSpPr>
         <p:spPr>
           <a:xfrm>
-            <a:off x="548640" y="2624328"/>
-            <a:ext cx="256032" cy="256032"/>
+            <a:off x="4368800" y="1874519"/>
+            <a:ext cx="3454400" cy="4114800"/>
+          </a:xfrm>
+          <a:prstGeom prst="roundRect">
+            <a:avLst/>
+          </a:prstGeom>
+          <a:solidFill>
+            <a:srgbClr val="FCEDEE"/>
+          </a:solidFill>
+          <a:ln>
+            <a:noFill/>
+          </a:ln>
+          <a:effectLst/>
+        </p:spPr>
+        <p:style>
+          <a:lnRef idx="1">
+            <a:schemeClr val="accent1"/>
+          </a:lnRef>
+          <a:fillRef idx="3">
+            <a:schemeClr val="accent1"/>
+          </a:fillRef>
+          <a:effectRef idx="2">
+            <a:schemeClr val="accent1"/>
+          </a:effectRef>
+          <a:fontRef idx="minor">
+            <a:schemeClr val="lt1"/>
+          </a:fontRef>
+        </p:style>
+        <p:txBody>
+          <a:bodyPr rtlCol="0" anchor="ctr"/>
+          <a:lstStyle/>
+          <a:p>
+            <a:pPr algn="ctr"/>
+          </a:p>
+        </p:txBody>
+      </p:sp>
+      <p:sp>
+        <p:nvSpPr>
+          <p:cNvPr id="9" name="Oval 8"/>
+          <p:cNvSpPr/>
+          <p:nvPr/>
+        </p:nvSpPr>
+        <p:spPr>
+          <a:xfrm>
+            <a:off x="4597400" y="2103119"/>
+            <a:ext cx="640080" cy="640080"/>
           </a:xfrm>
           <a:prstGeom prst="ellipse">
             <a:avLst/>
@@ -7241,27 +6500,27 @@
           <a:p>
             <a:pPr algn="ctr"/>
             <a:r>
-              <a:rPr sz="1200" b="1">
+              <a:rPr sz="2000" b="1">
                 <a:solidFill>
                   <a:srgbClr val="FFFFFF"/>
                 </a:solidFill>
                 <a:latin typeface="Calibri"/>
               </a:rPr>
-              <a:t>•</a:t>
-            </a:r>
-          </a:p>
-        </p:txBody>
-      </p:sp>
-      <p:sp>
-        <p:nvSpPr>
-          <p:cNvPr id="7" name="TextBox 6"/>
+              <a:t>→</a:t>
+            </a:r>
+          </a:p>
+        </p:txBody>
+      </p:sp>
+      <p:sp>
+        <p:nvSpPr>
+          <p:cNvPr id="10" name="TextBox 9"/>
           <p:cNvSpPr txBox="1"/>
           <p:nvPr/>
         </p:nvSpPr>
         <p:spPr>
           <a:xfrm>
-            <a:off x="960120" y="2578608"/>
-            <a:ext cx="10637520" cy="685800"/>
+            <a:off x="4597400" y="2926079"/>
+            <a:ext cx="2997200" cy="640080"/>
           </a:xfrm>
           <a:prstGeom prst="rect">
             <a:avLst/>
@@ -7276,27 +6535,110 @@
           <a:p>
             <a:pPr algn="l"/>
             <a:r>
-              <a:rPr sz="1600" b="0">
+              <a:rPr sz="1800" b="1">
+                <a:solidFill>
+                  <a:srgbClr val="9B1B30"/>
+                </a:solidFill>
+                <a:latin typeface="Calibri"/>
+              </a:rPr>
+              <a:t>Evaluación</a:t>
+            </a:r>
+          </a:p>
+        </p:txBody>
+      </p:sp>
+      <p:sp>
+        <p:nvSpPr>
+          <p:cNvPr id="11" name="TextBox 10"/>
+          <p:cNvSpPr txBox="1"/>
+          <p:nvPr/>
+        </p:nvSpPr>
+        <p:spPr>
+          <a:xfrm>
+            <a:off x="4597400" y="3611879"/>
+            <a:ext cx="2997200" cy="1645920"/>
+          </a:xfrm>
+          <a:prstGeom prst="rect">
+            <a:avLst/>
+          </a:prstGeom>
+          <a:noFill/>
+        </p:spPr>
+        <p:txBody>
+          <a:bodyPr wrap="square" anchor="t" lIns="0" rIns="0" tIns="0" bIns="0">
+            <a:spAutoFit/>
+          </a:bodyPr>
+          <a:lstStyle/>
+          <a:p>
+            <a:pPr algn="l">
+              <a:lnSpc>
+                <a:spcPct val="115000"/>
+              </a:lnSpc>
+            </a:pPr>
+            <a:r>
+              <a:rPr sz="1300" b="0">
                 <a:solidFill>
                   <a:srgbClr val="2D2D2D"/>
                 </a:solidFill>
                 <a:latin typeface="Calibri"/>
               </a:rPr>
-              <a:t>Extrapolar más allá del horizonte validado no es pronosticar, es adivinar</a:t>
-            </a:r>
-          </a:p>
-        </p:txBody>
-      </p:sp>
-      <p:sp>
-        <p:nvSpPr>
-          <p:cNvPr id="8" name="Oval 7"/>
+              <a:t>Control corto de cierre y banco [S11]. Rúbrica vigesimal 0-20.</a:t>
+            </a:r>
+          </a:p>
+        </p:txBody>
+      </p:sp>
+      <p:sp>
+        <p:nvSpPr>
+          <p:cNvPr id="12" name="Rounded Rectangle 11"/>
           <p:cNvSpPr/>
           <p:nvPr/>
         </p:nvSpPr>
         <p:spPr>
           <a:xfrm>
-            <a:off x="548640" y="3282696"/>
-            <a:ext cx="256032" cy="256032"/>
+            <a:off x="8188960" y="1874519"/>
+            <a:ext cx="3454400" cy="4114800"/>
+          </a:xfrm>
+          <a:prstGeom prst="roundRect">
+            <a:avLst/>
+          </a:prstGeom>
+          <a:solidFill>
+            <a:srgbClr val="FCEDEE"/>
+          </a:solidFill>
+          <a:ln>
+            <a:noFill/>
+          </a:ln>
+          <a:effectLst/>
+        </p:spPr>
+        <p:style>
+          <a:lnRef idx="1">
+            <a:schemeClr val="accent1"/>
+          </a:lnRef>
+          <a:fillRef idx="3">
+            <a:schemeClr val="accent1"/>
+          </a:fillRef>
+          <a:effectRef idx="2">
+            <a:schemeClr val="accent1"/>
+          </a:effectRef>
+          <a:fontRef idx="minor">
+            <a:schemeClr val="lt1"/>
+          </a:fontRef>
+        </p:style>
+        <p:txBody>
+          <a:bodyPr rtlCol="0" anchor="ctr"/>
+          <a:lstStyle/>
+          <a:p>
+            <a:pPr algn="ctr"/>
+          </a:p>
+        </p:txBody>
+      </p:sp>
+      <p:sp>
+        <p:nvSpPr>
+          <p:cNvPr id="13" name="Oval 12"/>
+          <p:cNvSpPr/>
+          <p:nvPr/>
+        </p:nvSpPr>
+        <p:spPr>
+          <a:xfrm>
+            <a:off x="8417560" y="2103119"/>
+            <a:ext cx="640080" cy="640080"/>
           </a:xfrm>
           <a:prstGeom prst="ellipse">
             <a:avLst/>
@@ -7329,27 +6671,27 @@
           <a:p>
             <a:pPr algn="ctr"/>
             <a:r>
-              <a:rPr sz="1200" b="1">
+              <a:rPr sz="2000" b="1">
                 <a:solidFill>
                   <a:srgbClr val="FFFFFF"/>
                 </a:solidFill>
                 <a:latin typeface="Calibri"/>
               </a:rPr>
-              <a:t>•</a:t>
-            </a:r>
-          </a:p>
-        </p:txBody>
-      </p:sp>
-      <p:sp>
-        <p:nvSpPr>
-          <p:cNvPr id="9" name="TextBox 8"/>
+              <a:t>★</a:t>
+            </a:r>
+          </a:p>
+        </p:txBody>
+      </p:sp>
+      <p:sp>
+        <p:nvSpPr>
+          <p:cNvPr id="14" name="TextBox 13"/>
           <p:cNvSpPr txBox="1"/>
           <p:nvPr/>
         </p:nvSpPr>
         <p:spPr>
           <a:xfrm>
-            <a:off x="960120" y="3236976"/>
-            <a:ext cx="10637520" cy="685800"/>
+            <a:off x="8417560" y="2926079"/>
+            <a:ext cx="2997200" cy="640080"/>
           </a:xfrm>
           <a:prstGeom prst="rect">
             <a:avLst/>
@@ -7364,20 +6706,59 @@
           <a:p>
             <a:pPr algn="l"/>
             <a:r>
-              <a:rPr sz="1600" b="0">
+              <a:rPr sz="1800" b="1">
+                <a:solidFill>
+                  <a:srgbClr val="9B1B30"/>
+                </a:solidFill>
+                <a:latin typeface="Calibri"/>
+              </a:rPr>
+              <a:t>Próxima sesión</a:t>
+            </a:r>
+          </a:p>
+        </p:txBody>
+      </p:sp>
+      <p:sp>
+        <p:nvSpPr>
+          <p:cNvPr id="15" name="TextBox 14"/>
+          <p:cNvSpPr txBox="1"/>
+          <p:nvPr/>
+        </p:nvSpPr>
+        <p:spPr>
+          <a:xfrm>
+            <a:off x="8417560" y="3611879"/>
+            <a:ext cx="2997200" cy="1645920"/>
+          </a:xfrm>
+          <a:prstGeom prst="rect">
+            <a:avLst/>
+          </a:prstGeom>
+          <a:noFill/>
+        </p:spPr>
+        <p:txBody>
+          <a:bodyPr wrap="square" anchor="t" lIns="0" rIns="0" tIns="0" bIns="0">
+            <a:spAutoFit/>
+          </a:bodyPr>
+          <a:lstStyle/>
+          <a:p>
+            <a:pPr algn="l">
+              <a:lnSpc>
+                <a:spcPct val="115000"/>
+              </a:lnSpc>
+            </a:pPr>
+            <a:r>
+              <a:rPr sz="1300" b="0">
                 <a:solidFill>
                   <a:srgbClr val="2D2D2D"/>
                 </a:solidFill>
                 <a:latin typeface="Calibri"/>
               </a:rPr>
-              <a:t>Ninguna métrica vale si se calculó con partición aleatoria</a:t>
-            </a:r>
-          </a:p>
-        </p:txBody>
-      </p:sp>
-      <p:sp>
-        <p:nvSpPr>
-          <p:cNvPr id="10" name="Oval 9"/>
+              <a:t>S12 — Inferencia causal: solo se nombra como conexión.</a:t>
+            </a:r>
+          </a:p>
+        </p:txBody>
+      </p:sp>
+      <p:sp>
+        <p:nvSpPr>
+          <p:cNvPr id="16" name="Oval 15"/>
           <p:cNvSpPr/>
           <p:nvPr/>
         </p:nvSpPr>
@@ -7421,7 +6802,7 @@
       </p:sp>
       <p:sp>
         <p:nvSpPr>
-          <p:cNvPr id="11" name="TextBox 10"/>
+          <p:cNvPr id="17" name="TextBox 16"/>
           <p:cNvSpPr txBox="1"/>
           <p:nvPr/>
         </p:nvSpPr>
@@ -7456,7 +6837,7 @@
       </p:sp>
       <p:sp>
         <p:nvSpPr>
-          <p:cNvPr id="12" name="TextBox 11"/>
+          <p:cNvPr id="18" name="TextBox 17"/>
           <p:cNvSpPr txBox="1"/>
           <p:nvPr/>
         </p:nvSpPr>
@@ -7484,1555 +6865,7 @@
                 </a:solidFill>
                 <a:latin typeface="Calibri"/>
               </a:rPr>
-              <a:t>16 / 18</a:t>
-            </a:r>
-          </a:p>
-        </p:txBody>
-      </p:sp>
-    </p:spTree>
-  </p:cSld>
-  <p:clrMapOvr>
-    <a:masterClrMapping/>
-  </p:clrMapOvr>
-</p:sld>
-</file>
-
-<file path=ppt/slides/slide17.xml><?xml version="1.0" encoding="utf-8"?>
-<p:sld xmlns:a="http://schemas.openxmlformats.org/drawingml/2006/main" xmlns:p="http://schemas.openxmlformats.org/presentationml/2006/main" xmlns:r="http://schemas.openxmlformats.org/officeDocument/2006/relationships">
-  <p:cSld>
-    <p:bg>
-      <p:bgPr>
-        <a:solidFill>
-          <a:srgbClr val="FFFFFF"/>
-        </a:solidFill>
-        <a:effectLst/>
-      </p:bgPr>
-    </p:bg>
-    <p:spTree>
-      <p:nvGrpSpPr>
-        <p:cNvPr id="1" name=""/>
-        <p:cNvGrpSpPr/>
-        <p:nvPr/>
-      </p:nvGrpSpPr>
-      <p:grpSpPr/>
-      <p:sp>
-        <p:nvSpPr>
-          <p:cNvPr id="2" name="TextBox 1"/>
-          <p:cNvSpPr txBox="1"/>
-          <p:nvPr/>
-        </p:nvSpPr>
-        <p:spPr>
-          <a:xfrm>
-            <a:off x="548640" y="411480"/>
-            <a:ext cx="11094720" cy="292608"/>
-          </a:xfrm>
-          <a:prstGeom prst="rect">
-            <a:avLst/>
-          </a:prstGeom>
-          <a:noFill/>
-        </p:spPr>
-        <p:txBody>
-          <a:bodyPr wrap="square" anchor="t" lIns="0" rIns="0" tIns="0" bIns="0">
-            <a:spAutoFit/>
-          </a:bodyPr>
-          <a:lstStyle/>
-          <a:p>
-            <a:pPr algn="l"/>
-            <a:r>
-              <a:rPr sz="1300" b="1">
-                <a:solidFill>
-                  <a:srgbClr val="9B1B30"/>
-                </a:solidFill>
-                <a:latin typeface="Calibri"/>
-              </a:rPr>
-              <a:t>CIERRE</a:t>
-            </a:r>
-          </a:p>
-        </p:txBody>
-      </p:sp>
-      <p:sp>
-        <p:nvSpPr>
-          <p:cNvPr id="3" name="TextBox 2"/>
-          <p:cNvSpPr txBox="1"/>
-          <p:nvPr/>
-        </p:nvSpPr>
-        <p:spPr>
-          <a:xfrm>
-            <a:off x="548640" y="731520"/>
-            <a:ext cx="11094720" cy="777240"/>
-          </a:xfrm>
-          <a:prstGeom prst="rect">
-            <a:avLst/>
-          </a:prstGeom>
-          <a:noFill/>
-        </p:spPr>
-        <p:txBody>
-          <a:bodyPr wrap="square" anchor="t" lIns="0" rIns="0" tIns="0" bIns="0">
-            <a:spAutoFit/>
-          </a:bodyPr>
-          <a:lstStyle/>
-          <a:p>
-            <a:pPr algn="l"/>
-            <a:r>
-              <a:rPr sz="4000" b="1">
-                <a:solidFill>
-                  <a:srgbClr val="2D2D2D"/>
-                </a:solidFill>
-                <a:latin typeface="Calibri"/>
-              </a:rPr>
-              <a:t>El entregable va del dato a la decisión</a:t>
-            </a:r>
-          </a:p>
-        </p:txBody>
-      </p:sp>
-      <p:sp>
-        <p:nvSpPr>
-          <p:cNvPr id="4" name="Rounded Rectangle 3"/>
-          <p:cNvSpPr/>
-          <p:nvPr/>
-        </p:nvSpPr>
-        <p:spPr>
-          <a:xfrm>
-            <a:off x="548640" y="1874519"/>
-            <a:ext cx="3454400" cy="4114800"/>
-          </a:xfrm>
-          <a:prstGeom prst="roundRect">
-            <a:avLst/>
-          </a:prstGeom>
-          <a:solidFill>
-            <a:srgbClr val="FCEDEE"/>
-          </a:solidFill>
-          <a:ln>
-            <a:noFill/>
-          </a:ln>
-          <a:effectLst/>
-        </p:spPr>
-        <p:style>
-          <a:lnRef idx="1">
-            <a:schemeClr val="accent1"/>
-          </a:lnRef>
-          <a:fillRef idx="3">
-            <a:schemeClr val="accent1"/>
-          </a:fillRef>
-          <a:effectRef idx="2">
-            <a:schemeClr val="accent1"/>
-          </a:effectRef>
-          <a:fontRef idx="minor">
-            <a:schemeClr val="lt1"/>
-          </a:fontRef>
-        </p:style>
-        <p:txBody>
-          <a:bodyPr rtlCol="0" anchor="ctr"/>
-          <a:lstStyle/>
-          <a:p>
-            <a:pPr algn="ctr"/>
-          </a:p>
-        </p:txBody>
-      </p:sp>
-      <p:sp>
-        <p:nvSpPr>
-          <p:cNvPr id="5" name="Oval 4"/>
-          <p:cNvSpPr/>
-          <p:nvPr/>
-        </p:nvSpPr>
-        <p:spPr>
-          <a:xfrm>
-            <a:off x="777240" y="2103119"/>
-            <a:ext cx="640080" cy="640080"/>
-          </a:xfrm>
-          <a:prstGeom prst="ellipse">
-            <a:avLst/>
-          </a:prstGeom>
-          <a:solidFill>
-            <a:srgbClr val="E4002B"/>
-          </a:solidFill>
-          <a:ln>
-            <a:noFill/>
-          </a:ln>
-          <a:effectLst/>
-        </p:spPr>
-        <p:style>
-          <a:lnRef idx="1">
-            <a:schemeClr val="accent1"/>
-          </a:lnRef>
-          <a:fillRef idx="3">
-            <a:schemeClr val="accent1"/>
-          </a:fillRef>
-          <a:effectRef idx="2">
-            <a:schemeClr val="accent1"/>
-          </a:effectRef>
-          <a:fontRef idx="minor">
-            <a:schemeClr val="lt1"/>
-          </a:fontRef>
-        </p:style>
-        <p:txBody>
-          <a:bodyPr rtlCol="0" anchor="ctr" lIns="0" rIns="0" tIns="0" bIns="0"/>
-          <a:lstStyle/>
-          <a:p>
-            <a:pPr algn="ctr"/>
-            <a:r>
-              <a:rPr sz="2000" b="1">
-                <a:solidFill>
-                  <a:srgbClr val="FFFFFF"/>
-                </a:solidFill>
-                <a:latin typeface="Calibri"/>
-              </a:rPr>
-              <a:t>✓</a:t>
-            </a:r>
-          </a:p>
-        </p:txBody>
-      </p:sp>
-      <p:sp>
-        <p:nvSpPr>
-          <p:cNvPr id="6" name="TextBox 5"/>
-          <p:cNvSpPr txBox="1"/>
-          <p:nvPr/>
-        </p:nvSpPr>
-        <p:spPr>
-          <a:xfrm>
-            <a:off x="777240" y="2926079"/>
-            <a:ext cx="2997200" cy="640080"/>
-          </a:xfrm>
-          <a:prstGeom prst="rect">
-            <a:avLst/>
-          </a:prstGeom>
-          <a:noFill/>
-        </p:spPr>
-        <p:txBody>
-          <a:bodyPr wrap="square" anchor="t" lIns="0" rIns="0" tIns="0" bIns="0">
-            <a:spAutoFit/>
-          </a:bodyPr>
-          <a:lstStyle/>
-          <a:p>
-            <a:pPr algn="l"/>
-            <a:r>
-              <a:rPr sz="1800" b="1">
-                <a:solidFill>
-                  <a:srgbClr val="9B1B30"/>
-                </a:solidFill>
-                <a:latin typeface="Calibri"/>
-              </a:rPr>
-              <a:t>Entregable</a:t>
-            </a:r>
-          </a:p>
-        </p:txBody>
-      </p:sp>
-      <p:sp>
-        <p:nvSpPr>
-          <p:cNvPr id="7" name="TextBox 6"/>
-          <p:cNvSpPr txBox="1"/>
-          <p:nvPr/>
-        </p:nvSpPr>
-        <p:spPr>
-          <a:xfrm>
-            <a:off x="777240" y="3611879"/>
-            <a:ext cx="2997200" cy="1645920"/>
-          </a:xfrm>
-          <a:prstGeom prst="rect">
-            <a:avLst/>
-          </a:prstGeom>
-          <a:noFill/>
-        </p:spPr>
-        <p:txBody>
-          <a:bodyPr wrap="square" anchor="t" lIns="0" rIns="0" tIns="0" bIns="0">
-            <a:spAutoFit/>
-          </a:bodyPr>
-          <a:lstStyle/>
-          <a:p>
-            <a:pPr algn="l">
-              <a:lnSpc>
-                <a:spcPct val="115000"/>
-              </a:lnSpc>
-            </a:pPr>
-            <a:r>
-              <a:rPr sz="1300" b="0">
-                <a:solidFill>
-                  <a:srgbClr val="2D2D2D"/>
-                </a:solidFill>
-                <a:latin typeface="Calibri"/>
-              </a:rPr>
-              <a:t>Pronóstico mensual de demanda: descomponer, comparar 3 modelos con intervalos, validar con rolling-origin sin fuga y recomendar el campeón.</a:t>
-            </a:r>
-          </a:p>
-        </p:txBody>
-      </p:sp>
-      <p:sp>
-        <p:nvSpPr>
-          <p:cNvPr id="8" name="Rounded Rectangle 7"/>
-          <p:cNvSpPr/>
-          <p:nvPr/>
-        </p:nvSpPr>
-        <p:spPr>
-          <a:xfrm>
-            <a:off x="4368800" y="1874519"/>
-            <a:ext cx="3454400" cy="4114800"/>
-          </a:xfrm>
-          <a:prstGeom prst="roundRect">
-            <a:avLst/>
-          </a:prstGeom>
-          <a:solidFill>
-            <a:srgbClr val="FCEDEE"/>
-          </a:solidFill>
-          <a:ln>
-            <a:noFill/>
-          </a:ln>
-          <a:effectLst/>
-        </p:spPr>
-        <p:style>
-          <a:lnRef idx="1">
-            <a:schemeClr val="accent1"/>
-          </a:lnRef>
-          <a:fillRef idx="3">
-            <a:schemeClr val="accent1"/>
-          </a:fillRef>
-          <a:effectRef idx="2">
-            <a:schemeClr val="accent1"/>
-          </a:effectRef>
-          <a:fontRef idx="minor">
-            <a:schemeClr val="lt1"/>
-          </a:fontRef>
-        </p:style>
-        <p:txBody>
-          <a:bodyPr rtlCol="0" anchor="ctr"/>
-          <a:lstStyle/>
-          <a:p>
-            <a:pPr algn="ctr"/>
-          </a:p>
-        </p:txBody>
-      </p:sp>
-      <p:sp>
-        <p:nvSpPr>
-          <p:cNvPr id="9" name="Oval 8"/>
-          <p:cNvSpPr/>
-          <p:nvPr/>
-        </p:nvSpPr>
-        <p:spPr>
-          <a:xfrm>
-            <a:off x="4597400" y="2103119"/>
-            <a:ext cx="640080" cy="640080"/>
-          </a:xfrm>
-          <a:prstGeom prst="ellipse">
-            <a:avLst/>
-          </a:prstGeom>
-          <a:solidFill>
-            <a:srgbClr val="E4002B"/>
-          </a:solidFill>
-          <a:ln>
-            <a:noFill/>
-          </a:ln>
-          <a:effectLst/>
-        </p:spPr>
-        <p:style>
-          <a:lnRef idx="1">
-            <a:schemeClr val="accent1"/>
-          </a:lnRef>
-          <a:fillRef idx="3">
-            <a:schemeClr val="accent1"/>
-          </a:fillRef>
-          <a:effectRef idx="2">
-            <a:schemeClr val="accent1"/>
-          </a:effectRef>
-          <a:fontRef idx="minor">
-            <a:schemeClr val="lt1"/>
-          </a:fontRef>
-        </p:style>
-        <p:txBody>
-          <a:bodyPr rtlCol="0" anchor="ctr" lIns="0" rIns="0" tIns="0" bIns="0"/>
-          <a:lstStyle/>
-          <a:p>
-            <a:pPr algn="ctr"/>
-            <a:r>
-              <a:rPr sz="2000" b="1">
-                <a:solidFill>
-                  <a:srgbClr val="FFFFFF"/>
-                </a:solidFill>
-                <a:latin typeface="Calibri"/>
-              </a:rPr>
-              <a:t>→</a:t>
-            </a:r>
-          </a:p>
-        </p:txBody>
-      </p:sp>
-      <p:sp>
-        <p:nvSpPr>
-          <p:cNvPr id="10" name="TextBox 9"/>
-          <p:cNvSpPr txBox="1"/>
-          <p:nvPr/>
-        </p:nvSpPr>
-        <p:spPr>
-          <a:xfrm>
-            <a:off x="4597400" y="2926079"/>
-            <a:ext cx="2997200" cy="640080"/>
-          </a:xfrm>
-          <a:prstGeom prst="rect">
-            <a:avLst/>
-          </a:prstGeom>
-          <a:noFill/>
-        </p:spPr>
-        <p:txBody>
-          <a:bodyPr wrap="square" anchor="t" lIns="0" rIns="0" tIns="0" bIns="0">
-            <a:spAutoFit/>
-          </a:bodyPr>
-          <a:lstStyle/>
-          <a:p>
-            <a:pPr algn="l"/>
-            <a:r>
-              <a:rPr sz="1800" b="1">
-                <a:solidFill>
-                  <a:srgbClr val="9B1B30"/>
-                </a:solidFill>
-                <a:latin typeface="Calibri"/>
-              </a:rPr>
-              <a:t>Evaluación</a:t>
-            </a:r>
-          </a:p>
-        </p:txBody>
-      </p:sp>
-      <p:sp>
-        <p:nvSpPr>
-          <p:cNvPr id="11" name="TextBox 10"/>
-          <p:cNvSpPr txBox="1"/>
-          <p:nvPr/>
-        </p:nvSpPr>
-        <p:spPr>
-          <a:xfrm>
-            <a:off x="4597400" y="3611879"/>
-            <a:ext cx="2997200" cy="1645920"/>
-          </a:xfrm>
-          <a:prstGeom prst="rect">
-            <a:avLst/>
-          </a:prstGeom>
-          <a:noFill/>
-        </p:spPr>
-        <p:txBody>
-          <a:bodyPr wrap="square" anchor="t" lIns="0" rIns="0" tIns="0" bIns="0">
-            <a:spAutoFit/>
-          </a:bodyPr>
-          <a:lstStyle/>
-          <a:p>
-            <a:pPr algn="l">
-              <a:lnSpc>
-                <a:spcPct val="115000"/>
-              </a:lnSpc>
-            </a:pPr>
-            <a:r>
-              <a:rPr sz="1300" b="0">
-                <a:solidFill>
-                  <a:srgbClr val="2D2D2D"/>
-                </a:solidFill>
-                <a:latin typeface="Calibri"/>
-              </a:rPr>
-              <a:t>Control corto de cierre y banco [S11]. Rúbrica vigesimal 0-20.</a:t>
-            </a:r>
-          </a:p>
-        </p:txBody>
-      </p:sp>
-      <p:sp>
-        <p:nvSpPr>
-          <p:cNvPr id="12" name="Rounded Rectangle 11"/>
-          <p:cNvSpPr/>
-          <p:nvPr/>
-        </p:nvSpPr>
-        <p:spPr>
-          <a:xfrm>
-            <a:off x="8188960" y="1874519"/>
-            <a:ext cx="3454400" cy="4114800"/>
-          </a:xfrm>
-          <a:prstGeom prst="roundRect">
-            <a:avLst/>
-          </a:prstGeom>
-          <a:solidFill>
-            <a:srgbClr val="FCEDEE"/>
-          </a:solidFill>
-          <a:ln>
-            <a:noFill/>
-          </a:ln>
-          <a:effectLst/>
-        </p:spPr>
-        <p:style>
-          <a:lnRef idx="1">
-            <a:schemeClr val="accent1"/>
-          </a:lnRef>
-          <a:fillRef idx="3">
-            <a:schemeClr val="accent1"/>
-          </a:fillRef>
-          <a:effectRef idx="2">
-            <a:schemeClr val="accent1"/>
-          </a:effectRef>
-          <a:fontRef idx="minor">
-            <a:schemeClr val="lt1"/>
-          </a:fontRef>
-        </p:style>
-        <p:txBody>
-          <a:bodyPr rtlCol="0" anchor="ctr"/>
-          <a:lstStyle/>
-          <a:p>
-            <a:pPr algn="ctr"/>
-          </a:p>
-        </p:txBody>
-      </p:sp>
-      <p:sp>
-        <p:nvSpPr>
-          <p:cNvPr id="13" name="Oval 12"/>
-          <p:cNvSpPr/>
-          <p:nvPr/>
-        </p:nvSpPr>
-        <p:spPr>
-          <a:xfrm>
-            <a:off x="8417560" y="2103119"/>
-            <a:ext cx="640080" cy="640080"/>
-          </a:xfrm>
-          <a:prstGeom prst="ellipse">
-            <a:avLst/>
-          </a:prstGeom>
-          <a:solidFill>
-            <a:srgbClr val="E4002B"/>
-          </a:solidFill>
-          <a:ln>
-            <a:noFill/>
-          </a:ln>
-          <a:effectLst/>
-        </p:spPr>
-        <p:style>
-          <a:lnRef idx="1">
-            <a:schemeClr val="accent1"/>
-          </a:lnRef>
-          <a:fillRef idx="3">
-            <a:schemeClr val="accent1"/>
-          </a:fillRef>
-          <a:effectRef idx="2">
-            <a:schemeClr val="accent1"/>
-          </a:effectRef>
-          <a:fontRef idx="minor">
-            <a:schemeClr val="lt1"/>
-          </a:fontRef>
-        </p:style>
-        <p:txBody>
-          <a:bodyPr rtlCol="0" anchor="ctr" lIns="0" rIns="0" tIns="0" bIns="0"/>
-          <a:lstStyle/>
-          <a:p>
-            <a:pPr algn="ctr"/>
-            <a:r>
-              <a:rPr sz="2000" b="1">
-                <a:solidFill>
-                  <a:srgbClr val="FFFFFF"/>
-                </a:solidFill>
-                <a:latin typeface="Calibri"/>
-              </a:rPr>
-              <a:t>★</a:t>
-            </a:r>
-          </a:p>
-        </p:txBody>
-      </p:sp>
-      <p:sp>
-        <p:nvSpPr>
-          <p:cNvPr id="14" name="TextBox 13"/>
-          <p:cNvSpPr txBox="1"/>
-          <p:nvPr/>
-        </p:nvSpPr>
-        <p:spPr>
-          <a:xfrm>
-            <a:off x="8417560" y="2926079"/>
-            <a:ext cx="2997200" cy="640080"/>
-          </a:xfrm>
-          <a:prstGeom prst="rect">
-            <a:avLst/>
-          </a:prstGeom>
-          <a:noFill/>
-        </p:spPr>
-        <p:txBody>
-          <a:bodyPr wrap="square" anchor="t" lIns="0" rIns="0" tIns="0" bIns="0">
-            <a:spAutoFit/>
-          </a:bodyPr>
-          <a:lstStyle/>
-          <a:p>
-            <a:pPr algn="l"/>
-            <a:r>
-              <a:rPr sz="1800" b="1">
-                <a:solidFill>
-                  <a:srgbClr val="9B1B30"/>
-                </a:solidFill>
-                <a:latin typeface="Calibri"/>
-              </a:rPr>
-              <a:t>Próxima sesión</a:t>
-            </a:r>
-          </a:p>
-        </p:txBody>
-      </p:sp>
-      <p:sp>
-        <p:nvSpPr>
-          <p:cNvPr id="15" name="TextBox 14"/>
-          <p:cNvSpPr txBox="1"/>
-          <p:nvPr/>
-        </p:nvSpPr>
-        <p:spPr>
-          <a:xfrm>
-            <a:off x="8417560" y="3611879"/>
-            <a:ext cx="2997200" cy="1645920"/>
-          </a:xfrm>
-          <a:prstGeom prst="rect">
-            <a:avLst/>
-          </a:prstGeom>
-          <a:noFill/>
-        </p:spPr>
-        <p:txBody>
-          <a:bodyPr wrap="square" anchor="t" lIns="0" rIns="0" tIns="0" bIns="0">
-            <a:spAutoFit/>
-          </a:bodyPr>
-          <a:lstStyle/>
-          <a:p>
-            <a:pPr algn="l">
-              <a:lnSpc>
-                <a:spcPct val="115000"/>
-              </a:lnSpc>
-            </a:pPr>
-            <a:r>
-              <a:rPr sz="1300" b="0">
-                <a:solidFill>
-                  <a:srgbClr val="2D2D2D"/>
-                </a:solidFill>
-                <a:latin typeface="Calibri"/>
-              </a:rPr>
-              <a:t>S12 — Inferencia causal: solo se nombra como conexión.</a:t>
-            </a:r>
-          </a:p>
-        </p:txBody>
-      </p:sp>
-      <p:sp>
-        <p:nvSpPr>
-          <p:cNvPr id="16" name="Oval 15"/>
-          <p:cNvSpPr/>
-          <p:nvPr/>
-        </p:nvSpPr>
-        <p:spPr>
-          <a:xfrm>
-            <a:off x="548640" y="6473952"/>
-            <a:ext cx="100584" cy="100584"/>
-          </a:xfrm>
-          <a:prstGeom prst="ellipse">
-            <a:avLst/>
-          </a:prstGeom>
-          <a:solidFill>
-            <a:srgbClr val="E4002B"/>
-          </a:solidFill>
-          <a:ln>
-            <a:noFill/>
-          </a:ln>
-          <a:effectLst/>
-        </p:spPr>
-        <p:style>
-          <a:lnRef idx="1">
-            <a:schemeClr val="accent1"/>
-          </a:lnRef>
-          <a:fillRef idx="3">
-            <a:schemeClr val="accent1"/>
-          </a:fillRef>
-          <a:effectRef idx="2">
-            <a:schemeClr val="accent1"/>
-          </a:effectRef>
-          <a:fontRef idx="minor">
-            <a:schemeClr val="lt1"/>
-          </a:fontRef>
-        </p:style>
-        <p:txBody>
-          <a:bodyPr rtlCol="0" anchor="ctr"/>
-          <a:lstStyle/>
-          <a:p>
-            <a:pPr algn="ctr"/>
-          </a:p>
-        </p:txBody>
-      </p:sp>
-      <p:sp>
-        <p:nvSpPr>
-          <p:cNvPr id="17" name="TextBox 16"/>
-          <p:cNvSpPr txBox="1"/>
-          <p:nvPr/>
-        </p:nvSpPr>
-        <p:spPr>
-          <a:xfrm>
-            <a:off x="749808" y="6437376"/>
-            <a:ext cx="7772400" cy="274320"/>
-          </a:xfrm>
-          <a:prstGeom prst="rect">
-            <a:avLst/>
-          </a:prstGeom>
-          <a:noFill/>
-        </p:spPr>
-        <p:txBody>
-          <a:bodyPr wrap="square" anchor="t" lIns="0" rIns="0" tIns="0" bIns="0">
-            <a:spAutoFit/>
-          </a:bodyPr>
-          <a:lstStyle/>
-          <a:p>
-            <a:pPr algn="l"/>
-            <a:r>
-              <a:rPr sz="900" b="0">
-                <a:solidFill>
-                  <a:srgbClr val="6E6E6E"/>
-                </a:solidFill>
-                <a:latin typeface="Calibri"/>
-              </a:rPr>
-              <a:t>S11 — Herramientas para la Ciencia de Datos, UPC</a:t>
-            </a:r>
-          </a:p>
-        </p:txBody>
-      </p:sp>
-      <p:sp>
-        <p:nvSpPr>
-          <p:cNvPr id="18" name="TextBox 17"/>
-          <p:cNvSpPr txBox="1"/>
-          <p:nvPr/>
-        </p:nvSpPr>
-        <p:spPr>
-          <a:xfrm>
-            <a:off x="10180320" y="6437376"/>
-            <a:ext cx="1463040" cy="274320"/>
-          </a:xfrm>
-          <a:prstGeom prst="rect">
-            <a:avLst/>
-          </a:prstGeom>
-          <a:noFill/>
-        </p:spPr>
-        <p:txBody>
-          <a:bodyPr wrap="square" anchor="t" lIns="0" rIns="0" tIns="0" bIns="0">
-            <a:spAutoFit/>
-          </a:bodyPr>
-          <a:lstStyle/>
-          <a:p>
-            <a:pPr algn="r"/>
-            <a:r>
-              <a:rPr sz="900" b="0">
-                <a:solidFill>
-                  <a:srgbClr val="6E6E6E"/>
-                </a:solidFill>
-                <a:latin typeface="Calibri"/>
-              </a:rPr>
-              <a:t>17 / 18</a:t>
-            </a:r>
-          </a:p>
-        </p:txBody>
-      </p:sp>
-    </p:spTree>
-  </p:cSld>
-  <p:clrMapOvr>
-    <a:masterClrMapping/>
-  </p:clrMapOvr>
-</p:sld>
-</file>
-
-<file path=ppt/slides/slide18.xml><?xml version="1.0" encoding="utf-8"?>
-<p:sld xmlns:a="http://schemas.openxmlformats.org/drawingml/2006/main" xmlns:p="http://schemas.openxmlformats.org/presentationml/2006/main" xmlns:r="http://schemas.openxmlformats.org/officeDocument/2006/relationships">
-  <p:cSld>
-    <p:bg>
-      <p:bgPr>
-        <a:solidFill>
-          <a:srgbClr val="FFFFFF"/>
-        </a:solidFill>
-        <a:effectLst/>
-      </p:bgPr>
-    </p:bg>
-    <p:spTree>
-      <p:nvGrpSpPr>
-        <p:cNvPr id="1" name=""/>
-        <p:cNvGrpSpPr/>
-        <p:nvPr/>
-      </p:nvGrpSpPr>
-      <p:grpSpPr/>
-      <p:sp>
-        <p:nvSpPr>
-          <p:cNvPr id="2" name="TextBox 1"/>
-          <p:cNvSpPr txBox="1"/>
-          <p:nvPr/>
-        </p:nvSpPr>
-        <p:spPr>
-          <a:xfrm>
-            <a:off x="548640" y="411480"/>
-            <a:ext cx="11094720" cy="292608"/>
-          </a:xfrm>
-          <a:prstGeom prst="rect">
-            <a:avLst/>
-          </a:prstGeom>
-          <a:noFill/>
-        </p:spPr>
-        <p:txBody>
-          <a:bodyPr wrap="square" anchor="t" lIns="0" rIns="0" tIns="0" bIns="0">
-            <a:spAutoFit/>
-          </a:bodyPr>
-          <a:lstStyle/>
-          <a:p>
-            <a:pPr algn="l"/>
-            <a:r>
-              <a:rPr sz="1300" b="1">
-                <a:solidFill>
-                  <a:srgbClr val="9B1B30"/>
-                </a:solidFill>
-                <a:latin typeface="Calibri"/>
-              </a:rPr>
-              <a:t>BIBLIOGRAFÍA</a:t>
-            </a:r>
-          </a:p>
-        </p:txBody>
-      </p:sp>
-      <p:sp>
-        <p:nvSpPr>
-          <p:cNvPr id="3" name="TextBox 2"/>
-          <p:cNvSpPr txBox="1"/>
-          <p:nvPr/>
-        </p:nvSpPr>
-        <p:spPr>
-          <a:xfrm>
-            <a:off x="548640" y="731520"/>
-            <a:ext cx="11094720" cy="777240"/>
-          </a:xfrm>
-          <a:prstGeom prst="rect">
-            <a:avLst/>
-          </a:prstGeom>
-          <a:noFill/>
-        </p:spPr>
-        <p:txBody>
-          <a:bodyPr wrap="square" anchor="t" lIns="0" rIns="0" tIns="0" bIns="0">
-            <a:spAutoFit/>
-          </a:bodyPr>
-          <a:lstStyle/>
-          <a:p>
-            <a:pPr algn="l"/>
-            <a:r>
-              <a:rPr sz="4000" b="1">
-                <a:solidFill>
-                  <a:srgbClr val="2D2D2D"/>
-                </a:solidFill>
-                <a:latin typeface="Calibri"/>
-              </a:rPr>
-              <a:t>Cinco lecturas anclan el pronóstico moderno</a:t>
-            </a:r>
-          </a:p>
-        </p:txBody>
-      </p:sp>
-      <p:sp>
-        <p:nvSpPr>
-          <p:cNvPr id="4" name="Oval 3"/>
-          <p:cNvSpPr/>
-          <p:nvPr/>
-        </p:nvSpPr>
-        <p:spPr>
-          <a:xfrm>
-            <a:off x="548640" y="1810512"/>
-            <a:ext cx="384048" cy="384048"/>
-          </a:xfrm>
-          <a:prstGeom prst="ellipse">
-            <a:avLst/>
-          </a:prstGeom>
-          <a:solidFill>
-            <a:srgbClr val="E4002B"/>
-          </a:solidFill>
-          <a:ln>
-            <a:noFill/>
-          </a:ln>
-          <a:effectLst/>
-        </p:spPr>
-        <p:style>
-          <a:lnRef idx="1">
-            <a:schemeClr val="accent1"/>
-          </a:lnRef>
-          <a:fillRef idx="3">
-            <a:schemeClr val="accent1"/>
-          </a:fillRef>
-          <a:effectRef idx="2">
-            <a:schemeClr val="accent1"/>
-          </a:effectRef>
-          <a:fontRef idx="minor">
-            <a:schemeClr val="lt1"/>
-          </a:fontRef>
-        </p:style>
-        <p:txBody>
-          <a:bodyPr rtlCol="0" anchor="ctr" lIns="0" rIns="0" tIns="0" bIns="0"/>
-          <a:lstStyle/>
-          <a:p>
-            <a:pPr algn="ctr"/>
-            <a:r>
-              <a:rPr sz="1400" b="1">
-                <a:solidFill>
-                  <a:srgbClr val="FFFFFF"/>
-                </a:solidFill>
-                <a:latin typeface="Calibri"/>
-              </a:rPr>
-              <a:t>1</a:t>
-            </a:r>
-          </a:p>
-        </p:txBody>
-      </p:sp>
-      <p:sp>
-        <p:nvSpPr>
-          <p:cNvPr id="5" name="TextBox 4"/>
-          <p:cNvSpPr txBox="1"/>
-          <p:nvPr/>
-        </p:nvSpPr>
-        <p:spPr>
-          <a:xfrm>
-            <a:off x="1097280" y="1783080"/>
-            <a:ext cx="10546080" cy="320040"/>
-          </a:xfrm>
-          <a:prstGeom prst="rect">
-            <a:avLst/>
-          </a:prstGeom>
-          <a:noFill/>
-        </p:spPr>
-        <p:txBody>
-          <a:bodyPr wrap="square" anchor="t" lIns="0" rIns="0" tIns="0" bIns="0">
-            <a:spAutoFit/>
-          </a:bodyPr>
-          <a:lstStyle/>
-          <a:p>
-            <a:pPr algn="l"/>
-            <a:r>
-              <a:rPr sz="1500" b="1">
-                <a:solidFill>
-                  <a:srgbClr val="2D2D2D"/>
-                </a:solidFill>
-                <a:latin typeface="Calibri"/>
-              </a:rPr>
-              <a:t>Forecasting: Principles and Practice (FPP3)</a:t>
-            </a:r>
-          </a:p>
-        </p:txBody>
-      </p:sp>
-      <p:sp>
-        <p:nvSpPr>
-          <p:cNvPr id="6" name="TextBox 5"/>
-          <p:cNvSpPr txBox="1"/>
-          <p:nvPr/>
-        </p:nvSpPr>
-        <p:spPr>
-          <a:xfrm>
-            <a:off x="1097280" y="2093976"/>
-            <a:ext cx="10546080" cy="274320"/>
-          </a:xfrm>
-          <a:prstGeom prst="rect">
-            <a:avLst/>
-          </a:prstGeom>
-          <a:noFill/>
-        </p:spPr>
-        <p:txBody>
-          <a:bodyPr wrap="square" anchor="t" lIns="0" rIns="0" tIns="0" bIns="0">
-            <a:spAutoFit/>
-          </a:bodyPr>
-          <a:lstStyle/>
-          <a:p>
-            <a:pPr algn="l"/>
-            <a:r>
-              <a:rPr sz="1200" b="0">
-                <a:solidFill>
-                  <a:srgbClr val="6E6E6E"/>
-                </a:solidFill>
-                <a:latin typeface="Calibri"/>
-              </a:rPr>
-              <a:t>Hyndman &amp; Athanasopoulos — otexts.com/fpp3  —  texto libre; cubre toda la sesión</a:t>
-            </a:r>
-          </a:p>
-        </p:txBody>
-      </p:sp>
-      <p:sp>
-        <p:nvSpPr>
-          <p:cNvPr id="7" name="Oval 6"/>
-          <p:cNvSpPr/>
-          <p:nvPr/>
-        </p:nvSpPr>
-        <p:spPr>
-          <a:xfrm>
-            <a:off x="548640" y="2706624"/>
-            <a:ext cx="384048" cy="384048"/>
-          </a:xfrm>
-          <a:prstGeom prst="ellipse">
-            <a:avLst/>
-          </a:prstGeom>
-          <a:solidFill>
-            <a:srgbClr val="E4002B"/>
-          </a:solidFill>
-          <a:ln>
-            <a:noFill/>
-          </a:ln>
-          <a:effectLst/>
-        </p:spPr>
-        <p:style>
-          <a:lnRef idx="1">
-            <a:schemeClr val="accent1"/>
-          </a:lnRef>
-          <a:fillRef idx="3">
-            <a:schemeClr val="accent1"/>
-          </a:fillRef>
-          <a:effectRef idx="2">
-            <a:schemeClr val="accent1"/>
-          </a:effectRef>
-          <a:fontRef idx="minor">
-            <a:schemeClr val="lt1"/>
-          </a:fontRef>
-        </p:style>
-        <p:txBody>
-          <a:bodyPr rtlCol="0" anchor="ctr" lIns="0" rIns="0" tIns="0" bIns="0"/>
-          <a:lstStyle/>
-          <a:p>
-            <a:pPr algn="ctr"/>
-            <a:r>
-              <a:rPr sz="1400" b="1">
-                <a:solidFill>
-                  <a:srgbClr val="FFFFFF"/>
-                </a:solidFill>
-                <a:latin typeface="Calibri"/>
-              </a:rPr>
-              <a:t>2</a:t>
-            </a:r>
-          </a:p>
-        </p:txBody>
-      </p:sp>
-      <p:sp>
-        <p:nvSpPr>
-          <p:cNvPr id="8" name="TextBox 7"/>
-          <p:cNvSpPr txBox="1"/>
-          <p:nvPr/>
-        </p:nvSpPr>
-        <p:spPr>
-          <a:xfrm>
-            <a:off x="1097280" y="2679192"/>
-            <a:ext cx="10546080" cy="320040"/>
-          </a:xfrm>
-          <a:prstGeom prst="rect">
-            <a:avLst/>
-          </a:prstGeom>
-          <a:noFill/>
-        </p:spPr>
-        <p:txBody>
-          <a:bodyPr wrap="square" anchor="t" lIns="0" rIns="0" tIns="0" bIns="0">
-            <a:spAutoFit/>
-          </a:bodyPr>
-          <a:lstStyle/>
-          <a:p>
-            <a:pPr algn="l"/>
-            <a:r>
-              <a:rPr sz="1500" b="1">
-                <a:solidFill>
-                  <a:srgbClr val="2D2D2D"/>
-                </a:solidFill>
-                <a:latin typeface="Calibri"/>
-              </a:rPr>
-              <a:t>Time Series Analysis: Forecasting and Control</a:t>
-            </a:r>
-          </a:p>
-        </p:txBody>
-      </p:sp>
-      <p:sp>
-        <p:nvSpPr>
-          <p:cNvPr id="9" name="TextBox 8"/>
-          <p:cNvSpPr txBox="1"/>
-          <p:nvPr/>
-        </p:nvSpPr>
-        <p:spPr>
-          <a:xfrm>
-            <a:off x="1097280" y="2990088"/>
-            <a:ext cx="10546080" cy="274320"/>
-          </a:xfrm>
-          <a:prstGeom prst="rect">
-            <a:avLst/>
-          </a:prstGeom>
-          <a:noFill/>
-        </p:spPr>
-        <p:txBody>
-          <a:bodyPr wrap="square" anchor="t" lIns="0" rIns="0" tIns="0" bIns="0">
-            <a:spAutoFit/>
-          </a:bodyPr>
-          <a:lstStyle/>
-          <a:p>
-            <a:pPr algn="l"/>
-            <a:r>
-              <a:rPr sz="1200" b="0">
-                <a:solidFill>
-                  <a:srgbClr val="6E6E6E"/>
-                </a:solidFill>
-                <a:latin typeface="Calibri"/>
-              </a:rPr>
-              <a:t>Box &amp; Jenkins (1970)  —  origen de ARIMA y del modelo aerolínea</a:t>
-            </a:r>
-          </a:p>
-        </p:txBody>
-      </p:sp>
-      <p:sp>
-        <p:nvSpPr>
-          <p:cNvPr id="10" name="Oval 9"/>
-          <p:cNvSpPr/>
-          <p:nvPr/>
-        </p:nvSpPr>
-        <p:spPr>
-          <a:xfrm>
-            <a:off x="548640" y="3602736"/>
-            <a:ext cx="384048" cy="384048"/>
-          </a:xfrm>
-          <a:prstGeom prst="ellipse">
-            <a:avLst/>
-          </a:prstGeom>
-          <a:solidFill>
-            <a:srgbClr val="E4002B"/>
-          </a:solidFill>
-          <a:ln>
-            <a:noFill/>
-          </a:ln>
-          <a:effectLst/>
-        </p:spPr>
-        <p:style>
-          <a:lnRef idx="1">
-            <a:schemeClr val="accent1"/>
-          </a:lnRef>
-          <a:fillRef idx="3">
-            <a:schemeClr val="accent1"/>
-          </a:fillRef>
-          <a:effectRef idx="2">
-            <a:schemeClr val="accent1"/>
-          </a:effectRef>
-          <a:fontRef idx="minor">
-            <a:schemeClr val="lt1"/>
-          </a:fontRef>
-        </p:style>
-        <p:txBody>
-          <a:bodyPr rtlCol="0" anchor="ctr" lIns="0" rIns="0" tIns="0" bIns="0"/>
-          <a:lstStyle/>
-          <a:p>
-            <a:pPr algn="ctr"/>
-            <a:r>
-              <a:rPr sz="1400" b="1">
-                <a:solidFill>
-                  <a:srgbClr val="FFFFFF"/>
-                </a:solidFill>
-                <a:latin typeface="Calibri"/>
-              </a:rPr>
-              <a:t>3</a:t>
-            </a:r>
-          </a:p>
-        </p:txBody>
-      </p:sp>
-      <p:sp>
-        <p:nvSpPr>
-          <p:cNvPr id="11" name="TextBox 10"/>
-          <p:cNvSpPr txBox="1"/>
-          <p:nvPr/>
-        </p:nvSpPr>
-        <p:spPr>
-          <a:xfrm>
-            <a:off x="1097280" y="3575304"/>
-            <a:ext cx="10546080" cy="320040"/>
-          </a:xfrm>
-          <a:prstGeom prst="rect">
-            <a:avLst/>
-          </a:prstGeom>
-          <a:noFill/>
-        </p:spPr>
-        <p:txBody>
-          <a:bodyPr wrap="square" anchor="t" lIns="0" rIns="0" tIns="0" bIns="0">
-            <a:spAutoFit/>
-          </a:bodyPr>
-          <a:lstStyle/>
-          <a:p>
-            <a:pPr algn="l"/>
-            <a:r>
-              <a:rPr sz="1500" b="1">
-                <a:solidFill>
-                  <a:srgbClr val="2D2D2D"/>
-                </a:solidFill>
-                <a:latin typeface="Calibri"/>
-              </a:rPr>
-              <a:t>Forecasting at Scale (Prophet)</a:t>
-            </a:r>
-          </a:p>
-        </p:txBody>
-      </p:sp>
-      <p:sp>
-        <p:nvSpPr>
-          <p:cNvPr id="12" name="TextBox 11"/>
-          <p:cNvSpPr txBox="1"/>
-          <p:nvPr/>
-        </p:nvSpPr>
-        <p:spPr>
-          <a:xfrm>
-            <a:off x="1097280" y="3886200"/>
-            <a:ext cx="10546080" cy="274320"/>
-          </a:xfrm>
-          <a:prstGeom prst="rect">
-            <a:avLst/>
-          </a:prstGeom>
-          <a:noFill/>
-        </p:spPr>
-        <p:txBody>
-          <a:bodyPr wrap="square" anchor="t" lIns="0" rIns="0" tIns="0" bIns="0">
-            <a:spAutoFit/>
-          </a:bodyPr>
-          <a:lstStyle/>
-          <a:p>
-            <a:pPr algn="l"/>
-            <a:r>
-              <a:rPr sz="1200" b="0">
-                <a:solidFill>
-                  <a:srgbClr val="6E6E6E"/>
-                </a:solidFill>
-                <a:latin typeface="Calibri"/>
-              </a:rPr>
-              <a:t>Taylor &amp; Letham (2018) — TAS 72(1)  —  el ejemplo oficial de Peyton Manning</a:t>
-            </a:r>
-          </a:p>
-        </p:txBody>
-      </p:sp>
-      <p:sp>
-        <p:nvSpPr>
-          <p:cNvPr id="13" name="Oval 12"/>
-          <p:cNvSpPr/>
-          <p:nvPr/>
-        </p:nvSpPr>
-        <p:spPr>
-          <a:xfrm>
-            <a:off x="548640" y="4498848"/>
-            <a:ext cx="384048" cy="384048"/>
-          </a:xfrm>
-          <a:prstGeom prst="ellipse">
-            <a:avLst/>
-          </a:prstGeom>
-          <a:solidFill>
-            <a:srgbClr val="E4002B"/>
-          </a:solidFill>
-          <a:ln>
-            <a:noFill/>
-          </a:ln>
-          <a:effectLst/>
-        </p:spPr>
-        <p:style>
-          <a:lnRef idx="1">
-            <a:schemeClr val="accent1"/>
-          </a:lnRef>
-          <a:fillRef idx="3">
-            <a:schemeClr val="accent1"/>
-          </a:fillRef>
-          <a:effectRef idx="2">
-            <a:schemeClr val="accent1"/>
-          </a:effectRef>
-          <a:fontRef idx="minor">
-            <a:schemeClr val="lt1"/>
-          </a:fontRef>
-        </p:style>
-        <p:txBody>
-          <a:bodyPr rtlCol="0" anchor="ctr" lIns="0" rIns="0" tIns="0" bIns="0"/>
-          <a:lstStyle/>
-          <a:p>
-            <a:pPr algn="ctr"/>
-            <a:r>
-              <a:rPr sz="1400" b="1">
-                <a:solidFill>
-                  <a:srgbClr val="FFFFFF"/>
-                </a:solidFill>
-                <a:latin typeface="Calibri"/>
-              </a:rPr>
-              <a:t>4</a:t>
-            </a:r>
-          </a:p>
-        </p:txBody>
-      </p:sp>
-      <p:sp>
-        <p:nvSpPr>
-          <p:cNvPr id="14" name="TextBox 13"/>
-          <p:cNvSpPr txBox="1"/>
-          <p:nvPr/>
-        </p:nvSpPr>
-        <p:spPr>
-          <a:xfrm>
-            <a:off x="1097280" y="4471416"/>
-            <a:ext cx="10546080" cy="320040"/>
-          </a:xfrm>
-          <a:prstGeom prst="rect">
-            <a:avLst/>
-          </a:prstGeom>
-          <a:noFill/>
-        </p:spPr>
-        <p:txBody>
-          <a:bodyPr wrap="square" anchor="t" lIns="0" rIns="0" tIns="0" bIns="0">
-            <a:spAutoFit/>
-          </a:bodyPr>
-          <a:lstStyle/>
-          <a:p>
-            <a:pPr algn="l"/>
-            <a:r>
-              <a:rPr sz="1500" b="1">
-                <a:solidFill>
-                  <a:srgbClr val="2D2D2D"/>
-                </a:solidFill>
-                <a:latin typeface="Calibri"/>
-              </a:rPr>
-              <a:t>Automatic Time Series Forecasting</a:t>
-            </a:r>
-          </a:p>
-        </p:txBody>
-      </p:sp>
-      <p:sp>
-        <p:nvSpPr>
-          <p:cNvPr id="15" name="TextBox 14"/>
-          <p:cNvSpPr txBox="1"/>
-          <p:nvPr/>
-        </p:nvSpPr>
-        <p:spPr>
-          <a:xfrm>
-            <a:off x="1097280" y="4782312"/>
-            <a:ext cx="10546080" cy="274320"/>
-          </a:xfrm>
-          <a:prstGeom prst="rect">
-            <a:avLst/>
-          </a:prstGeom>
-          <a:noFill/>
-        </p:spPr>
-        <p:txBody>
-          <a:bodyPr wrap="square" anchor="t" lIns="0" rIns="0" tIns="0" bIns="0">
-            <a:spAutoFit/>
-          </a:bodyPr>
-          <a:lstStyle/>
-          <a:p>
-            <a:pPr algn="l"/>
-            <a:r>
-              <a:rPr sz="1200" b="0">
-                <a:solidFill>
-                  <a:srgbClr val="6E6E6E"/>
-                </a:solidFill>
-                <a:latin typeface="Calibri"/>
-              </a:rPr>
-              <a:t>Hyndman &amp; Khandakar (2008) — JSS 27(3)  —  auto.arima y ets: selección a escala</a:t>
-            </a:r>
-          </a:p>
-        </p:txBody>
-      </p:sp>
-      <p:sp>
-        <p:nvSpPr>
-          <p:cNvPr id="16" name="Oval 15"/>
-          <p:cNvSpPr/>
-          <p:nvPr/>
-        </p:nvSpPr>
-        <p:spPr>
-          <a:xfrm>
-            <a:off x="548640" y="5394960"/>
-            <a:ext cx="384048" cy="384048"/>
-          </a:xfrm>
-          <a:prstGeom prst="ellipse">
-            <a:avLst/>
-          </a:prstGeom>
-          <a:solidFill>
-            <a:srgbClr val="E4002B"/>
-          </a:solidFill>
-          <a:ln>
-            <a:noFill/>
-          </a:ln>
-          <a:effectLst/>
-        </p:spPr>
-        <p:style>
-          <a:lnRef idx="1">
-            <a:schemeClr val="accent1"/>
-          </a:lnRef>
-          <a:fillRef idx="3">
-            <a:schemeClr val="accent1"/>
-          </a:fillRef>
-          <a:effectRef idx="2">
-            <a:schemeClr val="accent1"/>
-          </a:effectRef>
-          <a:fontRef idx="minor">
-            <a:schemeClr val="lt1"/>
-          </a:fontRef>
-        </p:style>
-        <p:txBody>
-          <a:bodyPr rtlCol="0" anchor="ctr" lIns="0" rIns="0" tIns="0" bIns="0"/>
-          <a:lstStyle/>
-          <a:p>
-            <a:pPr algn="ctr"/>
-            <a:r>
-              <a:rPr sz="1400" b="1">
-                <a:solidFill>
-                  <a:srgbClr val="FFFFFF"/>
-                </a:solidFill>
-                <a:latin typeface="Calibri"/>
-              </a:rPr>
-              <a:t>5</a:t>
-            </a:r>
-          </a:p>
-        </p:txBody>
-      </p:sp>
-      <p:sp>
-        <p:nvSpPr>
-          <p:cNvPr id="17" name="TextBox 16"/>
-          <p:cNvSpPr txBox="1"/>
-          <p:nvPr/>
-        </p:nvSpPr>
-        <p:spPr>
-          <a:xfrm>
-            <a:off x="1097280" y="5367528"/>
-            <a:ext cx="10546080" cy="320040"/>
-          </a:xfrm>
-          <a:prstGeom prst="rect">
-            <a:avLst/>
-          </a:prstGeom>
-          <a:noFill/>
-        </p:spPr>
-        <p:txBody>
-          <a:bodyPr wrap="square" anchor="t" lIns="0" rIns="0" tIns="0" bIns="0">
-            <a:spAutoFit/>
-          </a:bodyPr>
-          <a:lstStyle/>
-          <a:p>
-            <a:pPr algn="l"/>
-            <a:r>
-              <a:rPr sz="1500" b="1">
-                <a:solidFill>
-                  <a:srgbClr val="2D2D2D"/>
-                </a:solidFill>
-                <a:latin typeface="Calibri"/>
-              </a:rPr>
-              <a:t>The M4 Competition</a:t>
-            </a:r>
-          </a:p>
-        </p:txBody>
-      </p:sp>
-      <p:sp>
-        <p:nvSpPr>
-          <p:cNvPr id="18" name="TextBox 17"/>
-          <p:cNvSpPr txBox="1"/>
-          <p:nvPr/>
-        </p:nvSpPr>
-        <p:spPr>
-          <a:xfrm>
-            <a:off x="1097280" y="5678424"/>
-            <a:ext cx="10546080" cy="274320"/>
-          </a:xfrm>
-          <a:prstGeom prst="rect">
-            <a:avLst/>
-          </a:prstGeom>
-          <a:noFill/>
-        </p:spPr>
-        <p:txBody>
-          <a:bodyPr wrap="square" anchor="t" lIns="0" rIns="0" tIns="0" bIns="0">
-            <a:spAutoFit/>
-          </a:bodyPr>
-          <a:lstStyle/>
-          <a:p>
-            <a:pPr algn="l"/>
-            <a:r>
-              <a:rPr sz="1200" b="0">
-                <a:solidFill>
-                  <a:srgbClr val="6E6E6E"/>
-                </a:solidFill>
-                <a:latin typeface="Calibri"/>
-              </a:rPr>
-              <a:t>Makridakis et al. (2020) — IJF 36(1)  —  consolida el uso del sMAPE</a:t>
-            </a:r>
-          </a:p>
-        </p:txBody>
-      </p:sp>
-      <p:sp>
-        <p:nvSpPr>
-          <p:cNvPr id="19" name="Oval 18"/>
-          <p:cNvSpPr/>
-          <p:nvPr/>
-        </p:nvSpPr>
-        <p:spPr>
-          <a:xfrm>
-            <a:off x="548640" y="6473952"/>
-            <a:ext cx="100584" cy="100584"/>
-          </a:xfrm>
-          <a:prstGeom prst="ellipse">
-            <a:avLst/>
-          </a:prstGeom>
-          <a:solidFill>
-            <a:srgbClr val="E4002B"/>
-          </a:solidFill>
-          <a:ln>
-            <a:noFill/>
-          </a:ln>
-          <a:effectLst/>
-        </p:spPr>
-        <p:style>
-          <a:lnRef idx="1">
-            <a:schemeClr val="accent1"/>
-          </a:lnRef>
-          <a:fillRef idx="3">
-            <a:schemeClr val="accent1"/>
-          </a:fillRef>
-          <a:effectRef idx="2">
-            <a:schemeClr val="accent1"/>
-          </a:effectRef>
-          <a:fontRef idx="minor">
-            <a:schemeClr val="lt1"/>
-          </a:fontRef>
-        </p:style>
-        <p:txBody>
-          <a:bodyPr rtlCol="0" anchor="ctr"/>
-          <a:lstStyle/>
-          <a:p>
-            <a:pPr algn="ctr"/>
-          </a:p>
-        </p:txBody>
-      </p:sp>
-      <p:sp>
-        <p:nvSpPr>
-          <p:cNvPr id="20" name="TextBox 19"/>
-          <p:cNvSpPr txBox="1"/>
-          <p:nvPr/>
-        </p:nvSpPr>
-        <p:spPr>
-          <a:xfrm>
-            <a:off x="749808" y="6437376"/>
-            <a:ext cx="7772400" cy="274320"/>
-          </a:xfrm>
-          <a:prstGeom prst="rect">
-            <a:avLst/>
-          </a:prstGeom>
-          <a:noFill/>
-        </p:spPr>
-        <p:txBody>
-          <a:bodyPr wrap="square" anchor="t" lIns="0" rIns="0" tIns="0" bIns="0">
-            <a:spAutoFit/>
-          </a:bodyPr>
-          <a:lstStyle/>
-          <a:p>
-            <a:pPr algn="l"/>
-            <a:r>
-              <a:rPr sz="900" b="0">
-                <a:solidFill>
-                  <a:srgbClr val="6E6E6E"/>
-                </a:solidFill>
-                <a:latin typeface="Calibri"/>
-              </a:rPr>
-              <a:t>S11 — Herramientas para la Ciencia de Datos, UPC</a:t>
-            </a:r>
-          </a:p>
-        </p:txBody>
-      </p:sp>
-      <p:sp>
-        <p:nvSpPr>
-          <p:cNvPr id="21" name="TextBox 20"/>
-          <p:cNvSpPr txBox="1"/>
-          <p:nvPr/>
-        </p:nvSpPr>
-        <p:spPr>
-          <a:xfrm>
-            <a:off x="10180320" y="6437376"/>
-            <a:ext cx="1463040" cy="274320"/>
-          </a:xfrm>
-          <a:prstGeom prst="rect">
-            <a:avLst/>
-          </a:prstGeom>
-          <a:noFill/>
-        </p:spPr>
-        <p:txBody>
-          <a:bodyPr wrap="square" anchor="t" lIns="0" rIns="0" tIns="0" bIns="0">
-            <a:spAutoFit/>
-          </a:bodyPr>
-          <a:lstStyle/>
-          <a:p>
-            <a:pPr algn="r"/>
-            <a:r>
-              <a:rPr sz="900" b="0">
-                <a:solidFill>
-                  <a:srgbClr val="6E6E6E"/>
-                </a:solidFill>
-                <a:latin typeface="Calibri"/>
-              </a:rPr>
-              <a:t>18 / 18</a:t>
+              <a:t>13 / 13</a:t>
             </a:r>
           </a:p>
         </p:txBody>
@@ -10181,7 +8014,7 @@
                 </a:solidFill>
                 <a:latin typeface="Calibri"/>
               </a:rPr>
-              <a:t>2 / 18</a:t>
+              <a:t>2 / 13</a:t>
             </a:r>
           </a:p>
         </p:txBody>
@@ -10200,7 +8033,7 @@
     <p:bg>
       <p:bgPr>
         <a:solidFill>
-          <a:srgbClr val="9B1B30"/>
+          <a:srgbClr val="FFFFFF"/>
         </a:solidFill>
         <a:effectLst/>
       </p:bgPr>
@@ -10214,20 +8047,90 @@
       <p:grpSpPr/>
       <p:sp>
         <p:nvSpPr>
-          <p:cNvPr id="2" name="Oval 1"/>
+          <p:cNvPr id="2" name="TextBox 1"/>
+          <p:cNvSpPr txBox="1"/>
+          <p:nvPr/>
+        </p:nvSpPr>
+        <p:spPr>
+          <a:xfrm>
+            <a:off x="548640" y="411480"/>
+            <a:ext cx="11094720" cy="292608"/>
+          </a:xfrm>
+          <a:prstGeom prst="rect">
+            <a:avLst/>
+          </a:prstGeom>
+          <a:noFill/>
+        </p:spPr>
+        <p:txBody>
+          <a:bodyPr wrap="square" anchor="t" lIns="0" rIns="0" tIns="0" bIns="0">
+            <a:spAutoFit/>
+          </a:bodyPr>
+          <a:lstStyle/>
+          <a:p>
+            <a:pPr algn="l"/>
+            <a:r>
+              <a:rPr sz="1300" b="1">
+                <a:solidFill>
+                  <a:srgbClr val="9B1B30"/>
+                </a:solidFill>
+                <a:latin typeface="Calibri"/>
+              </a:rPr>
+              <a:t>FUGA TEMPORAL, ALBELALI &amp; AHMED (2025), RETOMA S10</a:t>
+            </a:r>
+          </a:p>
+        </p:txBody>
+      </p:sp>
+      <p:sp>
+        <p:nvSpPr>
+          <p:cNvPr id="3" name="TextBox 2"/>
+          <p:cNvSpPr txBox="1"/>
+          <p:nvPr/>
+        </p:nvSpPr>
+        <p:spPr>
+          <a:xfrm>
+            <a:off x="548640" y="731520"/>
+            <a:ext cx="11094720" cy="777240"/>
+          </a:xfrm>
+          <a:prstGeom prst="rect">
+            <a:avLst/>
+          </a:prstGeom>
+          <a:noFill/>
+        </p:spPr>
+        <p:txBody>
+          <a:bodyPr wrap="square" anchor="t" lIns="0" rIns="0" tIns="0" bIns="0">
+            <a:spAutoFit/>
+          </a:bodyPr>
+          <a:lstStyle/>
+          <a:p>
+            <a:pPr algn="l"/>
+            <a:r>
+              <a:rPr sz="4000" b="1">
+                <a:solidFill>
+                  <a:srgbClr val="2D2D2D"/>
+                </a:solidFill>
+                <a:latin typeface="Calibri"/>
+              </a:rPr>
+              <a:t>La fuga temporal esconde hasta un 20 % del error real</a:t>
+            </a:r>
+          </a:p>
+        </p:txBody>
+      </p:sp>
+      <p:sp>
+        <p:nvSpPr>
+          <p:cNvPr id="4" name="Oval 3"/>
           <p:cNvSpPr/>
           <p:nvPr/>
         </p:nvSpPr>
         <p:spPr>
           <a:xfrm>
-            <a:off x="914400" y="2103120"/>
-            <a:ext cx="2377440" cy="2377440"/>
+            <a:off x="548640" y="2261616"/>
+            <a:ext cx="658368" cy="658368"/>
           </a:xfrm>
           <a:prstGeom prst="ellipse">
             <a:avLst/>
           </a:prstGeom>
           <a:solidFill>
-            <a:srgbClr val="FFFFFF"/>
+            <a:srgbClr val="E4002B"/>
           </a:solidFill>
           <a:ln>
             <a:noFill/>
@@ -10249,32 +8152,47 @@
           </a:fontRef>
         </p:style>
         <p:txBody>
-          <a:bodyPr rtlCol="0" anchor="ctr" lIns="0" rIns="0" tIns="0" bIns="0"/>
+          <a:bodyPr rtlCol="0" anchor="ctr"/>
           <a:lstStyle/>
           <a:p>
             <a:pPr algn="ctr"/>
-            <a:r>
-              <a:rPr sz="10000" b="1">
-                <a:solidFill>
-                  <a:srgbClr val="9B1B30"/>
-                </a:solidFill>
-                <a:latin typeface="Calibri"/>
-              </a:rPr>
-              <a:t>6</a:t>
-            </a:r>
-          </a:p>
-        </p:txBody>
-      </p:sp>
-      <p:sp>
-        <p:nvSpPr>
-          <p:cNvPr id="3" name="TextBox 2"/>
+          </a:p>
+        </p:txBody>
+      </p:sp>
+      <p:pic>
+        <p:nvPicPr>
+          <p:cNvPr id="5" name="Picture 4" descr="triangle-alert__FFFFFF.png"/>
+          <p:cNvPicPr>
+            <a:picLocks noChangeAspect="1"/>
+          </p:cNvPicPr>
+          <p:nvPr/>
+        </p:nvPicPr>
+        <p:blipFill>
+          <a:blip r:embed="rId2"/>
+          <a:stretch>
+            <a:fillRect/>
+          </a:stretch>
+        </p:blipFill>
+        <p:spPr>
+          <a:xfrm>
+            <a:off x="732983" y="2445959"/>
+            <a:ext cx="289682" cy="289682"/>
+          </a:xfrm>
+          <a:prstGeom prst="rect">
+            <a:avLst/>
+          </a:prstGeom>
+        </p:spPr>
+      </p:pic>
+      <p:sp>
+        <p:nvSpPr>
+          <p:cNvPr id="6" name="TextBox 5"/>
           <p:cNvSpPr txBox="1"/>
           <p:nvPr/>
         </p:nvSpPr>
         <p:spPr>
           <a:xfrm>
-            <a:off x="3931920" y="2651760"/>
-            <a:ext cx="7589520" cy="1371600"/>
+            <a:off x="1508760" y="1938528"/>
+            <a:ext cx="10134600" cy="411480"/>
           </a:xfrm>
           <a:prstGeom prst="rect">
             <a:avLst/>
@@ -10289,27 +8207,27 @@
           <a:p>
             <a:pPr algn="l"/>
             <a:r>
-              <a:rPr sz="4000" b="1">
-                <a:solidFill>
-                  <a:srgbClr val="FFFFFF"/>
-                </a:solidFill>
-                <a:latin typeface="Calibri"/>
-              </a:rPr>
-              <a:t>¿Cuándo se puede confiar en este pronóstico?</a:t>
-            </a:r>
-          </a:p>
-        </p:txBody>
-      </p:sp>
-      <p:sp>
-        <p:nvSpPr>
-          <p:cNvPr id="4" name="TextBox 3"/>
+              <a:rPr sz="1800" b="1">
+                <a:solidFill>
+                  <a:srgbClr val="9B1B30"/>
+                </a:solidFill>
+                <a:latin typeface="Calibri"/>
+              </a:rPr>
+              <a:t>Nunca usar K-fold aleatorio</a:t>
+            </a:r>
+          </a:p>
+        </p:txBody>
+      </p:sp>
+      <p:sp>
+        <p:nvSpPr>
+          <p:cNvPr id="7" name="TextBox 6"/>
           <p:cNvSpPr txBox="1"/>
           <p:nvPr/>
         </p:nvSpPr>
         <p:spPr>
           <a:xfrm>
-            <a:off x="3931920" y="3977639"/>
-            <a:ext cx="7589520" cy="914400"/>
+            <a:off x="1508760" y="2395728"/>
+            <a:ext cx="10134600" cy="883920"/>
           </a:xfrm>
           <a:prstGeom prst="rect">
             <a:avLst/>
@@ -10322,15 +8240,472 @@
           </a:bodyPr>
           <a:lstStyle/>
           <a:p>
+            <a:pPr algn="l">
+              <a:lnSpc>
+                <a:spcPct val="110000"/>
+              </a:lnSpc>
+            </a:pPr>
+            <a:r>
+              <a:rPr sz="1400" b="0">
+                <a:solidFill>
+                  <a:srgbClr val="2D2D2D"/>
+                </a:solidFill>
+                <a:latin typeface="Calibri"/>
+              </a:rPr>
+              <a:t>Mezcla pasado y futuro; se usa siempre backtesting de origen móvil.</a:t>
+            </a:r>
+          </a:p>
+        </p:txBody>
+      </p:sp>
+      <p:sp>
+        <p:nvSpPr>
+          <p:cNvPr id="8" name="Oval 7"/>
+          <p:cNvSpPr/>
+          <p:nvPr/>
+        </p:nvSpPr>
+        <p:spPr>
+          <a:xfrm>
+            <a:off x="548640" y="3785616"/>
+            <a:ext cx="658368" cy="658368"/>
+          </a:xfrm>
+          <a:prstGeom prst="ellipse">
+            <a:avLst/>
+          </a:prstGeom>
+          <a:solidFill>
+            <a:srgbClr val="E4002B"/>
+          </a:solidFill>
+          <a:ln>
+            <a:noFill/>
+          </a:ln>
+          <a:effectLst/>
+        </p:spPr>
+        <p:style>
+          <a:lnRef idx="1">
+            <a:schemeClr val="accent1"/>
+          </a:lnRef>
+          <a:fillRef idx="3">
+            <a:schemeClr val="accent1"/>
+          </a:fillRef>
+          <a:effectRef idx="2">
+            <a:schemeClr val="accent1"/>
+          </a:effectRef>
+          <a:fontRef idx="minor">
+            <a:schemeClr val="lt1"/>
+          </a:fontRef>
+        </p:style>
+        <p:txBody>
+          <a:bodyPr rtlCol="0" anchor="ctr"/>
+          <a:lstStyle/>
+          <a:p>
+            <a:pPr algn="ctr"/>
+          </a:p>
+        </p:txBody>
+      </p:sp>
+      <p:pic>
+        <p:nvPicPr>
+          <p:cNvPr id="9" name="Picture 8" descr="funnel__FFFFFF.png"/>
+          <p:cNvPicPr>
+            <a:picLocks noChangeAspect="1"/>
+          </p:cNvPicPr>
+          <p:nvPr/>
+        </p:nvPicPr>
+        <p:blipFill>
+          <a:blip r:embed="rId3"/>
+          <a:stretch>
+            <a:fillRect/>
+          </a:stretch>
+        </p:blipFill>
+        <p:spPr>
+          <a:xfrm>
+            <a:off x="732983" y="3969959"/>
+            <a:ext cx="289682" cy="289682"/>
+          </a:xfrm>
+          <a:prstGeom prst="rect">
+            <a:avLst/>
+          </a:prstGeom>
+        </p:spPr>
+      </p:pic>
+      <p:sp>
+        <p:nvSpPr>
+          <p:cNvPr id="10" name="TextBox 9"/>
+          <p:cNvSpPr txBox="1"/>
+          <p:nvPr/>
+        </p:nvSpPr>
+        <p:spPr>
+          <a:xfrm>
+            <a:off x="1508760" y="3462528"/>
+            <a:ext cx="10134600" cy="411480"/>
+          </a:xfrm>
+          <a:prstGeom prst="rect">
+            <a:avLst/>
+          </a:prstGeom>
+          <a:noFill/>
+        </p:spPr>
+        <p:txBody>
+          <a:bodyPr wrap="square" anchor="t" lIns="0" rIns="0" tIns="0" bIns="0">
+            <a:spAutoFit/>
+          </a:bodyPr>
+          <a:lstStyle/>
+          <a:p>
             <a:pPr algn="l"/>
             <a:r>
-              <a:rPr sz="1700" b="0">
-                <a:solidFill>
-                  <a:srgbClr val="FCEDEE"/>
-                </a:solidFill>
-                <a:latin typeface="Calibri"/>
-              </a:rPr>
-              <a:t>Capítulo 11.6 — viernes, bloque B</a:t>
+              <a:rPr sz="1800" b="1">
+                <a:solidFill>
+                  <a:srgbClr val="9B1B30"/>
+                </a:solidFill>
+                <a:latin typeface="Calibri"/>
+              </a:rPr>
+              <a:t>Features construidas tras el corte</a:t>
+            </a:r>
+          </a:p>
+        </p:txBody>
+      </p:sp>
+      <p:sp>
+        <p:nvSpPr>
+          <p:cNvPr id="11" name="TextBox 10"/>
+          <p:cNvSpPr txBox="1"/>
+          <p:nvPr/>
+        </p:nvSpPr>
+        <p:spPr>
+          <a:xfrm>
+            <a:off x="1508760" y="3919728"/>
+            <a:ext cx="10134600" cy="883920"/>
+          </a:xfrm>
+          <a:prstGeom prst="rect">
+            <a:avLst/>
+          </a:prstGeom>
+          <a:noFill/>
+        </p:spPr>
+        <p:txBody>
+          <a:bodyPr wrap="square" anchor="t" lIns="0" rIns="0" tIns="0" bIns="0">
+            <a:spAutoFit/>
+          </a:bodyPr>
+          <a:lstStyle/>
+          <a:p>
+            <a:pPr algn="l">
+              <a:lnSpc>
+                <a:spcPct val="110000"/>
+              </a:lnSpc>
+            </a:pPr>
+            <a:r>
+              <a:rPr sz="1400" b="0">
+                <a:solidFill>
+                  <a:srgbClr val="2D2D2D"/>
+                </a:solidFill>
+                <a:latin typeface="Calibri"/>
+              </a:rPr>
+              <a:t>Lags, medias y escalado solo con datos del pasado del origen.</a:t>
+            </a:r>
+          </a:p>
+        </p:txBody>
+      </p:sp>
+      <p:sp>
+        <p:nvSpPr>
+          <p:cNvPr id="12" name="Oval 11"/>
+          <p:cNvSpPr/>
+          <p:nvPr/>
+        </p:nvSpPr>
+        <p:spPr>
+          <a:xfrm>
+            <a:off x="548640" y="5309616"/>
+            <a:ext cx="658368" cy="658368"/>
+          </a:xfrm>
+          <a:prstGeom prst="ellipse">
+            <a:avLst/>
+          </a:prstGeom>
+          <a:solidFill>
+            <a:srgbClr val="E4002B"/>
+          </a:solidFill>
+          <a:ln>
+            <a:noFill/>
+          </a:ln>
+          <a:effectLst/>
+        </p:spPr>
+        <p:style>
+          <a:lnRef idx="1">
+            <a:schemeClr val="accent1"/>
+          </a:lnRef>
+          <a:fillRef idx="3">
+            <a:schemeClr val="accent1"/>
+          </a:fillRef>
+          <a:effectRef idx="2">
+            <a:schemeClr val="accent1"/>
+          </a:effectRef>
+          <a:fontRef idx="minor">
+            <a:schemeClr val="lt1"/>
+          </a:fontRef>
+        </p:style>
+        <p:txBody>
+          <a:bodyPr rtlCol="0" anchor="ctr"/>
+          <a:lstStyle/>
+          <a:p>
+            <a:pPr algn="ctr"/>
+          </a:p>
+        </p:txBody>
+      </p:sp>
+      <p:pic>
+        <p:nvPicPr>
+          <p:cNvPr id="13" name="Picture 12" descr="clock__FFFFFF.png"/>
+          <p:cNvPicPr>
+            <a:picLocks noChangeAspect="1"/>
+          </p:cNvPicPr>
+          <p:nvPr/>
+        </p:nvPicPr>
+        <p:blipFill>
+          <a:blip r:embed="rId4"/>
+          <a:stretch>
+            <a:fillRect/>
+          </a:stretch>
+        </p:blipFill>
+        <p:spPr>
+          <a:xfrm>
+            <a:off x="732983" y="5493959"/>
+            <a:ext cx="289682" cy="289682"/>
+          </a:xfrm>
+          <a:prstGeom prst="rect">
+            <a:avLst/>
+          </a:prstGeom>
+        </p:spPr>
+      </p:pic>
+      <p:sp>
+        <p:nvSpPr>
+          <p:cNvPr id="14" name="TextBox 13"/>
+          <p:cNvSpPr txBox="1"/>
+          <p:nvPr/>
+        </p:nvSpPr>
+        <p:spPr>
+          <a:xfrm>
+            <a:off x="1508760" y="4986528"/>
+            <a:ext cx="10134600" cy="411480"/>
+          </a:xfrm>
+          <a:prstGeom prst="rect">
+            <a:avLst/>
+          </a:prstGeom>
+          <a:noFill/>
+        </p:spPr>
+        <p:txBody>
+          <a:bodyPr wrap="square" anchor="t" lIns="0" rIns="0" tIns="0" bIns="0">
+            <a:spAutoFit/>
+          </a:bodyPr>
+          <a:lstStyle/>
+          <a:p>
+            <a:pPr algn="l"/>
+            <a:r>
+              <a:rPr sz="1800" b="1">
+                <a:solidFill>
+                  <a:srgbClr val="9B1B30"/>
+                </a:solidFill>
+                <a:latin typeface="Calibri"/>
+              </a:rPr>
+              <a:t>El naive solo mira el año anterior</a:t>
+            </a:r>
+          </a:p>
+        </p:txBody>
+      </p:sp>
+      <p:sp>
+        <p:nvSpPr>
+          <p:cNvPr id="15" name="TextBox 14"/>
+          <p:cNvSpPr txBox="1"/>
+          <p:nvPr/>
+        </p:nvSpPr>
+        <p:spPr>
+          <a:xfrm>
+            <a:off x="1508760" y="5443728"/>
+            <a:ext cx="10134600" cy="883920"/>
+          </a:xfrm>
+          <a:prstGeom prst="rect">
+            <a:avLst/>
+          </a:prstGeom>
+          <a:noFill/>
+        </p:spPr>
+        <p:txBody>
+          <a:bodyPr wrap="square" anchor="t" lIns="0" rIns="0" tIns="0" bIns="0">
+            <a:spAutoFit/>
+          </a:bodyPr>
+          <a:lstStyle/>
+          <a:p>
+            <a:pPr algn="l">
+              <a:lnSpc>
+                <a:spcPct val="110000"/>
+              </a:lnSpc>
+            </a:pPr>
+            <a:r>
+              <a:rPr sz="1400" b="0">
+                <a:solidFill>
+                  <a:srgbClr val="2D2D2D"/>
+                </a:solidFill>
+                <a:latin typeface="Calibri"/>
+              </a:rPr>
+              <a:t>Un sMAPE demasiado bueno es la señal típica de fuga temporal.</a:t>
+            </a:r>
+          </a:p>
+        </p:txBody>
+      </p:sp>
+      <p:sp>
+        <p:nvSpPr>
+          <p:cNvPr id="16" name="Rounded Rectangle 15"/>
+          <p:cNvSpPr/>
+          <p:nvPr/>
+        </p:nvSpPr>
+        <p:spPr>
+          <a:xfrm>
+            <a:off x="8366760" y="301752"/>
+            <a:ext cx="3291840" cy="402336"/>
+          </a:xfrm>
+          <a:prstGeom prst="roundRect">
+            <a:avLst/>
+          </a:prstGeom>
+          <a:solidFill>
+            <a:srgbClr val="FCEDEE"/>
+          </a:solidFill>
+          <a:ln w="15875">
+            <a:solidFill>
+              <a:srgbClr val="E4002B"/>
+            </a:solidFill>
+          </a:ln>
+          <a:effectLst/>
+        </p:spPr>
+        <p:style>
+          <a:lnRef idx="1">
+            <a:schemeClr val="accent1"/>
+          </a:lnRef>
+          <a:fillRef idx="3">
+            <a:schemeClr val="accent1"/>
+          </a:fillRef>
+          <a:effectRef idx="2">
+            <a:schemeClr val="accent1"/>
+          </a:effectRef>
+          <a:fontRef idx="minor">
+            <a:schemeClr val="lt1"/>
+          </a:fontRef>
+        </p:style>
+        <p:txBody>
+          <a:bodyPr rtlCol="0" anchor="ctr" lIns="54864" rIns="54864" tIns="0" bIns="0"/>
+          <a:lstStyle/>
+          <a:p>
+            <a:pPr algn="ctr"/>
+            <a:r>
+              <a:rPr sz="1300" b="1">
+                <a:solidFill>
+                  <a:srgbClr val="9B1B30"/>
+                </a:solidFill>
+                <a:latin typeface="Calibri"/>
+              </a:rPr>
+              <a:t>▶  Notebook, Diag. 8.5, celda 88</a:t>
+            </a:r>
+          </a:p>
+        </p:txBody>
+      </p:sp>
+      <p:sp>
+        <p:nvSpPr>
+          <p:cNvPr id="17" name="Oval 16"/>
+          <p:cNvSpPr/>
+          <p:nvPr/>
+        </p:nvSpPr>
+        <p:spPr>
+          <a:xfrm>
+            <a:off x="548640" y="6473952"/>
+            <a:ext cx="100584" cy="100584"/>
+          </a:xfrm>
+          <a:prstGeom prst="ellipse">
+            <a:avLst/>
+          </a:prstGeom>
+          <a:solidFill>
+            <a:srgbClr val="E4002B"/>
+          </a:solidFill>
+          <a:ln>
+            <a:noFill/>
+          </a:ln>
+          <a:effectLst/>
+        </p:spPr>
+        <p:style>
+          <a:lnRef idx="1">
+            <a:schemeClr val="accent1"/>
+          </a:lnRef>
+          <a:fillRef idx="3">
+            <a:schemeClr val="accent1"/>
+          </a:fillRef>
+          <a:effectRef idx="2">
+            <a:schemeClr val="accent1"/>
+          </a:effectRef>
+          <a:fontRef idx="minor">
+            <a:schemeClr val="lt1"/>
+          </a:fontRef>
+        </p:style>
+        <p:txBody>
+          <a:bodyPr rtlCol="0" anchor="ctr"/>
+          <a:lstStyle/>
+          <a:p>
+            <a:pPr algn="ctr"/>
+          </a:p>
+        </p:txBody>
+      </p:sp>
+      <p:sp>
+        <p:nvSpPr>
+          <p:cNvPr id="18" name="TextBox 17"/>
+          <p:cNvSpPr txBox="1"/>
+          <p:nvPr/>
+        </p:nvSpPr>
+        <p:spPr>
+          <a:xfrm>
+            <a:off x="749808" y="6437376"/>
+            <a:ext cx="7772400" cy="274320"/>
+          </a:xfrm>
+          <a:prstGeom prst="rect">
+            <a:avLst/>
+          </a:prstGeom>
+          <a:noFill/>
+        </p:spPr>
+        <p:txBody>
+          <a:bodyPr wrap="square" anchor="t" lIns="0" rIns="0" tIns="0" bIns="0">
+            <a:spAutoFit/>
+          </a:bodyPr>
+          <a:lstStyle/>
+          <a:p>
+            <a:pPr algn="l"/>
+            <a:r>
+              <a:rPr sz="900" b="0">
+                <a:solidFill>
+                  <a:srgbClr val="6E6E6E"/>
+                </a:solidFill>
+                <a:latin typeface="Calibri"/>
+              </a:rPr>
+              <a:t>S11 — Herramientas para la Ciencia de Datos, UPC</a:t>
+            </a:r>
+          </a:p>
+        </p:txBody>
+      </p:sp>
+      <p:sp>
+        <p:nvSpPr>
+          <p:cNvPr id="19" name="TextBox 18"/>
+          <p:cNvSpPr txBox="1"/>
+          <p:nvPr/>
+        </p:nvSpPr>
+        <p:spPr>
+          <a:xfrm>
+            <a:off x="10180320" y="6437376"/>
+            <a:ext cx="1463040" cy="274320"/>
+          </a:xfrm>
+          <a:prstGeom prst="rect">
+            <a:avLst/>
+          </a:prstGeom>
+          <a:noFill/>
+        </p:spPr>
+        <p:txBody>
+          <a:bodyPr wrap="square" anchor="t" lIns="0" rIns="0" tIns="0" bIns="0">
+            <a:spAutoFit/>
+          </a:bodyPr>
+          <a:lstStyle/>
+          <a:p>
+            <a:pPr algn="r"/>
+            <a:r>
+              <a:rPr sz="900" b="0">
+                <a:solidFill>
+                  <a:srgbClr val="6E6E6E"/>
+                </a:solidFill>
+                <a:latin typeface="Calibri"/>
+              </a:rPr>
+              <a:t>3 / 13</a:t>
             </a:r>
           </a:p>
         </p:txBody>
@@ -10391,7 +8766,7 @@
                 </a:solidFill>
                 <a:latin typeface="Calibri"/>
               </a:rPr>
-              <a:t>FUGA TEMPORAL, ALBELALI &amp; AHMED (2025), RETOMA S10</a:t>
+              <a:t>SUPUESTOS Y DECISIONES — SUPUESTOS_S11.MD</a:t>
             </a:r>
           </a:p>
         </p:txBody>
@@ -10426,58 +8801,53 @@
                 </a:solidFill>
                 <a:latin typeface="Calibri"/>
               </a:rPr>
-              <a:t>La fuga temporal esconde hasta un 20 % del error real</a:t>
-            </a:r>
-          </a:p>
-        </p:txBody>
-      </p:sp>
-      <p:sp>
-        <p:nvSpPr>
-          <p:cNvPr id="4" name="Oval 3"/>
-          <p:cNvSpPr/>
-          <p:nvPr/>
-        </p:nvSpPr>
-        <p:spPr>
-          <a:xfrm>
-            <a:off x="548640" y="2261616"/>
-            <a:ext cx="658368" cy="658368"/>
-          </a:xfrm>
-          <a:prstGeom prst="ellipse">
-            <a:avLst/>
-          </a:prstGeom>
-          <a:solidFill>
-            <a:srgbClr val="E4002B"/>
-          </a:solidFill>
-          <a:ln>
-            <a:noFill/>
-          </a:ln>
-          <a:effectLst/>
-        </p:spPr>
-        <p:style>
-          <a:lnRef idx="1">
-            <a:schemeClr val="accent1"/>
-          </a:lnRef>
-          <a:fillRef idx="3">
-            <a:schemeClr val="accent1"/>
-          </a:fillRef>
-          <a:effectRef idx="2">
-            <a:schemeClr val="accent1"/>
-          </a:effectRef>
-          <a:fontRef idx="minor">
-            <a:schemeClr val="lt1"/>
-          </a:fontRef>
-        </p:style>
-        <p:txBody>
-          <a:bodyPr rtlCol="0" anchor="ctr"/>
-          <a:lstStyle/>
-          <a:p>
-            <a:pPr algn="ctr"/>
+              <a:t>Cada decisión del pronóstico tiene su diagnóstico y su método</a:t>
+            </a:r>
+          </a:p>
+        </p:txBody>
+      </p:sp>
+      <p:sp>
+        <p:nvSpPr>
+          <p:cNvPr id="4" name="TextBox 3"/>
+          <p:cNvSpPr txBox="1"/>
+          <p:nvPr/>
+        </p:nvSpPr>
+        <p:spPr>
+          <a:xfrm>
+            <a:off x="548640" y="2139696"/>
+            <a:ext cx="9966960" cy="457200"/>
+          </a:xfrm>
+          <a:prstGeom prst="rect">
+            <a:avLst/>
+          </a:prstGeom>
+          <a:noFill/>
+        </p:spPr>
+        <p:txBody>
+          <a:bodyPr wrap="square" anchor="t" lIns="0" rIns="0" tIns="0" bIns="0">
+            <a:spAutoFit/>
+          </a:bodyPr>
+          <a:lstStyle/>
+          <a:p>
+            <a:pPr algn="l">
+              <a:lnSpc>
+                <a:spcPct val="114000"/>
+              </a:lnSpc>
+            </a:pPr>
+            <a:r>
+              <a:rPr sz="1200" b="0">
+                <a:solidFill>
+                  <a:srgbClr val="6E6E6E"/>
+                </a:solidFill>
+                <a:latin typeface="Calibri"/>
+              </a:rPr>
+              <a:t>ARIMA no es una regresión: sus supuestos son sobre la propia serie y la validación. Cada punto lleva su señal y su método:</a:t>
+            </a:r>
           </a:p>
         </p:txBody>
       </p:sp>
       <p:pic>
         <p:nvPicPr>
-          <p:cNvPr id="5" name="Picture 4" descr="triangle-alert__FFFFFF.png"/>
+          <p:cNvPr id="5" name="Picture 4" descr="triangle-alert__E4002B.png"/>
           <p:cNvPicPr>
             <a:picLocks noChangeAspect="1"/>
           </p:cNvPicPr>
@@ -10491,8 +8861,8 @@
         </p:blipFill>
         <p:spPr>
           <a:xfrm>
-            <a:off x="732983" y="2445959"/>
-            <a:ext cx="289682" cy="289682"/>
+            <a:off x="11064240" y="2011680"/>
+            <a:ext cx="457200" cy="457200"/>
           </a:xfrm>
           <a:prstGeom prst="rect">
             <a:avLst/>
@@ -10507,8 +8877,8 @@
         </p:nvSpPr>
         <p:spPr>
           <a:xfrm>
-            <a:off x="1508760" y="1938528"/>
-            <a:ext cx="10134600" cy="411480"/>
+            <a:off x="548640" y="2615184"/>
+            <a:ext cx="2788920" cy="274320"/>
           </a:xfrm>
           <a:prstGeom prst="rect">
             <a:avLst/>
@@ -10523,13 +8893,13 @@
           <a:p>
             <a:pPr algn="l"/>
             <a:r>
-              <a:rPr sz="1800" b="1">
+              <a:rPr sz="1100" b="1">
                 <a:solidFill>
                   <a:srgbClr val="9B1B30"/>
                 </a:solidFill>
                 <a:latin typeface="Calibri"/>
               </a:rPr>
-              <a:t>Nunca usar K-fold aleatorio</a:t>
+              <a:t>DECISIÓN / SUPUESTO</a:t>
             </a:r>
           </a:p>
         </p:txBody>
@@ -10542,8 +8912,8 @@
         </p:nvSpPr>
         <p:spPr>
           <a:xfrm>
-            <a:off x="1508760" y="2395728"/>
-            <a:ext cx="10134600" cy="883920"/>
+            <a:off x="3429000" y="2615184"/>
+            <a:ext cx="3886200" cy="274320"/>
           </a:xfrm>
           <a:prstGeom prst="rect">
             <a:avLst/>
@@ -10556,39 +8926,70 @@
           </a:bodyPr>
           <a:lstStyle/>
           <a:p>
-            <a:pPr algn="l">
-              <a:lnSpc>
-                <a:spcPct val="110000"/>
-              </a:lnSpc>
-            </a:pPr>
-            <a:r>
-              <a:rPr sz="1400" b="0">
-                <a:solidFill>
-                  <a:srgbClr val="2D2D2D"/>
-                </a:solidFill>
-                <a:latin typeface="Calibri"/>
-              </a:rPr>
-              <a:t>Mezcla pasado y futuro; se usa siempre backtesting de origen móvil.</a:t>
-            </a:r>
-          </a:p>
-        </p:txBody>
-      </p:sp>
-      <p:sp>
-        <p:nvSpPr>
-          <p:cNvPr id="8" name="Oval 7"/>
+            <a:pPr algn="l"/>
+            <a:r>
+              <a:rPr sz="1100" b="1">
+                <a:solidFill>
+                  <a:srgbClr val="9B1B30"/>
+                </a:solidFill>
+                <a:latin typeface="Calibri"/>
+              </a:rPr>
+              <a:t>CÓMO SE IDENTIFICA</a:t>
+            </a:r>
+          </a:p>
+        </p:txBody>
+      </p:sp>
+      <p:sp>
+        <p:nvSpPr>
+          <p:cNvPr id="8" name="TextBox 7"/>
+          <p:cNvSpPr txBox="1"/>
+          <p:nvPr/>
+        </p:nvSpPr>
+        <p:spPr>
+          <a:xfrm>
+            <a:off x="7498079" y="2615184"/>
+            <a:ext cx="4206240" cy="274320"/>
+          </a:xfrm>
+          <a:prstGeom prst="rect">
+            <a:avLst/>
+          </a:prstGeom>
+          <a:noFill/>
+        </p:spPr>
+        <p:txBody>
+          <a:bodyPr wrap="square" anchor="t" lIns="0" rIns="0" tIns="0" bIns="0">
+            <a:spAutoFit/>
+          </a:bodyPr>
+          <a:lstStyle/>
+          <a:p>
+            <a:pPr algn="l"/>
+            <a:r>
+              <a:rPr sz="1100" b="1">
+                <a:solidFill>
+                  <a:srgbClr val="9B1B30"/>
+                </a:solidFill>
+                <a:latin typeface="Calibri"/>
+              </a:rPr>
+              <a:t>CÓMO SE DECIDE (MÉTODO)</a:t>
+            </a:r>
+          </a:p>
+        </p:txBody>
+      </p:sp>
+      <p:sp>
+        <p:nvSpPr>
+          <p:cNvPr id="9" name="Rounded Rectangle 8"/>
           <p:cNvSpPr/>
           <p:nvPr/>
         </p:nvSpPr>
         <p:spPr>
           <a:xfrm>
-            <a:off x="548640" y="3785616"/>
-            <a:ext cx="658368" cy="658368"/>
-          </a:xfrm>
-          <a:prstGeom prst="ellipse">
+            <a:off x="420624" y="2880360"/>
+            <a:ext cx="11356848" cy="608076"/>
+          </a:xfrm>
+          <a:prstGeom prst="roundRect">
             <a:avLst/>
           </a:prstGeom>
           <a:solidFill>
-            <a:srgbClr val="E4002B"/>
+            <a:srgbClr val="FCEDEE"/>
           </a:solidFill>
           <a:ln>
             <a:noFill/>
@@ -10617,30 +9018,6 @@
           </a:p>
         </p:txBody>
       </p:sp>
-      <p:pic>
-        <p:nvPicPr>
-          <p:cNvPr id="9" name="Picture 8" descr="funnel__FFFFFF.png"/>
-          <p:cNvPicPr>
-            <a:picLocks noChangeAspect="1"/>
-          </p:cNvPicPr>
-          <p:nvPr/>
-        </p:nvPicPr>
-        <p:blipFill>
-          <a:blip r:embed="rId3"/>
-          <a:stretch>
-            <a:fillRect/>
-          </a:stretch>
-        </p:blipFill>
-        <p:spPr>
-          <a:xfrm>
-            <a:off x="732983" y="3969959"/>
-            <a:ext cx="289682" cy="289682"/>
-          </a:xfrm>
-          <a:prstGeom prst="rect">
-            <a:avLst/>
-          </a:prstGeom>
-        </p:spPr>
-      </p:pic>
       <p:sp>
         <p:nvSpPr>
           <p:cNvPr id="10" name="TextBox 9"/>
@@ -10649,8 +9026,8 @@
         </p:nvSpPr>
         <p:spPr>
           <a:xfrm>
-            <a:off x="1508760" y="3462528"/>
-            <a:ext cx="10134600" cy="411480"/>
+            <a:off x="548640" y="2962656"/>
+            <a:ext cx="2788920" cy="553212"/>
           </a:xfrm>
           <a:prstGeom prst="rect">
             <a:avLst/>
@@ -10663,15 +9040,19 @@
           </a:bodyPr>
           <a:lstStyle/>
           <a:p>
-            <a:pPr algn="l"/>
-            <a:r>
-              <a:rPr sz="1800" b="1">
-                <a:solidFill>
-                  <a:srgbClr val="9B1B30"/>
-                </a:solidFill>
-                <a:latin typeface="Calibri"/>
-              </a:rPr>
-              <a:t>Features construidas tras el corte</a:t>
+            <a:pPr algn="l">
+              <a:lnSpc>
+                <a:spcPct val="105000"/>
+              </a:lnSpc>
+            </a:pPr>
+            <a:r>
+              <a:rPr sz="1200" b="1">
+                <a:solidFill>
+                  <a:srgbClr val="2D2D2D"/>
+                </a:solidFill>
+                <a:latin typeface="Calibri"/>
+              </a:rPr>
+              <a:t>Estacionariedad (ADF y KPSS)</a:t>
             </a:r>
           </a:p>
         </p:txBody>
@@ -10684,8 +9065,8 @@
         </p:nvSpPr>
         <p:spPr>
           <a:xfrm>
-            <a:off x="1508760" y="3919728"/>
-            <a:ext cx="10134600" cy="883920"/>
+            <a:off x="3429000" y="2962656"/>
+            <a:ext cx="3886200" cy="553212"/>
           </a:xfrm>
           <a:prstGeom prst="rect">
             <a:avLst/>
@@ -10700,37 +9081,193 @@
           <a:p>
             <a:pPr algn="l">
               <a:lnSpc>
-                <a:spcPct val="110000"/>
+                <a:spcPct val="106000"/>
               </a:lnSpc>
             </a:pPr>
             <a:r>
-              <a:rPr sz="1400" b="0">
+              <a:rPr sz="1100" b="0">
                 <a:solidFill>
                   <a:srgbClr val="2D2D2D"/>
                 </a:solidFill>
                 <a:latin typeface="Calibri"/>
               </a:rPr>
-              <a:t>Lags, medias y escalado solo con datos del pasado del origen.</a:t>
-            </a:r>
-          </a:p>
-        </p:txBody>
-      </p:sp>
-      <p:sp>
-        <p:nvSpPr>
-          <p:cNvPr id="12" name="Oval 11"/>
+              <a:t>Nulas opuestas; log diferenciada da ADF p 0,0002 -&gt; estacionaria.</a:t>
+            </a:r>
+          </a:p>
+        </p:txBody>
+      </p:sp>
+      <p:sp>
+        <p:nvSpPr>
+          <p:cNvPr id="12" name="TextBox 11"/>
+          <p:cNvSpPr txBox="1"/>
+          <p:nvPr/>
+        </p:nvSpPr>
+        <p:spPr>
+          <a:xfrm>
+            <a:off x="7498079" y="2962656"/>
+            <a:ext cx="4206240" cy="553212"/>
+          </a:xfrm>
+          <a:prstGeom prst="rect">
+            <a:avLst/>
+          </a:prstGeom>
+          <a:noFill/>
+        </p:spPr>
+        <p:txBody>
+          <a:bodyPr wrap="square" anchor="t" lIns="0" rIns="0" tIns="0" bIns="0">
+            <a:spAutoFit/>
+          </a:bodyPr>
+          <a:lstStyle/>
+          <a:p>
+            <a:pPr algn="l">
+              <a:lnSpc>
+                <a:spcPct val="106000"/>
+              </a:lnSpc>
+            </a:pPr>
+            <a:r>
+              <a:rPr sz="1100" b="0">
+                <a:solidFill>
+                  <a:srgbClr val="2D2D2D"/>
+                </a:solidFill>
+                <a:latin typeface="Calibri"/>
+              </a:rPr>
+              <a:t>Diferenciar/transformar y repetir ADF y KPSS hasta lograrla.</a:t>
+            </a:r>
+          </a:p>
+        </p:txBody>
+      </p:sp>
+      <p:sp>
+        <p:nvSpPr>
+          <p:cNvPr id="13" name="TextBox 12"/>
+          <p:cNvSpPr txBox="1"/>
+          <p:nvPr/>
+        </p:nvSpPr>
+        <p:spPr>
+          <a:xfrm>
+            <a:off x="548640" y="3607308"/>
+            <a:ext cx="2788920" cy="553212"/>
+          </a:xfrm>
+          <a:prstGeom prst="rect">
+            <a:avLst/>
+          </a:prstGeom>
+          <a:noFill/>
+        </p:spPr>
+        <p:txBody>
+          <a:bodyPr wrap="square" anchor="t" lIns="0" rIns="0" tIns="0" bIns="0">
+            <a:spAutoFit/>
+          </a:bodyPr>
+          <a:lstStyle/>
+          <a:p>
+            <a:pPr algn="l">
+              <a:lnSpc>
+                <a:spcPct val="105000"/>
+              </a:lnSpc>
+            </a:pPr>
+            <a:r>
+              <a:rPr sz="1200" b="1">
+                <a:solidFill>
+                  <a:srgbClr val="2D2D2D"/>
+                </a:solidFill>
+                <a:latin typeface="Calibri"/>
+              </a:rPr>
+              <a:t>Aditiva vs. multiplicativa</a:t>
+            </a:r>
+          </a:p>
+        </p:txBody>
+      </p:sp>
+      <p:sp>
+        <p:nvSpPr>
+          <p:cNvPr id="14" name="TextBox 13"/>
+          <p:cNvSpPr txBox="1"/>
+          <p:nvPr/>
+        </p:nvSpPr>
+        <p:spPr>
+          <a:xfrm>
+            <a:off x="3429000" y="3607308"/>
+            <a:ext cx="3886200" cy="553212"/>
+          </a:xfrm>
+          <a:prstGeom prst="rect">
+            <a:avLst/>
+          </a:prstGeom>
+          <a:noFill/>
+        </p:spPr>
+        <p:txBody>
+          <a:bodyPr wrap="square" anchor="t" lIns="0" rIns="0" tIns="0" bIns="0">
+            <a:spAutoFit/>
+          </a:bodyPr>
+          <a:lstStyle/>
+          <a:p>
+            <a:pPr algn="l">
+              <a:lnSpc>
+                <a:spcPct val="106000"/>
+              </a:lnSpc>
+            </a:pPr>
+            <a:r>
+              <a:rPr sz="1100" b="0">
+                <a:solidFill>
+                  <a:srgbClr val="2D2D2D"/>
+                </a:solidFill>
+                <a:latin typeface="Calibri"/>
+              </a:rPr>
+              <a:t>Panel seasonal del STL: la amplitud crece con el nivel.</a:t>
+            </a:r>
+          </a:p>
+        </p:txBody>
+      </p:sp>
+      <p:sp>
+        <p:nvSpPr>
+          <p:cNvPr id="15" name="TextBox 14"/>
+          <p:cNvSpPr txBox="1"/>
+          <p:nvPr/>
+        </p:nvSpPr>
+        <p:spPr>
+          <a:xfrm>
+            <a:off x="7498079" y="3607308"/>
+            <a:ext cx="4206240" cy="553212"/>
+          </a:xfrm>
+          <a:prstGeom prst="rect">
+            <a:avLst/>
+          </a:prstGeom>
+          <a:noFill/>
+        </p:spPr>
+        <p:txBody>
+          <a:bodyPr wrap="square" anchor="t" lIns="0" rIns="0" tIns="0" bIns="0">
+            <a:spAutoFit/>
+          </a:bodyPr>
+          <a:lstStyle/>
+          <a:p>
+            <a:pPr algn="l">
+              <a:lnSpc>
+                <a:spcPct val="106000"/>
+              </a:lnSpc>
+            </a:pPr>
+            <a:r>
+              <a:rPr sz="1100" b="0">
+                <a:solidFill>
+                  <a:srgbClr val="2D2D2D"/>
+                </a:solidFill>
+                <a:latin typeface="Calibri"/>
+              </a:rPr>
+              <a:t>log (o Box-Cox) si es multiplicativa; des-transformar con exp.</a:t>
+            </a:r>
+          </a:p>
+        </p:txBody>
+      </p:sp>
+      <p:sp>
+        <p:nvSpPr>
+          <p:cNvPr id="16" name="Rounded Rectangle 15"/>
           <p:cNvSpPr/>
           <p:nvPr/>
         </p:nvSpPr>
         <p:spPr>
           <a:xfrm>
-            <a:off x="548640" y="5309616"/>
-            <a:ext cx="658368" cy="658368"/>
-          </a:xfrm>
-          <a:prstGeom prst="ellipse">
+            <a:off x="420624" y="4169664"/>
+            <a:ext cx="11356848" cy="608076"/>
+          </a:xfrm>
+          <a:prstGeom prst="roundRect">
             <a:avLst/>
           </a:prstGeom>
           <a:solidFill>
-            <a:srgbClr val="E4002B"/>
+            <a:srgbClr val="FCEDEE"/>
           </a:solidFill>
           <a:ln>
             <a:noFill/>
@@ -10759,40 +9296,16 @@
           </a:p>
         </p:txBody>
       </p:sp>
-      <p:pic>
-        <p:nvPicPr>
-          <p:cNvPr id="13" name="Picture 12" descr="clock__FFFFFF.png"/>
-          <p:cNvPicPr>
-            <a:picLocks noChangeAspect="1"/>
-          </p:cNvPicPr>
-          <p:nvPr/>
-        </p:nvPicPr>
-        <p:blipFill>
-          <a:blip r:embed="rId4"/>
-          <a:stretch>
-            <a:fillRect/>
-          </a:stretch>
-        </p:blipFill>
-        <p:spPr>
-          <a:xfrm>
-            <a:off x="732983" y="5493959"/>
-            <a:ext cx="289682" cy="289682"/>
-          </a:xfrm>
-          <a:prstGeom prst="rect">
-            <a:avLst/>
-          </a:prstGeom>
-        </p:spPr>
-      </p:pic>
-      <p:sp>
-        <p:nvSpPr>
-          <p:cNvPr id="14" name="TextBox 13"/>
+      <p:sp>
+        <p:nvSpPr>
+          <p:cNvPr id="17" name="TextBox 16"/>
           <p:cNvSpPr txBox="1"/>
           <p:nvPr/>
         </p:nvSpPr>
         <p:spPr>
           <a:xfrm>
-            <a:off x="1508760" y="4986528"/>
-            <a:ext cx="10134600" cy="411480"/>
+            <a:off x="548640" y="4251960"/>
+            <a:ext cx="2788920" cy="553212"/>
           </a:xfrm>
           <a:prstGeom prst="rect">
             <a:avLst/>
@@ -10805,29 +9318,33 @@
           </a:bodyPr>
           <a:lstStyle/>
           <a:p>
-            <a:pPr algn="l"/>
-            <a:r>
-              <a:rPr sz="1800" b="1">
-                <a:solidFill>
-                  <a:srgbClr val="9B1B30"/>
-                </a:solidFill>
-                <a:latin typeface="Calibri"/>
-              </a:rPr>
-              <a:t>El naive solo mira el año anterior</a:t>
-            </a:r>
-          </a:p>
-        </p:txBody>
-      </p:sp>
-      <p:sp>
-        <p:nvSpPr>
-          <p:cNvPr id="15" name="TextBox 14"/>
+            <a:pPr algn="l">
+              <a:lnSpc>
+                <a:spcPct val="105000"/>
+              </a:lnSpc>
+            </a:pPr>
+            <a:r>
+              <a:rPr sz="1200" b="1">
+                <a:solidFill>
+                  <a:srgbClr val="2D2D2D"/>
+                </a:solidFill>
+                <a:latin typeface="Calibri"/>
+              </a:rPr>
+              <a:t>Residuos = ruido blanco</a:t>
+            </a:r>
+          </a:p>
+        </p:txBody>
+      </p:sp>
+      <p:sp>
+        <p:nvSpPr>
+          <p:cNvPr id="18" name="TextBox 17"/>
           <p:cNvSpPr txBox="1"/>
           <p:nvPr/>
         </p:nvSpPr>
         <p:spPr>
           <a:xfrm>
-            <a:off x="1508760" y="5443728"/>
-            <a:ext cx="10134600" cy="883920"/>
+            <a:off x="3429000" y="4251960"/>
+            <a:ext cx="3886200" cy="553212"/>
           </a:xfrm>
           <a:prstGeom prst="rect">
             <a:avLst/>
@@ -10842,24 +9359,180 @@
           <a:p>
             <a:pPr algn="l">
               <a:lnSpc>
-                <a:spcPct val="110000"/>
+                <a:spcPct val="106000"/>
               </a:lnSpc>
             </a:pPr>
             <a:r>
-              <a:rPr sz="1400" b="0">
+              <a:rPr sz="1100" b="0">
                 <a:solidFill>
                   <a:srgbClr val="2D2D2D"/>
                 </a:solidFill>
                 <a:latin typeface="Calibri"/>
               </a:rPr>
-              <a:t>Un sMAPE demasiado bueno es la señal típica de fuga temporal.</a:t>
-            </a:r>
-          </a:p>
-        </p:txBody>
-      </p:sp>
-      <p:sp>
-        <p:nvSpPr>
-          <p:cNvPr id="16" name="Rounded Rectangle 15"/>
+              <a:t>Ljung-Box(12) p 0,754 &gt; 0,05 -&gt; ruido blanco (buen ajuste).</a:t>
+            </a:r>
+          </a:p>
+        </p:txBody>
+      </p:sp>
+      <p:sp>
+        <p:nvSpPr>
+          <p:cNvPr id="19" name="TextBox 18"/>
+          <p:cNvSpPr txBox="1"/>
+          <p:nvPr/>
+        </p:nvSpPr>
+        <p:spPr>
+          <a:xfrm>
+            <a:off x="7498079" y="4251960"/>
+            <a:ext cx="4206240" cy="553212"/>
+          </a:xfrm>
+          <a:prstGeom prst="rect">
+            <a:avLst/>
+          </a:prstGeom>
+          <a:noFill/>
+        </p:spPr>
+        <p:txBody>
+          <a:bodyPr wrap="square" anchor="t" lIns="0" rIns="0" tIns="0" bIns="0">
+            <a:spAutoFit/>
+          </a:bodyPr>
+          <a:lstStyle/>
+          <a:p>
+            <a:pPr algn="l">
+              <a:lnSpc>
+                <a:spcPct val="106000"/>
+              </a:lnSpc>
+            </a:pPr>
+            <a:r>
+              <a:rPr sz="1100" b="0">
+                <a:solidFill>
+                  <a:srgbClr val="2D2D2D"/>
+                </a:solidFill>
+                <a:latin typeface="Calibri"/>
+              </a:rPr>
+              <a:t>Si p alto, aceptar; si no, volver a identificar (AR/MA).</a:t>
+            </a:r>
+          </a:p>
+        </p:txBody>
+      </p:sp>
+      <p:sp>
+        <p:nvSpPr>
+          <p:cNvPr id="20" name="TextBox 19"/>
+          <p:cNvSpPr txBox="1"/>
+          <p:nvPr/>
+        </p:nvSpPr>
+        <p:spPr>
+          <a:xfrm>
+            <a:off x="548640" y="4896612"/>
+            <a:ext cx="2788920" cy="553212"/>
+          </a:xfrm>
+          <a:prstGeom prst="rect">
+            <a:avLst/>
+          </a:prstGeom>
+          <a:noFill/>
+        </p:spPr>
+        <p:txBody>
+          <a:bodyPr wrap="square" anchor="t" lIns="0" rIns="0" tIns="0" bIns="0">
+            <a:spAutoFit/>
+          </a:bodyPr>
+          <a:lstStyle/>
+          <a:p>
+            <a:pPr algn="l">
+              <a:lnSpc>
+                <a:spcPct val="105000"/>
+              </a:lnSpc>
+            </a:pPr>
+            <a:r>
+              <a:rPr sz="1200" b="1">
+                <a:solidFill>
+                  <a:srgbClr val="2D2D2D"/>
+                </a:solidFill>
+                <a:latin typeface="Calibri"/>
+              </a:rPr>
+              <a:t>Fuga temporal y backtesting</a:t>
+            </a:r>
+          </a:p>
+        </p:txBody>
+      </p:sp>
+      <p:sp>
+        <p:nvSpPr>
+          <p:cNvPr id="21" name="TextBox 20"/>
+          <p:cNvSpPr txBox="1"/>
+          <p:nvPr/>
+        </p:nvSpPr>
+        <p:spPr>
+          <a:xfrm>
+            <a:off x="3429000" y="4896612"/>
+            <a:ext cx="3886200" cy="553212"/>
+          </a:xfrm>
+          <a:prstGeom prst="rect">
+            <a:avLst/>
+          </a:prstGeom>
+          <a:noFill/>
+        </p:spPr>
+        <p:txBody>
+          <a:bodyPr wrap="square" anchor="t" lIns="0" rIns="0" tIns="0" bIns="0">
+            <a:spAutoFit/>
+          </a:bodyPr>
+          <a:lstStyle/>
+          <a:p>
+            <a:pPr algn="l">
+              <a:lnSpc>
+                <a:spcPct val="106000"/>
+              </a:lnSpc>
+            </a:pPr>
+            <a:r>
+              <a:rPr sz="1100" b="0">
+                <a:solidFill>
+                  <a:srgbClr val="2D2D2D"/>
+                </a:solidFill>
+                <a:latin typeface="Calibri"/>
+              </a:rPr>
+              <a:t>Un sMAPE menor que el de train delata fuga; el naive marca 5,78 %.</a:t>
+            </a:r>
+          </a:p>
+        </p:txBody>
+      </p:sp>
+      <p:sp>
+        <p:nvSpPr>
+          <p:cNvPr id="22" name="TextBox 21"/>
+          <p:cNvSpPr txBox="1"/>
+          <p:nvPr/>
+        </p:nvSpPr>
+        <p:spPr>
+          <a:xfrm>
+            <a:off x="7498079" y="4896612"/>
+            <a:ext cx="4206240" cy="553212"/>
+          </a:xfrm>
+          <a:prstGeom prst="rect">
+            <a:avLst/>
+          </a:prstGeom>
+          <a:noFill/>
+        </p:spPr>
+        <p:txBody>
+          <a:bodyPr wrap="square" anchor="t" lIns="0" rIns="0" tIns="0" bIns="0">
+            <a:spAutoFit/>
+          </a:bodyPr>
+          <a:lstStyle/>
+          <a:p>
+            <a:pPr algn="l">
+              <a:lnSpc>
+                <a:spcPct val="106000"/>
+              </a:lnSpc>
+            </a:pPr>
+            <a:r>
+              <a:rPr sz="1100" b="0">
+                <a:solidFill>
+                  <a:srgbClr val="2D2D2D"/>
+                </a:solidFill>
+                <a:latin typeface="Calibri"/>
+              </a:rPr>
+              <a:t>Rolling-origin sin fuga; el campeón supera al naive (SARIMA 4,09 %).</a:t>
+            </a:r>
+          </a:p>
+        </p:txBody>
+      </p:sp>
+      <p:sp>
+        <p:nvSpPr>
+          <p:cNvPr id="23" name="Rounded Rectangle 22"/>
           <p:cNvSpPr/>
           <p:nvPr/>
         </p:nvSpPr>
@@ -10907,14 +9580,48 @@
                 </a:solidFill>
                 <a:latin typeface="Calibri"/>
               </a:rPr>
-              <a:t>▶  Notebook, Diag. 8.5, celda 96</a:t>
-            </a:r>
-          </a:p>
-        </p:txBody>
-      </p:sp>
-      <p:sp>
-        <p:nvSpPr>
-          <p:cNvPr id="17" name="Oval 16"/>
+              <a:t>▶  Notebook, Sección 8, celda 82</a:t>
+            </a:r>
+          </a:p>
+        </p:txBody>
+      </p:sp>
+      <p:sp>
+        <p:nvSpPr>
+          <p:cNvPr id="24" name="TextBox 23"/>
+          <p:cNvSpPr txBox="1"/>
+          <p:nvPr/>
+        </p:nvSpPr>
+        <p:spPr>
+          <a:xfrm>
+            <a:off x="548640" y="5596128"/>
+            <a:ext cx="11094720" cy="292608"/>
+          </a:xfrm>
+          <a:prstGeom prst="rect">
+            <a:avLst/>
+          </a:prstGeom>
+          <a:noFill/>
+        </p:spPr>
+        <p:txBody>
+          <a:bodyPr wrap="square">
+            <a:spAutoFit/>
+          </a:bodyPr>
+          <a:lstStyle/>
+          <a:p>
+            <a:r>
+              <a:rPr sz="1000">
+                <a:solidFill>
+                  <a:srgbClr val="6E6E6E"/>
+                </a:solidFill>
+                <a:latin typeface="Calibri"/>
+              </a:rPr>
+              <a:t>Fuente única: la guía de supuestos de la sesión (Partes 2-4). Alcance S11: reconocer la decisión y decidir; el ajuste fino avanzado (TBATS, GARCH) solo se nombra.</a:t>
+            </a:r>
+          </a:p>
+        </p:txBody>
+      </p:sp>
+      <p:sp>
+        <p:nvSpPr>
+          <p:cNvPr id="25" name="Oval 24"/>
           <p:cNvSpPr/>
           <p:nvPr/>
         </p:nvSpPr>
@@ -10958,7 +9665,7 @@
       </p:sp>
       <p:sp>
         <p:nvSpPr>
-          <p:cNvPr id="18" name="TextBox 17"/>
+          <p:cNvPr id="26" name="TextBox 25"/>
           <p:cNvSpPr txBox="1"/>
           <p:nvPr/>
         </p:nvSpPr>
@@ -10993,7 +9700,7 @@
       </p:sp>
       <p:sp>
         <p:nvSpPr>
-          <p:cNvPr id="19" name="TextBox 18"/>
+          <p:cNvPr id="27" name="TextBox 26"/>
           <p:cNvSpPr txBox="1"/>
           <p:nvPr/>
         </p:nvSpPr>
@@ -11021,7 +9728,7 @@
                 </a:solidFill>
                 <a:latin typeface="Calibri"/>
               </a:rPr>
-              <a:t>4 / 18</a:t>
+              <a:t>4 / 13</a:t>
             </a:r>
           </a:p>
         </p:txBody>
@@ -11035,6 +9742,179 @@
 </file>
 
 <file path=ppt/slides/slide5.xml><?xml version="1.0" encoding="utf-8"?>
+<p:sld xmlns:a="http://schemas.openxmlformats.org/drawingml/2006/main" xmlns:p="http://schemas.openxmlformats.org/presentationml/2006/main" xmlns:r="http://schemas.openxmlformats.org/officeDocument/2006/relationships">
+  <p:cSld>
+    <p:bg>
+      <p:bgPr>
+        <a:solidFill>
+          <a:srgbClr val="9B1B30"/>
+        </a:solidFill>
+        <a:effectLst/>
+      </p:bgPr>
+    </p:bg>
+    <p:spTree>
+      <p:nvGrpSpPr>
+        <p:cNvPr id="1" name=""/>
+        <p:cNvGrpSpPr/>
+        <p:nvPr/>
+      </p:nvGrpSpPr>
+      <p:grpSpPr/>
+      <p:sp>
+        <p:nvSpPr>
+          <p:cNvPr id="2" name="Oval 1"/>
+          <p:cNvSpPr/>
+          <p:nvPr/>
+        </p:nvSpPr>
+        <p:spPr>
+          <a:xfrm>
+            <a:off x="914400" y="2103120"/>
+            <a:ext cx="2377440" cy="2377440"/>
+          </a:xfrm>
+          <a:prstGeom prst="ellipse">
+            <a:avLst/>
+          </a:prstGeom>
+          <a:solidFill>
+            <a:srgbClr val="FFFFFF"/>
+          </a:solidFill>
+          <a:ln>
+            <a:noFill/>
+          </a:ln>
+          <a:effectLst/>
+        </p:spPr>
+        <p:style>
+          <a:lnRef idx="1">
+            <a:schemeClr val="accent1"/>
+          </a:lnRef>
+          <a:fillRef idx="3">
+            <a:schemeClr val="accent1"/>
+          </a:fillRef>
+          <a:effectRef idx="2">
+            <a:schemeClr val="accent1"/>
+          </a:effectRef>
+          <a:fontRef idx="minor">
+            <a:schemeClr val="lt1"/>
+          </a:fontRef>
+        </p:style>
+        <p:txBody>
+          <a:bodyPr rtlCol="0" anchor="ctr" lIns="0" rIns="0" tIns="0" bIns="0"/>
+          <a:lstStyle/>
+          <a:p>
+            <a:pPr algn="ctr"/>
+            <a:r>
+              <a:rPr sz="10000" b="1">
+                <a:solidFill>
+                  <a:srgbClr val="9B1B30"/>
+                </a:solidFill>
+                <a:latin typeface="Calibri"/>
+              </a:rPr>
+              <a:t>4</a:t>
+            </a:r>
+          </a:p>
+        </p:txBody>
+      </p:sp>
+      <p:sp>
+        <p:nvSpPr>
+          <p:cNvPr id="3" name="TextBox 2"/>
+          <p:cNvSpPr txBox="1"/>
+          <p:nvPr/>
+        </p:nvSpPr>
+        <p:spPr>
+          <a:xfrm>
+            <a:off x="3931920" y="2651760"/>
+            <a:ext cx="7589520" cy="1371600"/>
+          </a:xfrm>
+          <a:prstGeom prst="rect">
+            <a:avLst/>
+          </a:prstGeom>
+          <a:noFill/>
+        </p:spPr>
+        <p:txBody>
+          <a:bodyPr wrap="square" anchor="t" lIns="0" rIns="0" tIns="0" bIns="0">
+            <a:spAutoFit/>
+          </a:bodyPr>
+          <a:lstStyle/>
+          <a:p>
+            <a:pPr algn="l"/>
+            <a:r>
+              <a:rPr sz="4000" b="1">
+                <a:solidFill>
+                  <a:srgbClr val="FFFFFF"/>
+                </a:solidFill>
+                <a:latin typeface="Calibri"/>
+              </a:rPr>
+              <a:t>Validar sin mirar el futuro</a:t>
+            </a:r>
+          </a:p>
+        </p:txBody>
+      </p:sp>
+      <p:sp>
+        <p:nvSpPr>
+          <p:cNvPr id="4" name="TextBox 3"/>
+          <p:cNvSpPr txBox="1"/>
+          <p:nvPr/>
+        </p:nvSpPr>
+        <p:spPr>
+          <a:xfrm>
+            <a:off x="3931920" y="3977639"/>
+            <a:ext cx="7589520" cy="914400"/>
+          </a:xfrm>
+          <a:prstGeom prst="rect">
+            <a:avLst/>
+          </a:prstGeom>
+          <a:noFill/>
+        </p:spPr>
+        <p:txBody>
+          <a:bodyPr wrap="square" anchor="t" lIns="0" rIns="0" tIns="0" bIns="0">
+            <a:spAutoFit/>
+          </a:bodyPr>
+          <a:lstStyle/>
+          <a:p>
+            <a:pPr algn="l"/>
+            <a:r>
+              <a:rPr sz="1700" b="0">
+                <a:solidFill>
+                  <a:srgbClr val="FCEDEE"/>
+                </a:solidFill>
+                <a:latin typeface="Calibri"/>
+              </a:rPr>
+              <a:t>Métricas, rolling-origin, decisión</a:t>
+            </a:r>
+          </a:p>
+        </p:txBody>
+      </p:sp>
+      <p:pic>
+        <p:nvPicPr>
+          <p:cNvPr id="5" name="Picture 4" descr="git-branch__FFFFFF.png"/>
+          <p:cNvPicPr>
+            <a:picLocks noChangeAspect="1"/>
+          </p:cNvPicPr>
+          <p:nvPr/>
+        </p:nvPicPr>
+        <p:blipFill>
+          <a:blip r:embed="rId2"/>
+          <a:stretch>
+            <a:fillRect/>
+          </a:stretch>
+        </p:blipFill>
+        <p:spPr>
+          <a:xfrm>
+            <a:off x="10195560" y="640080"/>
+            <a:ext cx="1051560" cy="1051560"/>
+          </a:xfrm>
+          <a:prstGeom prst="rect">
+            <a:avLst/>
+          </a:prstGeom>
+        </p:spPr>
+      </p:pic>
+    </p:spTree>
+  </p:cSld>
+  <p:clrMapOvr>
+    <a:masterClrMapping/>
+  </p:clrMapOvr>
+</p:sld>
+</file>
+
+<file path=ppt/slides/slide6.xml><?xml version="1.0" encoding="utf-8"?>
 <p:sld xmlns:a="http://schemas.openxmlformats.org/drawingml/2006/main" xmlns:p="http://schemas.openxmlformats.org/presentationml/2006/main" xmlns:r="http://schemas.openxmlformats.org/officeDocument/2006/relationships">
   <p:cSld>
     <p:bg>
@@ -11082,7 +9962,7 @@
                 </a:solidFill>
                 <a:latin typeface="Calibri"/>
               </a:rPr>
-              <a:t>SUPUESTOS Y DECISIONES — SUPUESTOS_S11.MD</a:t>
+              <a:t>EVIDENCIA — MAPE POR HORIZONTE (CROSS_VALIDATION)</a:t>
             </a:r>
           </a:p>
         </p:txBody>
@@ -11117,53 +9997,14 @@
                 </a:solidFill>
                 <a:latin typeface="Calibri"/>
               </a:rPr>
-              <a:t>Cada decisión del pronóstico tiene su diagnóstico y su método</a:t>
-            </a:r>
-          </a:p>
-        </p:txBody>
-      </p:sp>
-      <p:sp>
-        <p:nvSpPr>
-          <p:cNvPr id="4" name="TextBox 3"/>
-          <p:cNvSpPr txBox="1"/>
-          <p:nvPr/>
-        </p:nvSpPr>
-        <p:spPr>
-          <a:xfrm>
-            <a:off x="548640" y="2139696"/>
-            <a:ext cx="9966960" cy="457200"/>
-          </a:xfrm>
-          <a:prstGeom prst="rect">
-            <a:avLst/>
-          </a:prstGeom>
-          <a:noFill/>
-        </p:spPr>
-        <p:txBody>
-          <a:bodyPr wrap="square" anchor="t" lIns="0" rIns="0" tIns="0" bIns="0">
-            <a:spAutoFit/>
-          </a:bodyPr>
-          <a:lstStyle/>
-          <a:p>
-            <a:pPr algn="l">
-              <a:lnSpc>
-                <a:spcPct val="114000"/>
-              </a:lnSpc>
-            </a:pPr>
-            <a:r>
-              <a:rPr sz="1200" b="0">
-                <a:solidFill>
-                  <a:srgbClr val="6E6E6E"/>
-                </a:solidFill>
-                <a:latin typeface="Calibri"/>
-              </a:rPr>
-              <a:t>ARIMA no es una regresión: sus supuestos son sobre la propia serie y la validación. Cada punto lleva su señal y su método:</a:t>
+              <a:t>El error de Prophet crece del 5,84 % al 10,04 %</a:t>
             </a:r>
           </a:p>
         </p:txBody>
       </p:sp>
       <p:pic>
         <p:nvPicPr>
-          <p:cNvPr id="5" name="Picture 4" descr="triangle-alert__E4002B.png"/>
+          <p:cNvPr id="4" name="Picture 3" descr="deck_prophet.png"/>
           <p:cNvPicPr>
             <a:picLocks noChangeAspect="1"/>
           </p:cNvPicPr>
@@ -11177,8 +10018,8 @@
         </p:blipFill>
         <p:spPr>
           <a:xfrm>
-            <a:off x="11064240" y="2011680"/>
-            <a:ext cx="457200" cy="457200"/>
+            <a:off x="548640" y="1874519"/>
+            <a:ext cx="4568439" cy="2880360"/>
           </a:xfrm>
           <a:prstGeom prst="rect">
             <a:avLst/>
@@ -11187,125 +10028,20 @@
       </p:pic>
       <p:sp>
         <p:nvSpPr>
-          <p:cNvPr id="6" name="TextBox 5"/>
-          <p:cNvSpPr txBox="1"/>
-          <p:nvPr/>
-        </p:nvSpPr>
-        <p:spPr>
-          <a:xfrm>
-            <a:off x="548640" y="2615184"/>
-            <a:ext cx="2788920" cy="274320"/>
-          </a:xfrm>
-          <a:prstGeom prst="rect">
-            <a:avLst/>
-          </a:prstGeom>
-          <a:noFill/>
-        </p:spPr>
-        <p:txBody>
-          <a:bodyPr wrap="square" anchor="t" lIns="0" rIns="0" tIns="0" bIns="0">
-            <a:spAutoFit/>
-          </a:bodyPr>
-          <a:lstStyle/>
-          <a:p>
-            <a:pPr algn="l"/>
-            <a:r>
-              <a:rPr sz="1100" b="1">
-                <a:solidFill>
-                  <a:srgbClr val="9B1B30"/>
-                </a:solidFill>
-                <a:latin typeface="Calibri"/>
-              </a:rPr>
-              <a:t>DECISIÓN / SUPUESTO</a:t>
-            </a:r>
-          </a:p>
-        </p:txBody>
-      </p:sp>
-      <p:sp>
-        <p:nvSpPr>
-          <p:cNvPr id="7" name="TextBox 6"/>
-          <p:cNvSpPr txBox="1"/>
-          <p:nvPr/>
-        </p:nvSpPr>
-        <p:spPr>
-          <a:xfrm>
-            <a:off x="3429000" y="2615184"/>
-            <a:ext cx="3886200" cy="274320"/>
-          </a:xfrm>
-          <a:prstGeom prst="rect">
-            <a:avLst/>
-          </a:prstGeom>
-          <a:noFill/>
-        </p:spPr>
-        <p:txBody>
-          <a:bodyPr wrap="square" anchor="t" lIns="0" rIns="0" tIns="0" bIns="0">
-            <a:spAutoFit/>
-          </a:bodyPr>
-          <a:lstStyle/>
-          <a:p>
-            <a:pPr algn="l"/>
-            <a:r>
-              <a:rPr sz="1100" b="1">
-                <a:solidFill>
-                  <a:srgbClr val="9B1B30"/>
-                </a:solidFill>
-                <a:latin typeface="Calibri"/>
-              </a:rPr>
-              <a:t>CÓMO SE IDENTIFICA</a:t>
-            </a:r>
-          </a:p>
-        </p:txBody>
-      </p:sp>
-      <p:sp>
-        <p:nvSpPr>
-          <p:cNvPr id="8" name="TextBox 7"/>
-          <p:cNvSpPr txBox="1"/>
-          <p:nvPr/>
-        </p:nvSpPr>
-        <p:spPr>
-          <a:xfrm>
-            <a:off x="7498079" y="2615184"/>
-            <a:ext cx="4206240" cy="274320"/>
-          </a:xfrm>
-          <a:prstGeom prst="rect">
-            <a:avLst/>
-          </a:prstGeom>
-          <a:noFill/>
-        </p:spPr>
-        <p:txBody>
-          <a:bodyPr wrap="square" anchor="t" lIns="0" rIns="0" tIns="0" bIns="0">
-            <a:spAutoFit/>
-          </a:bodyPr>
-          <a:lstStyle/>
-          <a:p>
-            <a:pPr algn="l"/>
-            <a:r>
-              <a:rPr sz="1100" b="1">
-                <a:solidFill>
-                  <a:srgbClr val="9B1B30"/>
-                </a:solidFill>
-                <a:latin typeface="Calibri"/>
-              </a:rPr>
-              <a:t>CÓMO SE DECIDE (MÉTODO)</a:t>
-            </a:r>
-          </a:p>
-        </p:txBody>
-      </p:sp>
-      <p:sp>
-        <p:nvSpPr>
-          <p:cNvPr id="9" name="Rounded Rectangle 8"/>
+          <p:cNvPr id="5" name="Oval 4"/>
           <p:cNvSpPr/>
           <p:nvPr/>
         </p:nvSpPr>
         <p:spPr>
           <a:xfrm>
-            <a:off x="420624" y="2880360"/>
-            <a:ext cx="11356848" cy="608076"/>
-          </a:xfrm>
-          <a:prstGeom prst="roundRect">
+            <a:off x="7955279" y="2011680"/>
+            <a:ext cx="548640" cy="548640"/>
+          </a:xfrm>
+          <a:prstGeom prst="ellipse">
             <a:avLst/>
           </a:prstGeom>
           <a:solidFill>
-            <a:srgbClr val="FCEDEE"/>
+            <a:srgbClr val="E4002B"/>
           </a:solidFill>
           <a:ln>
             <a:noFill/>
@@ -11334,16 +10070,40 @@
           </a:p>
         </p:txBody>
       </p:sp>
-      <p:sp>
-        <p:nvSpPr>
-          <p:cNvPr id="10" name="TextBox 9"/>
+      <p:pic>
+        <p:nvPicPr>
+          <p:cNvPr id="6" name="Picture 5" descr="lightbulb__FFFFFF.png"/>
+          <p:cNvPicPr>
+            <a:picLocks noChangeAspect="1"/>
+          </p:cNvPicPr>
+          <p:nvPr/>
+        </p:nvPicPr>
+        <p:blipFill>
+          <a:blip r:embed="rId3"/>
+          <a:stretch>
+            <a:fillRect/>
+          </a:stretch>
+        </p:blipFill>
+        <p:spPr>
+          <a:xfrm>
+            <a:off x="8108898" y="2165299"/>
+            <a:ext cx="241402" cy="241402"/>
+          </a:xfrm>
+          <a:prstGeom prst="rect">
+            <a:avLst/>
+          </a:prstGeom>
+        </p:spPr>
+      </p:pic>
+      <p:sp>
+        <p:nvSpPr>
+          <p:cNvPr id="7" name="TextBox 6"/>
           <p:cNvSpPr txBox="1"/>
           <p:nvPr/>
         </p:nvSpPr>
         <p:spPr>
           <a:xfrm>
-            <a:off x="548640" y="2962656"/>
-            <a:ext cx="2788920" cy="553212"/>
+            <a:off x="8686800" y="2057400"/>
+            <a:ext cx="2926080" cy="548640"/>
           </a:xfrm>
           <a:prstGeom prst="rect">
             <a:avLst/>
@@ -11356,33 +10116,29 @@
           </a:bodyPr>
           <a:lstStyle/>
           <a:p>
-            <a:pPr algn="l">
-              <a:lnSpc>
-                <a:spcPct val="105000"/>
-              </a:lnSpc>
-            </a:pPr>
-            <a:r>
-              <a:rPr sz="1200" b="1">
-                <a:solidFill>
-                  <a:srgbClr val="2D2D2D"/>
-                </a:solidFill>
-                <a:latin typeface="Calibri"/>
-              </a:rPr>
-              <a:t>Estacionariedad (ADF y KPSS)</a:t>
-            </a:r>
-          </a:p>
-        </p:txBody>
-      </p:sp>
-      <p:sp>
-        <p:nvSpPr>
-          <p:cNvPr id="11" name="TextBox 10"/>
+            <a:pPr algn="l"/>
+            <a:r>
+              <a:rPr sz="1500" b="1">
+                <a:solidFill>
+                  <a:srgbClr val="9B1B30"/>
+                </a:solidFill>
+                <a:latin typeface="Calibri"/>
+              </a:rPr>
+              <a:t>Lectura de negocio</a:t>
+            </a:r>
+          </a:p>
+        </p:txBody>
+      </p:sp>
+      <p:sp>
+        <p:nvSpPr>
+          <p:cNvPr id="8" name="TextBox 7"/>
           <p:cNvSpPr txBox="1"/>
           <p:nvPr/>
         </p:nvSpPr>
         <p:spPr>
           <a:xfrm>
-            <a:off x="3429000" y="2962656"/>
-            <a:ext cx="3886200" cy="553212"/>
+            <a:off x="7955279" y="2880360"/>
+            <a:ext cx="3657600" cy="3108960"/>
           </a:xfrm>
           <a:prstGeom prst="rect">
             <a:avLst/>
@@ -11397,31 +10153,31 @@
           <a:p>
             <a:pPr algn="l">
               <a:lnSpc>
-                <a:spcPct val="106000"/>
+                <a:spcPct val="125000"/>
               </a:lnSpc>
             </a:pPr>
             <a:r>
-              <a:rPr sz="1100" b="0">
+              <a:rPr sz="1500" b="0">
                 <a:solidFill>
                   <a:srgbClr val="2D2D2D"/>
                 </a:solidFill>
                 <a:latin typeface="Calibri"/>
               </a:rPr>
-              <a:t>Nulas opuestas; log diferenciada da ADF p 0,0002 -&gt; estacionaria.</a:t>
-            </a:r>
-          </a:p>
-        </p:txBody>
-      </p:sp>
-      <p:sp>
-        <p:nvSpPr>
-          <p:cNvPr id="12" name="TextBox 11"/>
+              <a:t>El error medio es 7,45 %: crece con el horizonte, de 5,84 % a corto plazo a 10,04 % a un año.</a:t>
+            </a:r>
+          </a:p>
+        </p:txBody>
+      </p:sp>
+      <p:sp>
+        <p:nvSpPr>
+          <p:cNvPr id="9" name="TextBox 8"/>
           <p:cNvSpPr txBox="1"/>
           <p:nvPr/>
         </p:nvSpPr>
         <p:spPr>
           <a:xfrm>
-            <a:off x="7498079" y="2962656"/>
-            <a:ext cx="4206240" cy="553212"/>
+            <a:off x="548640" y="5961888"/>
+            <a:ext cx="11094720" cy="292608"/>
           </a:xfrm>
           <a:prstGeom prst="rect">
             <a:avLst/>
@@ -11434,150 +10190,29 @@
           </a:bodyPr>
           <a:lstStyle/>
           <a:p>
-            <a:pPr algn="l">
-              <a:lnSpc>
-                <a:spcPct val="106000"/>
-              </a:lnSpc>
-            </a:pPr>
-            <a:r>
-              <a:rPr sz="1100" b="0">
-                <a:solidFill>
-                  <a:srgbClr val="2D2D2D"/>
-                </a:solidFill>
-                <a:latin typeface="Calibri"/>
-              </a:rPr>
-              <a:t>Diferenciar/transformar y repetir ADF y KPSS hasta lograrla.</a:t>
-            </a:r>
-          </a:p>
-        </p:txBody>
-      </p:sp>
-      <p:sp>
-        <p:nvSpPr>
-          <p:cNvPr id="13" name="TextBox 12"/>
-          <p:cNvSpPr txBox="1"/>
-          <p:nvPr/>
-        </p:nvSpPr>
-        <p:spPr>
-          <a:xfrm>
-            <a:off x="548640" y="3607308"/>
-            <a:ext cx="2788920" cy="553212"/>
-          </a:xfrm>
-          <a:prstGeom prst="rect">
-            <a:avLst/>
-          </a:prstGeom>
-          <a:noFill/>
-        </p:spPr>
-        <p:txBody>
-          <a:bodyPr wrap="square" anchor="t" lIns="0" rIns="0" tIns="0" bIns="0">
-            <a:spAutoFit/>
-          </a:bodyPr>
-          <a:lstStyle/>
-          <a:p>
-            <a:pPr algn="l">
-              <a:lnSpc>
-                <a:spcPct val="105000"/>
-              </a:lnSpc>
-            </a:pPr>
-            <a:r>
-              <a:rPr sz="1200" b="1">
-                <a:solidFill>
-                  <a:srgbClr val="2D2D2D"/>
-                </a:solidFill>
-                <a:latin typeface="Calibri"/>
-              </a:rPr>
-              <a:t>Aditiva vs. multiplicativa</a:t>
-            </a:r>
-          </a:p>
-        </p:txBody>
-      </p:sp>
-      <p:sp>
-        <p:nvSpPr>
-          <p:cNvPr id="14" name="TextBox 13"/>
-          <p:cNvSpPr txBox="1"/>
-          <p:nvPr/>
-        </p:nvSpPr>
-        <p:spPr>
-          <a:xfrm>
-            <a:off x="3429000" y="3607308"/>
-            <a:ext cx="3886200" cy="553212"/>
-          </a:xfrm>
-          <a:prstGeom prst="rect">
-            <a:avLst/>
-          </a:prstGeom>
-          <a:noFill/>
-        </p:spPr>
-        <p:txBody>
-          <a:bodyPr wrap="square" anchor="t" lIns="0" rIns="0" tIns="0" bIns="0">
-            <a:spAutoFit/>
-          </a:bodyPr>
-          <a:lstStyle/>
-          <a:p>
-            <a:pPr algn="l">
-              <a:lnSpc>
-                <a:spcPct val="106000"/>
-              </a:lnSpc>
-            </a:pPr>
-            <a:r>
-              <a:rPr sz="1100" b="0">
-                <a:solidFill>
-                  <a:srgbClr val="2D2D2D"/>
-                </a:solidFill>
-                <a:latin typeface="Calibri"/>
-              </a:rPr>
-              <a:t>Panel seasonal del STL: la amplitud crece con el nivel.</a:t>
-            </a:r>
-          </a:p>
-        </p:txBody>
-      </p:sp>
-      <p:sp>
-        <p:nvSpPr>
-          <p:cNvPr id="15" name="TextBox 14"/>
-          <p:cNvSpPr txBox="1"/>
-          <p:nvPr/>
-        </p:nvSpPr>
-        <p:spPr>
-          <a:xfrm>
-            <a:off x="7498079" y="3607308"/>
-            <a:ext cx="4206240" cy="553212"/>
-          </a:xfrm>
-          <a:prstGeom prst="rect">
-            <a:avLst/>
-          </a:prstGeom>
-          <a:noFill/>
-        </p:spPr>
-        <p:txBody>
-          <a:bodyPr wrap="square" anchor="t" lIns="0" rIns="0" tIns="0" bIns="0">
-            <a:spAutoFit/>
-          </a:bodyPr>
-          <a:lstStyle/>
-          <a:p>
-            <a:pPr algn="l">
-              <a:lnSpc>
-                <a:spcPct val="106000"/>
-              </a:lnSpc>
-            </a:pPr>
-            <a:r>
-              <a:rPr sz="1100" b="0">
-                <a:solidFill>
-                  <a:srgbClr val="2D2D2D"/>
-                </a:solidFill>
-                <a:latin typeface="Calibri"/>
-              </a:rPr>
-              <a:t>log (o Box-Cox) si es multiplicativa; des-transformar con exp.</a:t>
-            </a:r>
-          </a:p>
-        </p:txBody>
-      </p:sp>
-      <p:sp>
-        <p:nvSpPr>
-          <p:cNvPr id="16" name="Rounded Rectangle 15"/>
+            <a:pPr algn="l"/>
+            <a:r>
+              <a:rPr sz="1000" b="0">
+                <a:solidFill>
+                  <a:srgbClr val="6E6E6E"/>
+                </a:solidFill>
+                <a:latin typeface="Calibri"/>
+              </a:rPr>
+              <a:t>Prophet / Peyton Manning, cross_validation (730/180/365), reconstruido de Excel!prophet_cv (media B5).</a:t>
+            </a:r>
+          </a:p>
+        </p:txBody>
+      </p:sp>
+      <p:sp>
+        <p:nvSpPr>
+          <p:cNvPr id="10" name="Rounded Rectangle 9"/>
           <p:cNvSpPr/>
           <p:nvPr/>
         </p:nvSpPr>
         <p:spPr>
           <a:xfrm>
-            <a:off x="420624" y="4169664"/>
-            <a:ext cx="11356848" cy="608076"/>
+            <a:off x="548640" y="5029200"/>
+            <a:ext cx="7040880" cy="329184"/>
           </a:xfrm>
           <a:prstGeom prst="roundRect">
             <a:avLst/>
@@ -11585,8 +10220,10 @@
           <a:solidFill>
             <a:srgbClr val="FCEDEE"/>
           </a:solidFill>
-          <a:ln>
-            <a:noFill/>
+          <a:ln w="12700">
+            <a:solidFill>
+              <a:srgbClr val="E4002B"/>
+            </a:solidFill>
           </a:ln>
           <a:effectLst/>
         </p:spPr>
@@ -11612,16 +10249,40 @@
           </a:p>
         </p:txBody>
       </p:sp>
-      <p:sp>
-        <p:nvSpPr>
-          <p:cNvPr id="17" name="TextBox 16"/>
+      <p:pic>
+        <p:nvPicPr>
+          <p:cNvPr id="11" name="Picture 10" descr="book-open__E4002B.png"/>
+          <p:cNvPicPr>
+            <a:picLocks noChangeAspect="1"/>
+          </p:cNvPicPr>
+          <p:nvPr/>
+        </p:nvPicPr>
+        <p:blipFill>
+          <a:blip r:embed="rId4"/>
+          <a:stretch>
+            <a:fillRect/>
+          </a:stretch>
+        </p:blipFill>
+        <p:spPr>
+          <a:xfrm>
+            <a:off x="694944" y="5084064"/>
+            <a:ext cx="219456" cy="219456"/>
+          </a:xfrm>
+          <a:prstGeom prst="rect">
+            <a:avLst/>
+          </a:prstGeom>
+        </p:spPr>
+      </p:pic>
+      <p:sp>
+        <p:nvSpPr>
+          <p:cNvPr id="12" name="TextBox 11"/>
           <p:cNvSpPr txBox="1"/>
           <p:nvPr/>
         </p:nvSpPr>
         <p:spPr>
           <a:xfrm>
-            <a:off x="548640" y="4251960"/>
-            <a:ext cx="2788920" cy="553212"/>
+            <a:off x="1005840" y="5061204"/>
+            <a:ext cx="6473952" cy="274320"/>
           </a:xfrm>
           <a:prstGeom prst="rect">
             <a:avLst/>
@@ -11629,226 +10290,36 @@
           <a:noFill/>
         </p:spPr>
         <p:txBody>
-          <a:bodyPr wrap="square" anchor="t" lIns="0" rIns="0" tIns="0" bIns="0">
+          <a:bodyPr wrap="square" lIns="0" rIns="0" tIns="0" bIns="0">
             <a:spAutoFit/>
           </a:bodyPr>
           <a:lstStyle/>
           <a:p>
-            <a:pPr algn="l">
-              <a:lnSpc>
-                <a:spcPct val="105000"/>
-              </a:lnSpc>
-            </a:pPr>
+            <a:pPr algn="l"/>
             <a:r>
               <a:rPr sz="1200" b="1">
                 <a:solidFill>
+                  <a:srgbClr val="9B1B30"/>
+                </a:solidFill>
+                <a:latin typeface="Calibri"/>
+              </a:rPr>
+              <a:t>En el paper:  </a:t>
+            </a:r>
+            <a:r>
+              <a:rPr sz="1200" b="1">
+                <a:solidFill>
                   <a:srgbClr val="2D2D2D"/>
                 </a:solidFill>
                 <a:latin typeface="Calibri"/>
               </a:rPr>
-              <a:t>Residuos = ruido blanco</a:t>
-            </a:r>
-          </a:p>
-        </p:txBody>
-      </p:sp>
-      <p:sp>
-        <p:nvSpPr>
-          <p:cNvPr id="18" name="TextBox 17"/>
-          <p:cNvSpPr txBox="1"/>
-          <p:nvPr/>
-        </p:nvSpPr>
-        <p:spPr>
-          <a:xfrm>
-            <a:off x="3429000" y="4251960"/>
-            <a:ext cx="3886200" cy="553212"/>
-          </a:xfrm>
-          <a:prstGeom prst="rect">
-            <a:avLst/>
-          </a:prstGeom>
-          <a:noFill/>
-        </p:spPr>
-        <p:txBody>
-          <a:bodyPr wrap="square" anchor="t" lIns="0" rIns="0" tIns="0" bIns="0">
-            <a:spAutoFit/>
-          </a:bodyPr>
-          <a:lstStyle/>
-          <a:p>
-            <a:pPr algn="l">
-              <a:lnSpc>
-                <a:spcPct val="106000"/>
-              </a:lnSpc>
-            </a:pPr>
-            <a:r>
-              <a:rPr sz="1100" b="0">
-                <a:solidFill>
-                  <a:srgbClr val="2D2D2D"/>
-                </a:solidFill>
-                <a:latin typeface="Calibri"/>
-              </a:rPr>
-              <a:t>Ljung-Box(12) p 0,754 &gt; 0,05 -&gt; ruido blanco (buen ajuste).</a:t>
-            </a:r>
-          </a:p>
-        </p:txBody>
-      </p:sp>
-      <p:sp>
-        <p:nvSpPr>
-          <p:cNvPr id="19" name="TextBox 18"/>
-          <p:cNvSpPr txBox="1"/>
-          <p:nvPr/>
-        </p:nvSpPr>
-        <p:spPr>
-          <a:xfrm>
-            <a:off x="7498079" y="4251960"/>
-            <a:ext cx="4206240" cy="553212"/>
-          </a:xfrm>
-          <a:prstGeom prst="rect">
-            <a:avLst/>
-          </a:prstGeom>
-          <a:noFill/>
-        </p:spPr>
-        <p:txBody>
-          <a:bodyPr wrap="square" anchor="t" lIns="0" rIns="0" tIns="0" bIns="0">
-            <a:spAutoFit/>
-          </a:bodyPr>
-          <a:lstStyle/>
-          <a:p>
-            <a:pPr algn="l">
-              <a:lnSpc>
-                <a:spcPct val="106000"/>
-              </a:lnSpc>
-            </a:pPr>
-            <a:r>
-              <a:rPr sz="1100" b="0">
-                <a:solidFill>
-                  <a:srgbClr val="2D2D2D"/>
-                </a:solidFill>
-                <a:latin typeface="Calibri"/>
-              </a:rPr>
-              <a:t>Si p alto, aceptar; si no, volver a identificar (AR/MA).</a:t>
-            </a:r>
-          </a:p>
-        </p:txBody>
-      </p:sp>
-      <p:sp>
-        <p:nvSpPr>
-          <p:cNvPr id="20" name="TextBox 19"/>
-          <p:cNvSpPr txBox="1"/>
-          <p:nvPr/>
-        </p:nvSpPr>
-        <p:spPr>
-          <a:xfrm>
-            <a:off x="548640" y="4896612"/>
-            <a:ext cx="2788920" cy="553212"/>
-          </a:xfrm>
-          <a:prstGeom prst="rect">
-            <a:avLst/>
-          </a:prstGeom>
-          <a:noFill/>
-        </p:spPr>
-        <p:txBody>
-          <a:bodyPr wrap="square" anchor="t" lIns="0" rIns="0" tIns="0" bIns="0">
-            <a:spAutoFit/>
-          </a:bodyPr>
-          <a:lstStyle/>
-          <a:p>
-            <a:pPr algn="l">
-              <a:lnSpc>
-                <a:spcPct val="105000"/>
-              </a:lnSpc>
-            </a:pPr>
-            <a:r>
-              <a:rPr sz="1200" b="1">
-                <a:solidFill>
-                  <a:srgbClr val="2D2D2D"/>
-                </a:solidFill>
-                <a:latin typeface="Calibri"/>
-              </a:rPr>
-              <a:t>Fuga temporal y backtesting</a:t>
-            </a:r>
-          </a:p>
-        </p:txBody>
-      </p:sp>
-      <p:sp>
-        <p:nvSpPr>
-          <p:cNvPr id="21" name="TextBox 20"/>
-          <p:cNvSpPr txBox="1"/>
-          <p:nvPr/>
-        </p:nvSpPr>
-        <p:spPr>
-          <a:xfrm>
-            <a:off x="3429000" y="4896612"/>
-            <a:ext cx="3886200" cy="553212"/>
-          </a:xfrm>
-          <a:prstGeom prst="rect">
-            <a:avLst/>
-          </a:prstGeom>
-          <a:noFill/>
-        </p:spPr>
-        <p:txBody>
-          <a:bodyPr wrap="square" anchor="t" lIns="0" rIns="0" tIns="0" bIns="0">
-            <a:spAutoFit/>
-          </a:bodyPr>
-          <a:lstStyle/>
-          <a:p>
-            <a:pPr algn="l">
-              <a:lnSpc>
-                <a:spcPct val="106000"/>
-              </a:lnSpc>
-            </a:pPr>
-            <a:r>
-              <a:rPr sz="1100" b="0">
-                <a:solidFill>
-                  <a:srgbClr val="2D2D2D"/>
-                </a:solidFill>
-                <a:latin typeface="Calibri"/>
-              </a:rPr>
-              <a:t>Un sMAPE menor que el de train delata fuga; el naive marca 5,78 %.</a:t>
-            </a:r>
-          </a:p>
-        </p:txBody>
-      </p:sp>
-      <p:sp>
-        <p:nvSpPr>
-          <p:cNvPr id="22" name="TextBox 21"/>
-          <p:cNvSpPr txBox="1"/>
-          <p:nvPr/>
-        </p:nvSpPr>
-        <p:spPr>
-          <a:xfrm>
-            <a:off x="7498079" y="4896612"/>
-            <a:ext cx="4206240" cy="553212"/>
-          </a:xfrm>
-          <a:prstGeom prst="rect">
-            <a:avLst/>
-          </a:prstGeom>
-          <a:noFill/>
-        </p:spPr>
-        <p:txBody>
-          <a:bodyPr wrap="square" anchor="t" lIns="0" rIns="0" tIns="0" bIns="0">
-            <a:spAutoFit/>
-          </a:bodyPr>
-          <a:lstStyle/>
-          <a:p>
-            <a:pPr algn="l">
-              <a:lnSpc>
-                <a:spcPct val="106000"/>
-              </a:lnSpc>
-            </a:pPr>
-            <a:r>
-              <a:rPr sz="1100" b="0">
-                <a:solidFill>
-                  <a:srgbClr val="2D2D2D"/>
-                </a:solidFill>
-                <a:latin typeface="Calibri"/>
-              </a:rPr>
-              <a:t>Rolling-origin sin fuga; el campeón supera al naive (SARIMA 4,09 %).</a:t>
-            </a:r>
-          </a:p>
-        </p:txBody>
-      </p:sp>
-      <p:sp>
-        <p:nvSpPr>
-          <p:cNvPr id="23" name="Rounded Rectangle 22"/>
+              <a:t>Taylor &amp; Letham (2018), Forecasting at Scale, The American Statistician 72(1)</a:t>
+            </a:r>
+          </a:p>
+        </p:txBody>
+      </p:sp>
+      <p:sp>
+        <p:nvSpPr>
+          <p:cNvPr id="13" name="Rounded Rectangle 12"/>
           <p:cNvSpPr/>
           <p:nvPr/>
         </p:nvSpPr>
@@ -11896,48 +10367,14 @@
                 </a:solidFill>
                 <a:latin typeface="Calibri"/>
               </a:rPr>
-              <a:t>▶  Notebook, Sección 8, celda 82</a:t>
-            </a:r>
-          </a:p>
-        </p:txBody>
-      </p:sp>
-      <p:sp>
-        <p:nvSpPr>
-          <p:cNvPr id="24" name="TextBox 23"/>
-          <p:cNvSpPr txBox="1"/>
-          <p:nvPr/>
-        </p:nvSpPr>
-        <p:spPr>
-          <a:xfrm>
-            <a:off x="548640" y="5596128"/>
-            <a:ext cx="11094720" cy="292608"/>
-          </a:xfrm>
-          <a:prstGeom prst="rect">
-            <a:avLst/>
-          </a:prstGeom>
-          <a:noFill/>
-        </p:spPr>
-        <p:txBody>
-          <a:bodyPr wrap="square">
-            <a:spAutoFit/>
-          </a:bodyPr>
-          <a:lstStyle/>
-          <a:p>
-            <a:r>
-              <a:rPr sz="1000">
-                <a:solidFill>
-                  <a:srgbClr val="6E6E6E"/>
-                </a:solidFill>
-                <a:latin typeface="Calibri"/>
-              </a:rPr>
-              <a:t>Fuente única: la guía de supuestos de la sesión (Partes 2-4). Alcance S11: reconocer la decisión y decidir; el ajuste fino avanzado (TBATS, GARCH) solo se nombra.</a:t>
-            </a:r>
-          </a:p>
-        </p:txBody>
-      </p:sp>
-      <p:sp>
-        <p:nvSpPr>
-          <p:cNvPr id="25" name="Oval 24"/>
+              <a:t>▶  Notebook, Pasos 8-9, celda 56</a:t>
+            </a:r>
+          </a:p>
+        </p:txBody>
+      </p:sp>
+      <p:sp>
+        <p:nvSpPr>
+          <p:cNvPr id="14" name="Oval 13"/>
           <p:cNvSpPr/>
           <p:nvPr/>
         </p:nvSpPr>
@@ -11981,7 +10418,7 @@
       </p:sp>
       <p:sp>
         <p:nvSpPr>
-          <p:cNvPr id="26" name="TextBox 25"/>
+          <p:cNvPr id="15" name="TextBox 14"/>
           <p:cNvSpPr txBox="1"/>
           <p:nvPr/>
         </p:nvSpPr>
@@ -12016,7 +10453,7 @@
       </p:sp>
       <p:sp>
         <p:nvSpPr>
-          <p:cNvPr id="27" name="TextBox 26"/>
+          <p:cNvPr id="16" name="TextBox 15"/>
           <p:cNvSpPr txBox="1"/>
           <p:nvPr/>
         </p:nvSpPr>
@@ -12044,156 +10481,7 @@
                 </a:solidFill>
                 <a:latin typeface="Calibri"/>
               </a:rPr>
-              <a:t>5 / 18</a:t>
-            </a:r>
-          </a:p>
-        </p:txBody>
-      </p:sp>
-    </p:spTree>
-  </p:cSld>
-  <p:clrMapOvr>
-    <a:masterClrMapping/>
-  </p:clrMapOvr>
-</p:sld>
-</file>
-
-<file path=ppt/slides/slide6.xml><?xml version="1.0" encoding="utf-8"?>
-<p:sld xmlns:a="http://schemas.openxmlformats.org/drawingml/2006/main" xmlns:p="http://schemas.openxmlformats.org/presentationml/2006/main" xmlns:r="http://schemas.openxmlformats.org/officeDocument/2006/relationships">
-  <p:cSld>
-    <p:bg>
-      <p:bgPr>
-        <a:solidFill>
-          <a:srgbClr val="9B1B30"/>
-        </a:solidFill>
-        <a:effectLst/>
-      </p:bgPr>
-    </p:bg>
-    <p:spTree>
-      <p:nvGrpSpPr>
-        <p:cNvPr id="1" name=""/>
-        <p:cNvGrpSpPr/>
-        <p:nvPr/>
-      </p:nvGrpSpPr>
-      <p:grpSpPr/>
-      <p:sp>
-        <p:nvSpPr>
-          <p:cNvPr id="2" name="Oval 1"/>
-          <p:cNvSpPr/>
-          <p:nvPr/>
-        </p:nvSpPr>
-        <p:spPr>
-          <a:xfrm>
-            <a:off x="914400" y="2103120"/>
-            <a:ext cx="2377440" cy="2377440"/>
-          </a:xfrm>
-          <a:prstGeom prst="ellipse">
-            <a:avLst/>
-          </a:prstGeom>
-          <a:solidFill>
-            <a:srgbClr val="FFFFFF"/>
-          </a:solidFill>
-          <a:ln>
-            <a:noFill/>
-          </a:ln>
-          <a:effectLst/>
-        </p:spPr>
-        <p:style>
-          <a:lnRef idx="1">
-            <a:schemeClr val="accent1"/>
-          </a:lnRef>
-          <a:fillRef idx="3">
-            <a:schemeClr val="accent1"/>
-          </a:fillRef>
-          <a:effectRef idx="2">
-            <a:schemeClr val="accent1"/>
-          </a:effectRef>
-          <a:fontRef idx="minor">
-            <a:schemeClr val="lt1"/>
-          </a:fontRef>
-        </p:style>
-        <p:txBody>
-          <a:bodyPr rtlCol="0" anchor="ctr" lIns="0" rIns="0" tIns="0" bIns="0"/>
-          <a:lstStyle/>
-          <a:p>
-            <a:pPr algn="ctr"/>
-            <a:r>
-              <a:rPr sz="10000" b="1">
-                <a:solidFill>
-                  <a:srgbClr val="9B1B30"/>
-                </a:solidFill>
-                <a:latin typeface="Calibri"/>
-              </a:rPr>
-              <a:t>7</a:t>
-            </a:r>
-          </a:p>
-        </p:txBody>
-      </p:sp>
-      <p:sp>
-        <p:nvSpPr>
-          <p:cNvPr id="3" name="TextBox 2"/>
-          <p:cNvSpPr txBox="1"/>
-          <p:nvPr/>
-        </p:nvSpPr>
-        <p:spPr>
-          <a:xfrm>
-            <a:off x="3931920" y="2651760"/>
-            <a:ext cx="7589520" cy="1371600"/>
-          </a:xfrm>
-          <a:prstGeom prst="rect">
-            <a:avLst/>
-          </a:prstGeom>
-          <a:noFill/>
-        </p:spPr>
-        <p:txBody>
-          <a:bodyPr wrap="square" anchor="t" lIns="0" rIns="0" tIns="0" bIns="0">
-            <a:spAutoFit/>
-          </a:bodyPr>
-          <a:lstStyle/>
-          <a:p>
-            <a:pPr algn="l"/>
-            <a:r>
-              <a:rPr sz="4000" b="1">
-                <a:solidFill>
-                  <a:srgbClr val="FFFFFF"/>
-                </a:solidFill>
-                <a:latin typeface="Calibri"/>
-              </a:rPr>
-              <a:t>¿Cómo se verifica que el resultado es real?</a:t>
-            </a:r>
-          </a:p>
-        </p:txBody>
-      </p:sp>
-      <p:sp>
-        <p:nvSpPr>
-          <p:cNvPr id="4" name="TextBox 3"/>
-          <p:cNvSpPr txBox="1"/>
-          <p:nvPr/>
-        </p:nvSpPr>
-        <p:spPr>
-          <a:xfrm>
-            <a:off x="3931920" y="3977639"/>
-            <a:ext cx="7589520" cy="914400"/>
-          </a:xfrm>
-          <a:prstGeom prst="rect">
-            <a:avLst/>
-          </a:prstGeom>
-          <a:noFill/>
-        </p:spPr>
-        <p:txBody>
-          <a:bodyPr wrap="square" anchor="t" lIns="0" rIns="0" tIns="0" bIns="0">
-            <a:spAutoFit/>
-          </a:bodyPr>
-          <a:lstStyle/>
-          <a:p>
-            <a:pPr algn="l"/>
-            <a:r>
-              <a:rPr sz="1700" b="0">
-                <a:solidFill>
-                  <a:srgbClr val="FCEDEE"/>
-                </a:solidFill>
-                <a:latin typeface="Calibri"/>
-              </a:rPr>
-              <a:t>Capítulo 11.7 — viernes, bloque B</a:t>
+              <a:t>6 / 13</a:t>
             </a:r>
           </a:p>
         </p:txBody>
@@ -12212,7 +10500,7 @@
     <p:bg>
       <p:bgPr>
         <a:solidFill>
-          <a:srgbClr val="9B1B30"/>
+          <a:srgbClr val="FFFFFF"/>
         </a:solidFill>
         <a:effectLst/>
       </p:bgPr>
@@ -12226,20 +10514,90 @@
       <p:grpSpPr/>
       <p:sp>
         <p:nvSpPr>
-          <p:cNvPr id="2" name="Oval 1"/>
+          <p:cNvPr id="2" name="TextBox 1"/>
+          <p:cNvSpPr txBox="1"/>
+          <p:nvPr/>
+        </p:nvSpPr>
+        <p:spPr>
+          <a:xfrm>
+            <a:off x="548640" y="411480"/>
+            <a:ext cx="11094720" cy="292608"/>
+          </a:xfrm>
+          <a:prstGeom prst="rect">
+            <a:avLst/>
+          </a:prstGeom>
+          <a:noFill/>
+        </p:spPr>
+        <p:txBody>
+          <a:bodyPr wrap="square" anchor="t" lIns="0" rIns="0" tIns="0" bIns="0">
+            <a:spAutoFit/>
+          </a:bodyPr>
+          <a:lstStyle/>
+          <a:p>
+            <a:pPr algn="l"/>
+            <a:r>
+              <a:rPr sz="1300" b="1">
+                <a:solidFill>
+                  <a:srgbClr val="9B1B30"/>
+                </a:solidFill>
+                <a:latin typeface="Calibri"/>
+              </a:rPr>
+              <a:t>ERROR DE PRONÓSTICO, HYNDMAN &amp; KOEHLER (2006), FPP3 CAP. 5.8</a:t>
+            </a:r>
+          </a:p>
+        </p:txBody>
+      </p:sp>
+      <p:sp>
+        <p:nvSpPr>
+          <p:cNvPr id="3" name="TextBox 2"/>
+          <p:cNvSpPr txBox="1"/>
+          <p:nvPr/>
+        </p:nvSpPr>
+        <p:spPr>
+          <a:xfrm>
+            <a:off x="548640" y="731520"/>
+            <a:ext cx="11094720" cy="777240"/>
+          </a:xfrm>
+          <a:prstGeom prst="rect">
+            <a:avLst/>
+          </a:prstGeom>
+          <a:noFill/>
+        </p:spPr>
+        <p:txBody>
+          <a:bodyPr wrap="square" anchor="t" lIns="0" rIns="0" tIns="0" bIns="0">
+            <a:spAutoFit/>
+          </a:bodyPr>
+          <a:lstStyle/>
+          <a:p>
+            <a:pPr algn="l"/>
+            <a:r>
+              <a:rPr sz="4000" b="1">
+                <a:solidFill>
+                  <a:srgbClr val="2D2D2D"/>
+                </a:solidFill>
+                <a:latin typeface="Calibri"/>
+              </a:rPr>
+              <a:t>El sMAPE es simétrico y compara escalas distintas</a:t>
+            </a:r>
+          </a:p>
+        </p:txBody>
+      </p:sp>
+      <p:sp>
+        <p:nvSpPr>
+          <p:cNvPr id="4" name="Oval 3"/>
           <p:cNvSpPr/>
           <p:nvPr/>
         </p:nvSpPr>
         <p:spPr>
           <a:xfrm>
-            <a:off x="914400" y="2103120"/>
-            <a:ext cx="2377440" cy="2377440"/>
+            <a:off x="548640" y="2261616"/>
+            <a:ext cx="658368" cy="658368"/>
           </a:xfrm>
           <a:prstGeom prst="ellipse">
             <a:avLst/>
           </a:prstGeom>
           <a:solidFill>
-            <a:srgbClr val="FFFFFF"/>
+            <a:srgbClr val="E4002B"/>
           </a:solidFill>
           <a:ln>
             <a:noFill/>
@@ -12261,95 +10619,16 @@
           </a:fontRef>
         </p:style>
         <p:txBody>
-          <a:bodyPr rtlCol="0" anchor="ctr" lIns="0" rIns="0" tIns="0" bIns="0"/>
+          <a:bodyPr rtlCol="0" anchor="ctr"/>
           <a:lstStyle/>
           <a:p>
             <a:pPr algn="ctr"/>
-            <a:r>
-              <a:rPr sz="10000" b="1">
-                <a:solidFill>
-                  <a:srgbClr val="9B1B30"/>
-                </a:solidFill>
-                <a:latin typeface="Calibri"/>
-              </a:rPr>
-              <a:t>7</a:t>
-            </a:r>
-          </a:p>
-        </p:txBody>
-      </p:sp>
-      <p:sp>
-        <p:nvSpPr>
-          <p:cNvPr id="3" name="TextBox 2"/>
-          <p:cNvSpPr txBox="1"/>
-          <p:nvPr/>
-        </p:nvSpPr>
-        <p:spPr>
-          <a:xfrm>
-            <a:off x="3931920" y="2651760"/>
-            <a:ext cx="7589520" cy="1371600"/>
-          </a:xfrm>
-          <a:prstGeom prst="rect">
-            <a:avLst/>
-          </a:prstGeom>
-          <a:noFill/>
-        </p:spPr>
-        <p:txBody>
-          <a:bodyPr wrap="square" anchor="t" lIns="0" rIns="0" tIns="0" bIns="0">
-            <a:spAutoFit/>
-          </a:bodyPr>
-          <a:lstStyle/>
-          <a:p>
-            <a:pPr algn="l"/>
-            <a:r>
-              <a:rPr sz="4000" b="1">
-                <a:solidFill>
-                  <a:srgbClr val="FFFFFF"/>
-                </a:solidFill>
-                <a:latin typeface="Calibri"/>
-              </a:rPr>
-              <a:t>¿Cómo se verifica que el resultado es real?</a:t>
-            </a:r>
-          </a:p>
-        </p:txBody>
-      </p:sp>
-      <p:sp>
-        <p:nvSpPr>
-          <p:cNvPr id="4" name="TextBox 3"/>
-          <p:cNvSpPr txBox="1"/>
-          <p:nvPr/>
-        </p:nvSpPr>
-        <p:spPr>
-          <a:xfrm>
-            <a:off x="3931920" y="3977639"/>
-            <a:ext cx="7589520" cy="914400"/>
-          </a:xfrm>
-          <a:prstGeom prst="rect">
-            <a:avLst/>
-          </a:prstGeom>
-          <a:noFill/>
-        </p:spPr>
-        <p:txBody>
-          <a:bodyPr wrap="square" anchor="t" lIns="0" rIns="0" tIns="0" bIns="0">
-            <a:spAutoFit/>
-          </a:bodyPr>
-          <a:lstStyle/>
-          <a:p>
-            <a:pPr algn="l"/>
-            <a:r>
-              <a:rPr sz="1700" b="0">
-                <a:solidFill>
-                  <a:srgbClr val="FCEDEE"/>
-                </a:solidFill>
-                <a:latin typeface="Calibri"/>
-              </a:rPr>
-              <a:t>¿Cómo se verifica que el resultado es real?</a:t>
-            </a:r>
           </a:p>
         </p:txBody>
       </p:sp>
       <p:pic>
         <p:nvPicPr>
-          <p:cNvPr id="5" name="Picture 4" descr="git-branch__FFFFFF.png"/>
+          <p:cNvPr id="5" name="Picture 4" descr="target__FFFFFF.png"/>
           <p:cNvPicPr>
             <a:picLocks noChangeAspect="1"/>
           </p:cNvPicPr>
@@ -12363,14 +10642,541 @@
         </p:blipFill>
         <p:spPr>
           <a:xfrm>
-            <a:off x="10195560" y="640080"/>
-            <a:ext cx="1051560" cy="1051560"/>
+            <a:off x="732983" y="2445959"/>
+            <a:ext cx="289682" cy="289682"/>
           </a:xfrm>
           <a:prstGeom prst="rect">
             <a:avLst/>
           </a:prstGeom>
         </p:spPr>
       </p:pic>
+      <p:sp>
+        <p:nvSpPr>
+          <p:cNvPr id="6" name="TextBox 5"/>
+          <p:cNvSpPr txBox="1"/>
+          <p:nvPr/>
+        </p:nvSpPr>
+        <p:spPr>
+          <a:xfrm>
+            <a:off x="1508760" y="1938528"/>
+            <a:ext cx="10134600" cy="411480"/>
+          </a:xfrm>
+          <a:prstGeom prst="rect">
+            <a:avLst/>
+          </a:prstGeom>
+          <a:noFill/>
+        </p:spPr>
+        <p:txBody>
+          <a:bodyPr wrap="square" anchor="t" lIns="0" rIns="0" tIns="0" bIns="0">
+            <a:spAutoFit/>
+          </a:bodyPr>
+          <a:lstStyle/>
+          <a:p>
+            <a:pPr algn="l"/>
+            <a:r>
+              <a:rPr sz="1800" b="1">
+                <a:solidFill>
+                  <a:srgbClr val="9B1B30"/>
+                </a:solidFill>
+                <a:latin typeface="Calibri"/>
+              </a:rPr>
+              <a:t>RMSE — en las unidades</a:t>
+            </a:r>
+          </a:p>
+        </p:txBody>
+      </p:sp>
+      <p:sp>
+        <p:nvSpPr>
+          <p:cNvPr id="7" name="TextBox 6"/>
+          <p:cNvSpPr txBox="1"/>
+          <p:nvPr/>
+        </p:nvSpPr>
+        <p:spPr>
+          <a:xfrm>
+            <a:off x="1508760" y="2395728"/>
+            <a:ext cx="10134600" cy="883920"/>
+          </a:xfrm>
+          <a:prstGeom prst="rect">
+            <a:avLst/>
+          </a:prstGeom>
+          <a:noFill/>
+        </p:spPr>
+        <p:txBody>
+          <a:bodyPr wrap="square" anchor="t" lIns="0" rIns="0" tIns="0" bIns="0">
+            <a:spAutoFit/>
+          </a:bodyPr>
+          <a:lstStyle/>
+          <a:p>
+            <a:pPr algn="l">
+              <a:lnSpc>
+                <a:spcPct val="110000"/>
+              </a:lnSpc>
+            </a:pPr>
+            <a:r>
+              <a:rPr sz="1400" b="0">
+                <a:solidFill>
+                  <a:srgbClr val="2D2D2D"/>
+                </a:solidFill>
+                <a:latin typeface="Calibri"/>
+              </a:rPr>
+              <a:t>Penaliza los errores grandes; útil cuando duele una rotura de stock.</a:t>
+            </a:r>
+          </a:p>
+        </p:txBody>
+      </p:sp>
+      <p:sp>
+        <p:nvSpPr>
+          <p:cNvPr id="8" name="Oval 7"/>
+          <p:cNvSpPr/>
+          <p:nvPr/>
+        </p:nvSpPr>
+        <p:spPr>
+          <a:xfrm>
+            <a:off x="548640" y="3785616"/>
+            <a:ext cx="658368" cy="658368"/>
+          </a:xfrm>
+          <a:prstGeom prst="ellipse">
+            <a:avLst/>
+          </a:prstGeom>
+          <a:solidFill>
+            <a:srgbClr val="E4002B"/>
+          </a:solidFill>
+          <a:ln>
+            <a:noFill/>
+          </a:ln>
+          <a:effectLst/>
+        </p:spPr>
+        <p:style>
+          <a:lnRef idx="1">
+            <a:schemeClr val="accent1"/>
+          </a:lnRef>
+          <a:fillRef idx="3">
+            <a:schemeClr val="accent1"/>
+          </a:fillRef>
+          <a:effectRef idx="2">
+            <a:schemeClr val="accent1"/>
+          </a:effectRef>
+          <a:fontRef idx="minor">
+            <a:schemeClr val="lt1"/>
+          </a:fontRef>
+        </p:style>
+        <p:txBody>
+          <a:bodyPr rtlCol="0" anchor="ctr"/>
+          <a:lstStyle/>
+          <a:p>
+            <a:pPr algn="ctr"/>
+          </a:p>
+        </p:txBody>
+      </p:sp>
+      <p:pic>
+        <p:nvPicPr>
+          <p:cNvPr id="9" name="Picture 8" descr="chart-column__FFFFFF.png"/>
+          <p:cNvPicPr>
+            <a:picLocks noChangeAspect="1"/>
+          </p:cNvPicPr>
+          <p:nvPr/>
+        </p:nvPicPr>
+        <p:blipFill>
+          <a:blip r:embed="rId3"/>
+          <a:stretch>
+            <a:fillRect/>
+          </a:stretch>
+        </p:blipFill>
+        <p:spPr>
+          <a:xfrm>
+            <a:off x="732983" y="3969959"/>
+            <a:ext cx="289682" cy="289682"/>
+          </a:xfrm>
+          <a:prstGeom prst="rect">
+            <a:avLst/>
+          </a:prstGeom>
+        </p:spPr>
+      </p:pic>
+      <p:sp>
+        <p:nvSpPr>
+          <p:cNvPr id="10" name="TextBox 9"/>
+          <p:cNvSpPr txBox="1"/>
+          <p:nvPr/>
+        </p:nvSpPr>
+        <p:spPr>
+          <a:xfrm>
+            <a:off x="1508760" y="3462528"/>
+            <a:ext cx="10134600" cy="411480"/>
+          </a:xfrm>
+          <a:prstGeom prst="rect">
+            <a:avLst/>
+          </a:prstGeom>
+          <a:noFill/>
+        </p:spPr>
+        <p:txBody>
+          <a:bodyPr wrap="square" anchor="t" lIns="0" rIns="0" tIns="0" bIns="0">
+            <a:spAutoFit/>
+          </a:bodyPr>
+          <a:lstStyle/>
+          <a:p>
+            <a:pPr algn="l"/>
+            <a:r>
+              <a:rPr sz="1800" b="1">
+                <a:solidFill>
+                  <a:srgbClr val="9B1B30"/>
+                </a:solidFill>
+                <a:latin typeface="Calibri"/>
+              </a:rPr>
+              <a:t>MAPE — error porcentual</a:t>
+            </a:r>
+          </a:p>
+        </p:txBody>
+      </p:sp>
+      <p:sp>
+        <p:nvSpPr>
+          <p:cNvPr id="11" name="TextBox 10"/>
+          <p:cNvSpPr txBox="1"/>
+          <p:nvPr/>
+        </p:nvSpPr>
+        <p:spPr>
+          <a:xfrm>
+            <a:off x="1508760" y="3919728"/>
+            <a:ext cx="10134600" cy="883920"/>
+          </a:xfrm>
+          <a:prstGeom prst="rect">
+            <a:avLst/>
+          </a:prstGeom>
+          <a:noFill/>
+        </p:spPr>
+        <p:txBody>
+          <a:bodyPr wrap="square" anchor="t" lIns="0" rIns="0" tIns="0" bIns="0">
+            <a:spAutoFit/>
+          </a:bodyPr>
+          <a:lstStyle/>
+          <a:p>
+            <a:pPr algn="l">
+              <a:lnSpc>
+                <a:spcPct val="110000"/>
+              </a:lnSpc>
+            </a:pPr>
+            <a:r>
+              <a:rPr sz="1400" b="0">
+                <a:solidFill>
+                  <a:srgbClr val="2D2D2D"/>
+                </a:solidFill>
+                <a:latin typeface="Calibri"/>
+              </a:rPr>
+              <a:t>Adimensional, pero diverge cuando el valor real se acerca a cero.</a:t>
+            </a:r>
+          </a:p>
+        </p:txBody>
+      </p:sp>
+      <p:sp>
+        <p:nvSpPr>
+          <p:cNvPr id="12" name="Oval 11"/>
+          <p:cNvSpPr/>
+          <p:nvPr/>
+        </p:nvSpPr>
+        <p:spPr>
+          <a:xfrm>
+            <a:off x="548640" y="5309616"/>
+            <a:ext cx="658368" cy="658368"/>
+          </a:xfrm>
+          <a:prstGeom prst="ellipse">
+            <a:avLst/>
+          </a:prstGeom>
+          <a:solidFill>
+            <a:srgbClr val="E4002B"/>
+          </a:solidFill>
+          <a:ln>
+            <a:noFill/>
+          </a:ln>
+          <a:effectLst/>
+        </p:spPr>
+        <p:style>
+          <a:lnRef idx="1">
+            <a:schemeClr val="accent1"/>
+          </a:lnRef>
+          <a:fillRef idx="3">
+            <a:schemeClr val="accent1"/>
+          </a:fillRef>
+          <a:effectRef idx="2">
+            <a:schemeClr val="accent1"/>
+          </a:effectRef>
+          <a:fontRef idx="minor">
+            <a:schemeClr val="lt1"/>
+          </a:fontRef>
+        </p:style>
+        <p:txBody>
+          <a:bodyPr rtlCol="0" anchor="ctr"/>
+          <a:lstStyle/>
+          <a:p>
+            <a:pPr algn="ctr"/>
+          </a:p>
+        </p:txBody>
+      </p:sp>
+      <p:pic>
+        <p:nvPicPr>
+          <p:cNvPr id="13" name="Picture 12" descr="circle-check__FFFFFF.png"/>
+          <p:cNvPicPr>
+            <a:picLocks noChangeAspect="1"/>
+          </p:cNvPicPr>
+          <p:nvPr/>
+        </p:nvPicPr>
+        <p:blipFill>
+          <a:blip r:embed="rId4"/>
+          <a:stretch>
+            <a:fillRect/>
+          </a:stretch>
+        </p:blipFill>
+        <p:spPr>
+          <a:xfrm>
+            <a:off x="732983" y="5493959"/>
+            <a:ext cx="289682" cy="289682"/>
+          </a:xfrm>
+          <a:prstGeom prst="rect">
+            <a:avLst/>
+          </a:prstGeom>
+        </p:spPr>
+      </p:pic>
+      <p:sp>
+        <p:nvSpPr>
+          <p:cNvPr id="14" name="TextBox 13"/>
+          <p:cNvSpPr txBox="1"/>
+          <p:nvPr/>
+        </p:nvSpPr>
+        <p:spPr>
+          <a:xfrm>
+            <a:off x="1508760" y="4986528"/>
+            <a:ext cx="10134600" cy="411480"/>
+          </a:xfrm>
+          <a:prstGeom prst="rect">
+            <a:avLst/>
+          </a:prstGeom>
+          <a:noFill/>
+        </p:spPr>
+        <p:txBody>
+          <a:bodyPr wrap="square" anchor="t" lIns="0" rIns="0" tIns="0" bIns="0">
+            <a:spAutoFit/>
+          </a:bodyPr>
+          <a:lstStyle/>
+          <a:p>
+            <a:pPr algn="l"/>
+            <a:r>
+              <a:rPr sz="1800" b="1">
+                <a:solidFill>
+                  <a:srgbClr val="9B1B30"/>
+                </a:solidFill>
+                <a:latin typeface="Calibri"/>
+              </a:rPr>
+              <a:t>sMAPE, simétrico (0 a 200 %)</a:t>
+            </a:r>
+          </a:p>
+        </p:txBody>
+      </p:sp>
+      <p:sp>
+        <p:nvSpPr>
+          <p:cNvPr id="15" name="TextBox 14"/>
+          <p:cNvSpPr txBox="1"/>
+          <p:nvPr/>
+        </p:nvSpPr>
+        <p:spPr>
+          <a:xfrm>
+            <a:off x="1508760" y="5443728"/>
+            <a:ext cx="10134600" cy="883920"/>
+          </a:xfrm>
+          <a:prstGeom prst="rect">
+            <a:avLst/>
+          </a:prstGeom>
+          <a:noFill/>
+        </p:spPr>
+        <p:txBody>
+          <a:bodyPr wrap="square" anchor="t" lIns="0" rIns="0" tIns="0" bIns="0">
+            <a:spAutoFit/>
+          </a:bodyPr>
+          <a:lstStyle/>
+          <a:p>
+            <a:pPr algn="l">
+              <a:lnSpc>
+                <a:spcPct val="110000"/>
+              </a:lnSpc>
+            </a:pPr>
+            <a:r>
+              <a:rPr sz="1400" b="0">
+                <a:solidFill>
+                  <a:srgbClr val="2D2D2D"/>
+                </a:solidFill>
+                <a:latin typeface="Calibri"/>
+              </a:rPr>
+              <a:t>Acota el denominador; es la métrica oficial de la competencia M4.</a:t>
+            </a:r>
+          </a:p>
+        </p:txBody>
+      </p:sp>
+      <p:sp>
+        <p:nvSpPr>
+          <p:cNvPr id="16" name="Rounded Rectangle 15"/>
+          <p:cNvSpPr/>
+          <p:nvPr/>
+        </p:nvSpPr>
+        <p:spPr>
+          <a:xfrm>
+            <a:off x="8366760" y="301752"/>
+            <a:ext cx="3291840" cy="402336"/>
+          </a:xfrm>
+          <a:prstGeom prst="roundRect">
+            <a:avLst/>
+          </a:prstGeom>
+          <a:solidFill>
+            <a:srgbClr val="FCEDEE"/>
+          </a:solidFill>
+          <a:ln w="15875">
+            <a:solidFill>
+              <a:srgbClr val="E4002B"/>
+            </a:solidFill>
+          </a:ln>
+          <a:effectLst/>
+        </p:spPr>
+        <p:style>
+          <a:lnRef idx="1">
+            <a:schemeClr val="accent1"/>
+          </a:lnRef>
+          <a:fillRef idx="3">
+            <a:schemeClr val="accent1"/>
+          </a:fillRef>
+          <a:effectRef idx="2">
+            <a:schemeClr val="accent1"/>
+          </a:effectRef>
+          <a:fontRef idx="minor">
+            <a:schemeClr val="lt1"/>
+          </a:fontRef>
+        </p:style>
+        <p:txBody>
+          <a:bodyPr rtlCol="0" anchor="ctr" lIns="54864" rIns="54864" tIns="0" bIns="0"/>
+          <a:lstStyle/>
+          <a:p>
+            <a:pPr algn="ctr"/>
+            <a:r>
+              <a:rPr sz="1300" b="1">
+                <a:solidFill>
+                  <a:srgbClr val="9B1B30"/>
+                </a:solidFill>
+                <a:latin typeface="Calibri"/>
+              </a:rPr>
+              <a:t>▶  Notebook, Sección 1.4, celda 14</a:t>
+            </a:r>
+          </a:p>
+        </p:txBody>
+      </p:sp>
+      <p:sp>
+        <p:nvSpPr>
+          <p:cNvPr id="17" name="Oval 16"/>
+          <p:cNvSpPr/>
+          <p:nvPr/>
+        </p:nvSpPr>
+        <p:spPr>
+          <a:xfrm>
+            <a:off x="548640" y="6473952"/>
+            <a:ext cx="100584" cy="100584"/>
+          </a:xfrm>
+          <a:prstGeom prst="ellipse">
+            <a:avLst/>
+          </a:prstGeom>
+          <a:solidFill>
+            <a:srgbClr val="E4002B"/>
+          </a:solidFill>
+          <a:ln>
+            <a:noFill/>
+          </a:ln>
+          <a:effectLst/>
+        </p:spPr>
+        <p:style>
+          <a:lnRef idx="1">
+            <a:schemeClr val="accent1"/>
+          </a:lnRef>
+          <a:fillRef idx="3">
+            <a:schemeClr val="accent1"/>
+          </a:fillRef>
+          <a:effectRef idx="2">
+            <a:schemeClr val="accent1"/>
+          </a:effectRef>
+          <a:fontRef idx="minor">
+            <a:schemeClr val="lt1"/>
+          </a:fontRef>
+        </p:style>
+        <p:txBody>
+          <a:bodyPr rtlCol="0" anchor="ctr"/>
+          <a:lstStyle/>
+          <a:p>
+            <a:pPr algn="ctr"/>
+          </a:p>
+        </p:txBody>
+      </p:sp>
+      <p:sp>
+        <p:nvSpPr>
+          <p:cNvPr id="18" name="TextBox 17"/>
+          <p:cNvSpPr txBox="1"/>
+          <p:nvPr/>
+        </p:nvSpPr>
+        <p:spPr>
+          <a:xfrm>
+            <a:off x="749808" y="6437376"/>
+            <a:ext cx="7772400" cy="274320"/>
+          </a:xfrm>
+          <a:prstGeom prst="rect">
+            <a:avLst/>
+          </a:prstGeom>
+          <a:noFill/>
+        </p:spPr>
+        <p:txBody>
+          <a:bodyPr wrap="square" anchor="t" lIns="0" rIns="0" tIns="0" bIns="0">
+            <a:spAutoFit/>
+          </a:bodyPr>
+          <a:lstStyle/>
+          <a:p>
+            <a:pPr algn="l"/>
+            <a:r>
+              <a:rPr sz="900" b="0">
+                <a:solidFill>
+                  <a:srgbClr val="6E6E6E"/>
+                </a:solidFill>
+                <a:latin typeface="Calibri"/>
+              </a:rPr>
+              <a:t>S11 — Herramientas para la Ciencia de Datos, UPC</a:t>
+            </a:r>
+          </a:p>
+        </p:txBody>
+      </p:sp>
+      <p:sp>
+        <p:nvSpPr>
+          <p:cNvPr id="19" name="TextBox 18"/>
+          <p:cNvSpPr txBox="1"/>
+          <p:nvPr/>
+        </p:nvSpPr>
+        <p:spPr>
+          <a:xfrm>
+            <a:off x="10180320" y="6437376"/>
+            <a:ext cx="1463040" cy="274320"/>
+          </a:xfrm>
+          <a:prstGeom prst="rect">
+            <a:avLst/>
+          </a:prstGeom>
+          <a:noFill/>
+        </p:spPr>
+        <p:txBody>
+          <a:bodyPr wrap="square" anchor="t" lIns="0" rIns="0" tIns="0" bIns="0">
+            <a:spAutoFit/>
+          </a:bodyPr>
+          <a:lstStyle/>
+          <a:p>
+            <a:pPr algn="r"/>
+            <a:r>
+              <a:rPr sz="900" b="0">
+                <a:solidFill>
+                  <a:srgbClr val="6E6E6E"/>
+                </a:solidFill>
+                <a:latin typeface="Calibri"/>
+              </a:rPr>
+              <a:t>7 / 13</a:t>
+            </a:r>
+          </a:p>
+        </p:txBody>
+      </p:sp>
     </p:spTree>
   </p:cSld>
   <p:clrMapOvr>
@@ -12427,7 +11233,7 @@
                 </a:solidFill>
                 <a:latin typeface="Calibri"/>
               </a:rPr>
-              <a:t>EVIDENCIA — MAPE POR HORIZONTE (CROSS_VALIDATION)</a:t>
+              <a:t>BACKTESTING / ROLLING-ORIGIN, TASHMAN (2000), FPP3 CAP. 5.10</a:t>
             </a:r>
           </a:p>
         </p:txBody>
@@ -12462,45 +11268,21 @@
                 </a:solidFill>
                 <a:latin typeface="Calibri"/>
               </a:rPr>
-              <a:t>El error de Prophet crece del 5,84 % al 10,04 %</a:t>
-            </a:r>
-          </a:p>
-        </p:txBody>
-      </p:sp>
-      <p:pic>
-        <p:nvPicPr>
-          <p:cNvPr id="4" name="Picture 3" descr="deck_prophet.png"/>
-          <p:cNvPicPr>
-            <a:picLocks noChangeAspect="1"/>
-          </p:cNvPicPr>
-          <p:nvPr/>
-        </p:nvPicPr>
-        <p:blipFill>
-          <a:blip r:embed="rId2"/>
-          <a:stretch>
-            <a:fillRect/>
-          </a:stretch>
-        </p:blipFill>
-        <p:spPr>
-          <a:xfrm>
-            <a:off x="548640" y="1874519"/>
-            <a:ext cx="4568439" cy="2880360"/>
-          </a:xfrm>
-          <a:prstGeom prst="rect">
-            <a:avLst/>
-          </a:prstGeom>
-        </p:spPr>
-      </p:pic>
-      <p:sp>
-        <p:nvSpPr>
-          <p:cNvPr id="5" name="Oval 4"/>
+              <a:t>El backtesting separa el pasado del futuro</a:t>
+            </a:r>
+          </a:p>
+        </p:txBody>
+      </p:sp>
+      <p:sp>
+        <p:nvSpPr>
+          <p:cNvPr id="4" name="Oval 3"/>
           <p:cNvSpPr/>
           <p:nvPr/>
         </p:nvSpPr>
         <p:spPr>
           <a:xfrm>
-            <a:off x="7955279" y="2011680"/>
-            <a:ext cx="548640" cy="548640"/>
+            <a:off x="548640" y="1828800"/>
+            <a:ext cx="457200" cy="457200"/>
           </a:xfrm>
           <a:prstGeom prst="ellipse">
             <a:avLst/>
@@ -12528,47 +11310,32 @@
           </a:fontRef>
         </p:style>
         <p:txBody>
-          <a:bodyPr rtlCol="0" anchor="ctr"/>
+          <a:bodyPr rtlCol="0" anchor="ctr" lIns="0" rIns="0" tIns="0" bIns="0"/>
           <a:lstStyle/>
           <a:p>
             <a:pPr algn="ctr"/>
-          </a:p>
-        </p:txBody>
-      </p:sp>
-      <p:pic>
-        <p:nvPicPr>
-          <p:cNvPr id="6" name="Picture 5" descr="lightbulb__FFFFFF.png"/>
-          <p:cNvPicPr>
-            <a:picLocks noChangeAspect="1"/>
-          </p:cNvPicPr>
-          <p:nvPr/>
-        </p:nvPicPr>
-        <p:blipFill>
-          <a:blip r:embed="rId3"/>
-          <a:stretch>
-            <a:fillRect/>
-          </a:stretch>
-        </p:blipFill>
-        <p:spPr>
-          <a:xfrm>
-            <a:off x="8108898" y="2165299"/>
-            <a:ext cx="241402" cy="241402"/>
-          </a:xfrm>
-          <a:prstGeom prst="rect">
-            <a:avLst/>
-          </a:prstGeom>
-        </p:spPr>
-      </p:pic>
-      <p:sp>
-        <p:nvSpPr>
-          <p:cNvPr id="7" name="TextBox 6"/>
+            <a:r>
+              <a:rPr sz="1600" b="1">
+                <a:solidFill>
+                  <a:srgbClr val="FFFFFF"/>
+                </a:solidFill>
+                <a:latin typeface="Calibri"/>
+              </a:rPr>
+              <a:t>→</a:t>
+            </a:r>
+          </a:p>
+        </p:txBody>
+      </p:sp>
+      <p:sp>
+        <p:nvSpPr>
+          <p:cNvPr id="5" name="TextBox 4"/>
           <p:cNvSpPr txBox="1"/>
           <p:nvPr/>
         </p:nvSpPr>
         <p:spPr>
           <a:xfrm>
-            <a:off x="8686800" y="2057400"/>
-            <a:ext cx="2926080" cy="548640"/>
+            <a:off x="1143000" y="1874519"/>
+            <a:ext cx="4754880" cy="457200"/>
           </a:xfrm>
           <a:prstGeom prst="rect">
             <a:avLst/>
@@ -12583,27 +11350,27 @@
           <a:p>
             <a:pPr algn="l"/>
             <a:r>
-              <a:rPr sz="1500" b="1">
+              <a:rPr sz="2000" b="1">
                 <a:solidFill>
                   <a:srgbClr val="9B1B30"/>
                 </a:solidFill>
                 <a:latin typeface="Calibri"/>
               </a:rPr>
-              <a:t>Lectura de negocio</a:t>
-            </a:r>
-          </a:p>
-        </p:txBody>
-      </p:sp>
-      <p:sp>
-        <p:nvSpPr>
-          <p:cNvPr id="8" name="TextBox 7"/>
+              <a:t>Validación de origen móvil</a:t>
+            </a:r>
+          </a:p>
+        </p:txBody>
+      </p:sp>
+      <p:sp>
+        <p:nvSpPr>
+          <p:cNvPr id="6" name="TextBox 5"/>
           <p:cNvSpPr txBox="1"/>
           <p:nvPr/>
         </p:nvSpPr>
         <p:spPr>
           <a:xfrm>
-            <a:off x="7955279" y="2880360"/>
-            <a:ext cx="3657600" cy="3108960"/>
+            <a:off x="621792" y="2606040"/>
+            <a:ext cx="5202936" cy="3474720"/>
           </a:xfrm>
           <a:prstGeom prst="rect">
             <a:avLst/>
@@ -12611,84 +11378,79 @@
           <a:noFill/>
         </p:spPr>
         <p:txBody>
-          <a:bodyPr wrap="square" anchor="t" lIns="0" rIns="0" tIns="0" bIns="0">
+          <a:bodyPr wrap="square" lIns="0" rIns="0" tIns="0" bIns="0">
             <a:spAutoFit/>
           </a:bodyPr>
           <a:lstStyle/>
           <a:p>
             <a:pPr algn="l">
-              <a:lnSpc>
-                <a:spcPct val="125000"/>
-              </a:lnSpc>
+              <a:spcAft>
+                <a:spcPts val="900"/>
+              </a:spcAft>
             </a:pPr>
             <a:r>
-              <a:rPr sz="1500" b="0">
+              <a:rPr sz="1400">
                 <a:solidFill>
                   <a:srgbClr val="2D2D2D"/>
                 </a:solidFill>
                 <a:latin typeface="Calibri"/>
               </a:rPr>
-              <a:t>El error medio es 7,45 %: crece con el horizonte, de 5,84 % a corto plazo a 10,04 % a un año.</a:t>
-            </a:r>
-          </a:p>
-        </p:txBody>
-      </p:sp>
-      <p:sp>
-        <p:nvSpPr>
-          <p:cNvPr id="9" name="TextBox 8"/>
-          <p:cNvSpPr txBox="1"/>
-          <p:nvPr/>
-        </p:nvSpPr>
-        <p:spPr>
-          <a:xfrm>
-            <a:off x="548640" y="5961888"/>
-            <a:ext cx="11094720" cy="292608"/>
-          </a:xfrm>
-          <a:prstGeom prst="rect">
-            <a:avLst/>
-          </a:prstGeom>
-          <a:noFill/>
-        </p:spPr>
-        <p:txBody>
-          <a:bodyPr wrap="square" anchor="t" lIns="0" rIns="0" tIns="0" bIns="0">
-            <a:spAutoFit/>
-          </a:bodyPr>
-          <a:lstStyle/>
-          <a:p>
-            <a:pPr algn="l"/>
-            <a:r>
-              <a:rPr sz="1000" b="0">
-                <a:solidFill>
-                  <a:srgbClr val="6E6E6E"/>
-                </a:solidFill>
-                <a:latin typeface="Calibri"/>
-              </a:rPr>
-              <a:t>Prophet / Peyton Manning, cross_validation (730/180/365), reconstruido de Excel!prophet_cv (media B5).</a:t>
-            </a:r>
-          </a:p>
-        </p:txBody>
-      </p:sp>
-      <p:sp>
-        <p:nvSpPr>
-          <p:cNvPr id="10" name="Rounded Rectangle 9"/>
+              <a:t>Fija un origen de pronóstico</a:t>
+            </a:r>
+          </a:p>
+          <a:p>
+            <a:pPr algn="l">
+              <a:spcAft>
+                <a:spcPts val="900"/>
+              </a:spcAft>
+            </a:pPr>
+            <a:r>
+              <a:rPr sz="1400">
+                <a:solidFill>
+                  <a:srgbClr val="2D2D2D"/>
+                </a:solidFill>
+                <a:latin typeface="Calibri"/>
+              </a:rPr>
+              <a:t>Entrena pasado, predice futuro</a:t>
+            </a:r>
+          </a:p>
+          <a:p>
+            <a:pPr algn="l">
+              <a:spcAft>
+                <a:spcPts val="900"/>
+              </a:spcAft>
+            </a:pPr>
+            <a:r>
+              <a:rPr sz="1400">
+                <a:solidFill>
+                  <a:srgbClr val="2D2D2D"/>
+                </a:solidFill>
+                <a:latin typeface="Calibri"/>
+              </a:rPr>
+              <a:t>Avanza el origen y repite</a:t>
+            </a:r>
+          </a:p>
+        </p:txBody>
+      </p:sp>
+      <p:sp>
+        <p:nvSpPr>
+          <p:cNvPr id="7" name="Oval 6"/>
           <p:cNvSpPr/>
           <p:nvPr/>
         </p:nvSpPr>
         <p:spPr>
           <a:xfrm>
-            <a:off x="548640" y="5029200"/>
-            <a:ext cx="7040880" cy="329184"/>
-          </a:xfrm>
-          <a:prstGeom prst="roundRect">
+            <a:off x="6309360" y="1828800"/>
+            <a:ext cx="457200" cy="457200"/>
+          </a:xfrm>
+          <a:prstGeom prst="ellipse">
             <a:avLst/>
           </a:prstGeom>
           <a:solidFill>
-            <a:srgbClr val="FCEDEE"/>
+            <a:srgbClr val="E4002B"/>
           </a:solidFill>
-          <a:ln w="12700">
-            <a:solidFill>
-              <a:srgbClr val="E4002B"/>
-            </a:solidFill>
+          <a:ln>
+            <a:noFill/>
           </a:ln>
           <a:effectLst/>
         </p:spPr>
@@ -12707,47 +11469,67 @@
           </a:fontRef>
         </p:style>
         <p:txBody>
-          <a:bodyPr rtlCol="0" anchor="ctr"/>
+          <a:bodyPr rtlCol="0" anchor="ctr" lIns="0" rIns="0" tIns="0" bIns="0"/>
           <a:lstStyle/>
           <a:p>
             <a:pPr algn="ctr"/>
-          </a:p>
-        </p:txBody>
-      </p:sp>
-      <p:pic>
-        <p:nvPicPr>
-          <p:cNvPr id="11" name="Picture 10" descr="book-open__E4002B.png"/>
-          <p:cNvPicPr>
-            <a:picLocks noChangeAspect="1"/>
-          </p:cNvPicPr>
-          <p:nvPr/>
-        </p:nvPicPr>
-        <p:blipFill>
-          <a:blip r:embed="rId4"/>
-          <a:stretch>
-            <a:fillRect/>
-          </a:stretch>
-        </p:blipFill>
-        <p:spPr>
-          <a:xfrm>
-            <a:off x="694944" y="5084064"/>
-            <a:ext cx="219456" cy="219456"/>
-          </a:xfrm>
-          <a:prstGeom prst="rect">
-            <a:avLst/>
-          </a:prstGeom>
-        </p:spPr>
-      </p:pic>
-      <p:sp>
-        <p:nvSpPr>
-          <p:cNvPr id="12" name="TextBox 11"/>
+            <a:r>
+              <a:rPr sz="1600" b="1">
+                <a:solidFill>
+                  <a:srgbClr val="FFFFFF"/>
+                </a:solidFill>
+                <a:latin typeface="Calibri"/>
+              </a:rPr>
+              <a:t>f</a:t>
+            </a:r>
+          </a:p>
+        </p:txBody>
+      </p:sp>
+      <p:sp>
+        <p:nvSpPr>
+          <p:cNvPr id="8" name="TextBox 7"/>
           <p:cNvSpPr txBox="1"/>
           <p:nvPr/>
         </p:nvSpPr>
         <p:spPr>
           <a:xfrm>
-            <a:off x="1005840" y="5061204"/>
-            <a:ext cx="6473952" cy="274320"/>
+            <a:off x="6903720" y="1874519"/>
+            <a:ext cx="4754880" cy="457200"/>
+          </a:xfrm>
+          <a:prstGeom prst="rect">
+            <a:avLst/>
+          </a:prstGeom>
+          <a:noFill/>
+        </p:spPr>
+        <p:txBody>
+          <a:bodyPr wrap="square" anchor="t" lIns="0" rIns="0" tIns="0" bIns="0">
+            <a:spAutoFit/>
+          </a:bodyPr>
+          <a:lstStyle/>
+          <a:p>
+            <a:pPr algn="l"/>
+            <a:r>
+              <a:rPr sz="2000" b="1">
+                <a:solidFill>
+                  <a:srgbClr val="9B1B30"/>
+                </a:solidFill>
+                <a:latin typeface="Calibri"/>
+              </a:rPr>
+              <a:t>Features temporales</a:t>
+            </a:r>
+          </a:p>
+        </p:txBody>
+      </p:sp>
+      <p:sp>
+        <p:nvSpPr>
+          <p:cNvPr id="9" name="TextBox 8"/>
+          <p:cNvSpPr txBox="1"/>
+          <p:nvPr/>
+        </p:nvSpPr>
+        <p:spPr>
+          <a:xfrm>
+            <a:off x="6382512" y="2606040"/>
+            <a:ext cx="5202936" cy="3474720"/>
           </a:xfrm>
           <a:prstGeom prst="rect">
             <a:avLst/>
@@ -12760,31 +11542,58 @@
           </a:bodyPr>
           <a:lstStyle/>
           <a:p>
-            <a:pPr algn="l"/>
-            <a:r>
-              <a:rPr sz="1200" b="1">
-                <a:solidFill>
-                  <a:srgbClr val="9B1B30"/>
-                </a:solidFill>
-                <a:latin typeface="Calibri"/>
-              </a:rPr>
-              <a:t>En el paper:  </a:t>
-            </a:r>
-            <a:r>
-              <a:rPr sz="1200" b="1">
+            <a:pPr algn="l">
+              <a:spcAft>
+                <a:spcPts val="900"/>
+              </a:spcAft>
+            </a:pPr>
+            <a:r>
+              <a:rPr sz="1400">
                 <a:solidFill>
                   <a:srgbClr val="2D2D2D"/>
                 </a:solidFill>
                 <a:latin typeface="Calibri"/>
               </a:rPr>
-              <a:t>Taylor &amp; Letham (2018), Forecasting at Scale, The American Statistician 72(1)</a:t>
-            </a:r>
-          </a:p>
-        </p:txBody>
-      </p:sp>
-      <p:sp>
-        <p:nvSpPr>
-          <p:cNvPr id="13" name="Rounded Rectangle 12"/>
+              <a:t>Lags: y(t−1), y(t−12)</a:t>
+            </a:r>
+          </a:p>
+          <a:p>
+            <a:pPr algn="l">
+              <a:spcAft>
+                <a:spcPts val="900"/>
+              </a:spcAft>
+            </a:pPr>
+            <a:r>
+              <a:rPr sz="1400">
+                <a:solidFill>
+                  <a:srgbClr val="2D2D2D"/>
+                </a:solidFill>
+                <a:latin typeface="Calibri"/>
+              </a:rPr>
+              <a:t>Medias móviles del pasado</a:t>
+            </a:r>
+          </a:p>
+          <a:p>
+            <a:pPr algn="l">
+              <a:spcAft>
+                <a:spcPts val="900"/>
+              </a:spcAft>
+            </a:pPr>
+            <a:r>
+              <a:rPr sz="1400">
+                <a:solidFill>
+                  <a:srgbClr val="2D2D2D"/>
+                </a:solidFill>
+                <a:latin typeface="Calibri"/>
+              </a:rPr>
+              <a:t>Calendario: mes, festivo</a:t>
+            </a:r>
+          </a:p>
+        </p:txBody>
+      </p:sp>
+      <p:sp>
+        <p:nvSpPr>
+          <p:cNvPr id="10" name="Rounded Rectangle 9"/>
           <p:cNvSpPr/>
           <p:nvPr/>
         </p:nvSpPr>
@@ -12832,14 +11641,14 @@
                 </a:solidFill>
                 <a:latin typeface="Calibri"/>
               </a:rPr>
-              <a:t>▶  Notebook, Pasos 8-9, celda 56</a:t>
-            </a:r>
-          </a:p>
-        </p:txBody>
-      </p:sp>
-      <p:sp>
-        <p:nvSpPr>
-          <p:cNvPr id="14" name="Oval 13"/>
+              <a:t>▶  Entregable, backtesting</a:t>
+            </a:r>
+          </a:p>
+        </p:txBody>
+      </p:sp>
+      <p:sp>
+        <p:nvSpPr>
+          <p:cNvPr id="11" name="Oval 10"/>
           <p:cNvSpPr/>
           <p:nvPr/>
         </p:nvSpPr>
@@ -12883,7 +11692,7 @@
       </p:sp>
       <p:sp>
         <p:nvSpPr>
-          <p:cNvPr id="15" name="TextBox 14"/>
+          <p:cNvPr id="12" name="TextBox 11"/>
           <p:cNvSpPr txBox="1"/>
           <p:nvPr/>
         </p:nvSpPr>
@@ -12918,7 +11727,7 @@
       </p:sp>
       <p:sp>
         <p:nvSpPr>
-          <p:cNvPr id="16" name="TextBox 15"/>
+          <p:cNvPr id="13" name="TextBox 12"/>
           <p:cNvSpPr txBox="1"/>
           <p:nvPr/>
         </p:nvSpPr>
@@ -12946,7 +11755,7 @@
                 </a:solidFill>
                 <a:latin typeface="Calibri"/>
               </a:rPr>
-              <a:t>8 / 18</a:t>
+              <a:t>8 / 13</a:t>
             </a:r>
           </a:p>
         </p:txBody>
@@ -13007,7 +11816,7 @@
                 </a:solidFill>
                 <a:latin typeface="Calibri"/>
               </a:rPr>
-              <a:t>ERROR DE PRONÓSTICO, HYNDMAN &amp; KOEHLER (2006), FPP3 CAP. 5.8</a:t>
+              <a:t>DECISIÓN — SMAPE MEDIO POR MODELO</a:t>
             </a:r>
           </a:p>
         </p:txBody>
@@ -13042,21 +11851,45 @@
                 </a:solidFill>
                 <a:latin typeface="Calibri"/>
               </a:rPr>
-              <a:t>El sMAPE es simétrico y compara escalas distintas</a:t>
-            </a:r>
-          </a:p>
-        </p:txBody>
-      </p:sp>
-      <p:sp>
-        <p:nvSpPr>
-          <p:cNvPr id="4" name="Oval 3"/>
+              <a:t>SARIMA lidera con 4,09 % y supera al naive 5,78 %</a:t>
+            </a:r>
+          </a:p>
+        </p:txBody>
+      </p:sp>
+      <p:pic>
+        <p:nvPicPr>
+          <p:cNvPr id="4" name="Picture 3" descr="deck_backtesting.png"/>
+          <p:cNvPicPr>
+            <a:picLocks noChangeAspect="1"/>
+          </p:cNvPicPr>
+          <p:nvPr/>
+        </p:nvPicPr>
+        <p:blipFill>
+          <a:blip r:embed="rId2"/>
+          <a:stretch>
+            <a:fillRect/>
+          </a:stretch>
+        </p:blipFill>
+        <p:spPr>
+          <a:xfrm>
+            <a:off x="548640" y="1828800"/>
+            <a:ext cx="6949440" cy="4185148"/>
+          </a:xfrm>
+          <a:prstGeom prst="rect">
+            <a:avLst/>
+          </a:prstGeom>
+        </p:spPr>
+      </p:pic>
+      <p:sp>
+        <p:nvSpPr>
+          <p:cNvPr id="5" name="Oval 4"/>
           <p:cNvSpPr/>
           <p:nvPr/>
         </p:nvSpPr>
         <p:spPr>
           <a:xfrm>
-            <a:off x="548640" y="2261616"/>
-            <a:ext cx="658368" cy="658368"/>
+            <a:off x="7955279" y="2011680"/>
+            <a:ext cx="548640" cy="548640"/>
           </a:xfrm>
           <a:prstGeom prst="ellipse">
             <a:avLst/>
@@ -13093,149 +11926,7 @@
       </p:sp>
       <p:pic>
         <p:nvPicPr>
-          <p:cNvPr id="5" name="Picture 4" descr="target__FFFFFF.png"/>
-          <p:cNvPicPr>
-            <a:picLocks noChangeAspect="1"/>
-          </p:cNvPicPr>
-          <p:nvPr/>
-        </p:nvPicPr>
-        <p:blipFill>
-          <a:blip r:embed="rId2"/>
-          <a:stretch>
-            <a:fillRect/>
-          </a:stretch>
-        </p:blipFill>
-        <p:spPr>
-          <a:xfrm>
-            <a:off x="732983" y="2445959"/>
-            <a:ext cx="289682" cy="289682"/>
-          </a:xfrm>
-          <a:prstGeom prst="rect">
-            <a:avLst/>
-          </a:prstGeom>
-        </p:spPr>
-      </p:pic>
-      <p:sp>
-        <p:nvSpPr>
-          <p:cNvPr id="6" name="TextBox 5"/>
-          <p:cNvSpPr txBox="1"/>
-          <p:nvPr/>
-        </p:nvSpPr>
-        <p:spPr>
-          <a:xfrm>
-            <a:off x="1508760" y="1938528"/>
-            <a:ext cx="10134600" cy="411480"/>
-          </a:xfrm>
-          <a:prstGeom prst="rect">
-            <a:avLst/>
-          </a:prstGeom>
-          <a:noFill/>
-        </p:spPr>
-        <p:txBody>
-          <a:bodyPr wrap="square" anchor="t" lIns="0" rIns="0" tIns="0" bIns="0">
-            <a:spAutoFit/>
-          </a:bodyPr>
-          <a:lstStyle/>
-          <a:p>
-            <a:pPr algn="l"/>
-            <a:r>
-              <a:rPr sz="1800" b="1">
-                <a:solidFill>
-                  <a:srgbClr val="9B1B30"/>
-                </a:solidFill>
-                <a:latin typeface="Calibri"/>
-              </a:rPr>
-              <a:t>RMSE — en las unidades</a:t>
-            </a:r>
-          </a:p>
-        </p:txBody>
-      </p:sp>
-      <p:sp>
-        <p:nvSpPr>
-          <p:cNvPr id="7" name="TextBox 6"/>
-          <p:cNvSpPr txBox="1"/>
-          <p:nvPr/>
-        </p:nvSpPr>
-        <p:spPr>
-          <a:xfrm>
-            <a:off x="1508760" y="2395728"/>
-            <a:ext cx="10134600" cy="883920"/>
-          </a:xfrm>
-          <a:prstGeom prst="rect">
-            <a:avLst/>
-          </a:prstGeom>
-          <a:noFill/>
-        </p:spPr>
-        <p:txBody>
-          <a:bodyPr wrap="square" anchor="t" lIns="0" rIns="0" tIns="0" bIns="0">
-            <a:spAutoFit/>
-          </a:bodyPr>
-          <a:lstStyle/>
-          <a:p>
-            <a:pPr algn="l">
-              <a:lnSpc>
-                <a:spcPct val="110000"/>
-              </a:lnSpc>
-            </a:pPr>
-            <a:r>
-              <a:rPr sz="1400" b="0">
-                <a:solidFill>
-                  <a:srgbClr val="2D2D2D"/>
-                </a:solidFill>
-                <a:latin typeface="Calibri"/>
-              </a:rPr>
-              <a:t>Penaliza los errores grandes; útil cuando duele una rotura de stock.</a:t>
-            </a:r>
-          </a:p>
-        </p:txBody>
-      </p:sp>
-      <p:sp>
-        <p:nvSpPr>
-          <p:cNvPr id="8" name="Oval 7"/>
-          <p:cNvSpPr/>
-          <p:nvPr/>
-        </p:nvSpPr>
-        <p:spPr>
-          <a:xfrm>
-            <a:off x="548640" y="3785616"/>
-            <a:ext cx="658368" cy="658368"/>
-          </a:xfrm>
-          <a:prstGeom prst="ellipse">
-            <a:avLst/>
-          </a:prstGeom>
-          <a:solidFill>
-            <a:srgbClr val="E4002B"/>
-          </a:solidFill>
-          <a:ln>
-            <a:noFill/>
-          </a:ln>
-          <a:effectLst/>
-        </p:spPr>
-        <p:style>
-          <a:lnRef idx="1">
-            <a:schemeClr val="accent1"/>
-          </a:lnRef>
-          <a:fillRef idx="3">
-            <a:schemeClr val="accent1"/>
-          </a:fillRef>
-          <a:effectRef idx="2">
-            <a:schemeClr val="accent1"/>
-          </a:effectRef>
-          <a:fontRef idx="minor">
-            <a:schemeClr val="lt1"/>
-          </a:fontRef>
-        </p:style>
-        <p:txBody>
-          <a:bodyPr rtlCol="0" anchor="ctr"/>
-          <a:lstStyle/>
-          <a:p>
-            <a:pPr algn="ctr"/>
-          </a:p>
-        </p:txBody>
-      </p:sp>
-      <p:pic>
-        <p:nvPicPr>
-          <p:cNvPr id="9" name="Picture 8" descr="chart-column__FFFFFF.png"/>
+          <p:cNvPr id="6" name="Picture 5" descr="lightbulb__FFFFFF.png"/>
           <p:cNvPicPr>
             <a:picLocks noChangeAspect="1"/>
           </p:cNvPicPr>
@@ -13249,8 +11940,8 @@
         </p:blipFill>
         <p:spPr>
           <a:xfrm>
-            <a:off x="732983" y="3969959"/>
-            <a:ext cx="289682" cy="289682"/>
+            <a:off x="8108898" y="2165299"/>
+            <a:ext cx="241402" cy="241402"/>
           </a:xfrm>
           <a:prstGeom prst="rect">
             <a:avLst/>
@@ -13259,14 +11950,14 @@
       </p:pic>
       <p:sp>
         <p:nvSpPr>
-          <p:cNvPr id="10" name="TextBox 9"/>
+          <p:cNvPr id="7" name="TextBox 6"/>
           <p:cNvSpPr txBox="1"/>
           <p:nvPr/>
         </p:nvSpPr>
         <p:spPr>
           <a:xfrm>
-            <a:off x="1508760" y="3462528"/>
-            <a:ext cx="10134600" cy="411480"/>
+            <a:off x="8686800" y="2057400"/>
+            <a:ext cx="2926080" cy="548640"/>
           </a:xfrm>
           <a:prstGeom prst="rect">
             <a:avLst/>
@@ -13281,27 +11972,27 @@
           <a:p>
             <a:pPr algn="l"/>
             <a:r>
-              <a:rPr sz="1800" b="1">
+              <a:rPr sz="1500" b="1">
                 <a:solidFill>
                   <a:srgbClr val="9B1B30"/>
                 </a:solidFill>
                 <a:latin typeface="Calibri"/>
               </a:rPr>
-              <a:t>MAPE — error porcentual</a:t>
-            </a:r>
-          </a:p>
-        </p:txBody>
-      </p:sp>
-      <p:sp>
-        <p:nvSpPr>
-          <p:cNvPr id="11" name="TextBox 10"/>
+              <a:t>Lectura de negocio</a:t>
+            </a:r>
+          </a:p>
+        </p:txBody>
+      </p:sp>
+      <p:sp>
+        <p:nvSpPr>
+          <p:cNvPr id="8" name="TextBox 7"/>
           <p:cNvSpPr txBox="1"/>
           <p:nvPr/>
         </p:nvSpPr>
         <p:spPr>
           <a:xfrm>
-            <a:off x="1508760" y="3919728"/>
-            <a:ext cx="10134600" cy="883920"/>
+            <a:off x="7955279" y="2880360"/>
+            <a:ext cx="3657600" cy="3108960"/>
           </a:xfrm>
           <a:prstGeom prst="rect">
             <a:avLst/>
@@ -13316,99 +12007,31 @@
           <a:p>
             <a:pPr algn="l">
               <a:lnSpc>
-                <a:spcPct val="110000"/>
+                <a:spcPct val="125000"/>
               </a:lnSpc>
             </a:pPr>
             <a:r>
-              <a:rPr sz="1400" b="0">
+              <a:rPr sz="1500" b="0">
                 <a:solidFill>
                   <a:srgbClr val="2D2D2D"/>
                 </a:solidFill>
                 <a:latin typeface="Calibri"/>
               </a:rPr>
-              <a:t>Adimensional, pero diverge cuando el valor real se acerca a cero.</a:t>
-            </a:r>
-          </a:p>
-        </p:txBody>
-      </p:sp>
-      <p:sp>
-        <p:nvSpPr>
-          <p:cNvPr id="12" name="Oval 11"/>
-          <p:cNvSpPr/>
-          <p:nvPr/>
-        </p:nvSpPr>
-        <p:spPr>
-          <a:xfrm>
-            <a:off x="548640" y="5309616"/>
-            <a:ext cx="658368" cy="658368"/>
-          </a:xfrm>
-          <a:prstGeom prst="ellipse">
-            <a:avLst/>
-          </a:prstGeom>
-          <a:solidFill>
-            <a:srgbClr val="E4002B"/>
-          </a:solidFill>
-          <a:ln>
-            <a:noFill/>
-          </a:ln>
-          <a:effectLst/>
-        </p:spPr>
-        <p:style>
-          <a:lnRef idx="1">
-            <a:schemeClr val="accent1"/>
-          </a:lnRef>
-          <a:fillRef idx="3">
-            <a:schemeClr val="accent1"/>
-          </a:fillRef>
-          <a:effectRef idx="2">
-            <a:schemeClr val="accent1"/>
-          </a:effectRef>
-          <a:fontRef idx="minor">
-            <a:schemeClr val="lt1"/>
-          </a:fontRef>
-        </p:style>
-        <p:txBody>
-          <a:bodyPr rtlCol="0" anchor="ctr"/>
-          <a:lstStyle/>
-          <a:p>
-            <a:pPr algn="ctr"/>
-          </a:p>
-        </p:txBody>
-      </p:sp>
-      <p:pic>
-        <p:nvPicPr>
-          <p:cNvPr id="13" name="Picture 12" descr="circle-check__FFFFFF.png"/>
-          <p:cNvPicPr>
-            <a:picLocks noChangeAspect="1"/>
-          </p:cNvPicPr>
-          <p:nvPr/>
-        </p:nvPicPr>
-        <p:blipFill>
-          <a:blip r:embed="rId4"/>
-          <a:stretch>
-            <a:fillRect/>
-          </a:stretch>
-        </p:blipFill>
-        <p:spPr>
-          <a:xfrm>
-            <a:off x="732983" y="5493959"/>
-            <a:ext cx="289682" cy="289682"/>
-          </a:xfrm>
-          <a:prstGeom prst="rect">
-            <a:avLst/>
-          </a:prstGeom>
-        </p:spPr>
-      </p:pic>
-      <p:sp>
-        <p:nvSpPr>
-          <p:cNvPr id="14" name="TextBox 13"/>
+              <a:t>SARIMA (4,09 %) supera al seasonal-naive (5,78 %) y al ETS (5,50 %): es el campeón.</a:t>
+            </a:r>
+          </a:p>
+        </p:txBody>
+      </p:sp>
+      <p:sp>
+        <p:nvSpPr>
+          <p:cNvPr id="9" name="TextBox 8"/>
           <p:cNvSpPr txBox="1"/>
           <p:nvPr/>
         </p:nvSpPr>
         <p:spPr>
           <a:xfrm>
-            <a:off x="1508760" y="4986528"/>
-            <a:ext cx="10134600" cy="411480"/>
+            <a:off x="548640" y="5961888"/>
+            <a:ext cx="11094720" cy="292608"/>
           </a:xfrm>
           <a:prstGeom prst="rect">
             <a:avLst/>
@@ -13423,59 +12046,20 @@
           <a:p>
             <a:pPr algn="l"/>
             <a:r>
-              <a:rPr sz="1800" b="1">
-                <a:solidFill>
-                  <a:srgbClr val="9B1B30"/>
-                </a:solidFill>
-                <a:latin typeface="Calibri"/>
-              </a:rPr>
-              <a:t>sMAPE, simétrico (0 a 200 %)</a:t>
-            </a:r>
-          </a:p>
-        </p:txBody>
-      </p:sp>
-      <p:sp>
-        <p:nvSpPr>
-          <p:cNvPr id="15" name="TextBox 14"/>
-          <p:cNvSpPr txBox="1"/>
-          <p:nvPr/>
-        </p:nvSpPr>
-        <p:spPr>
-          <a:xfrm>
-            <a:off x="1508760" y="5443728"/>
-            <a:ext cx="10134600" cy="883920"/>
-          </a:xfrm>
-          <a:prstGeom prst="rect">
-            <a:avLst/>
-          </a:prstGeom>
-          <a:noFill/>
-        </p:spPr>
-        <p:txBody>
-          <a:bodyPr wrap="square" anchor="t" lIns="0" rIns="0" tIns="0" bIns="0">
-            <a:spAutoFit/>
-          </a:bodyPr>
-          <a:lstStyle/>
-          <a:p>
-            <a:pPr algn="l">
-              <a:lnSpc>
-                <a:spcPct val="110000"/>
-              </a:lnSpc>
-            </a:pPr>
-            <a:r>
-              <a:rPr sz="1400" b="0">
-                <a:solidFill>
-                  <a:srgbClr val="2D2D2D"/>
-                </a:solidFill>
-                <a:latin typeface="Calibri"/>
-              </a:rPr>
-              <a:t>Acota el denominador; es la métrica oficial de la competencia M4.</a:t>
-            </a:r>
-          </a:p>
-        </p:txBody>
-      </p:sp>
-      <p:sp>
-        <p:nvSpPr>
-          <p:cNvPr id="16" name="Rounded Rectangle 15"/>
+              <a:rPr sz="1000" b="0">
+                <a:solidFill>
+                  <a:srgbClr val="6E6E6E"/>
+                </a:solidFill>
+                <a:latin typeface="Calibri"/>
+              </a:rPr>
+              <a:t>Store Item Demand (Kaggle), rolling-origin (initial 36, horizon 6, step 6), recalculado en frío por _recomputar_backtest_store (dataset exclusivo del entregable desde el 13-14/09/2026, regla del usuario).</a:t>
+            </a:r>
+          </a:p>
+        </p:txBody>
+      </p:sp>
+      <p:sp>
+        <p:nvSpPr>
+          <p:cNvPr id="10" name="Rounded Rectangle 9"/>
           <p:cNvSpPr/>
           <p:nvPr/>
         </p:nvSpPr>
@@ -13523,14 +12107,14 @@
                 </a:solidFill>
                 <a:latin typeface="Calibri"/>
               </a:rPr>
-              <a:t>▶  Notebook, Sección 1.4, celda 14</a:t>
-            </a:r>
-          </a:p>
-        </p:txBody>
-      </p:sp>
-      <p:sp>
-        <p:nvSpPr>
-          <p:cNvPr id="17" name="Oval 16"/>
+              <a:t>▶  Entregable, Paso 11 (backtesting)</a:t>
+            </a:r>
+          </a:p>
+        </p:txBody>
+      </p:sp>
+      <p:sp>
+        <p:nvSpPr>
+          <p:cNvPr id="11" name="Oval 10"/>
           <p:cNvSpPr/>
           <p:nvPr/>
         </p:nvSpPr>
@@ -13574,7 +12158,7 @@
       </p:sp>
       <p:sp>
         <p:nvSpPr>
-          <p:cNvPr id="18" name="TextBox 17"/>
+          <p:cNvPr id="12" name="TextBox 11"/>
           <p:cNvSpPr txBox="1"/>
           <p:nvPr/>
         </p:nvSpPr>
@@ -13609,7 +12193,7 @@
       </p:sp>
       <p:sp>
         <p:nvSpPr>
-          <p:cNvPr id="19" name="TextBox 18"/>
+          <p:cNvPr id="13" name="TextBox 12"/>
           <p:cNvSpPr txBox="1"/>
           <p:nvPr/>
         </p:nvSpPr>
@@ -13637,7 +12221,7 @@
                 </a:solidFill>
                 <a:latin typeface="Calibri"/>
               </a:rPr>
-              <a:t>9 / 18</a:t>
+              <a:t>9 / 13</a:t>
             </a:r>
           </a:p>
         </p:txBody>
